--- a/nifi_architecture.pptx
+++ b/nifi_architecture.pptx
@@ -16,9 +16,15 @@
     <p:sldId id="264" r:id="rId10"/>
     <p:sldId id="265" r:id="rId11"/>
     <p:sldId id="266" r:id="rId12"/>
+    <p:sldId id="267" r:id="rId13"/>
+    <p:sldId id="268" r:id="rId14"/>
+    <p:sldId id="269" r:id="rId15"/>
+    <p:sldId id="270" r:id="rId16"/>
+    <p:sldId id="271" r:id="rId17"/>
+    <p:sldId id="272" r:id="rId18"/>
   </p:sldIdLst>
   <p:notesMasterIdLst>
-    <p:notesMasterId r:id="rId13"/>
+    <p:notesMasterId r:id="rId19"/>
   </p:notesMasterIdLst>
   <p:sldSz cx="9144000" cy="5143500"/>
   <p:notesSz cx="5143500" cy="9144000"/>
@@ -730,6 +736,534 @@
 </p:notes>
 </file>
 
+<file path=ppt/notesSlides/notesSlide12.xml><?xml version="1.0" encoding="utf-8"?>
+<p:notes xmlns:a="http://schemas.openxmlformats.org/drawingml/2006/main" xmlns:r="http://schemas.openxmlformats.org/officeDocument/2006/relationships" xmlns:p="http://schemas.openxmlformats.org/presentationml/2006/main">
+  <p:cSld>
+    <p:spTree>
+      <p:nvGrpSpPr>
+        <p:cNvPr id="1" name=""/>
+        <p:cNvGrpSpPr/>
+        <p:nvPr/>
+      </p:nvGrpSpPr>
+      <p:grpSpPr>
+        <a:xfrm>
+          <a:off x="0" y="0"/>
+          <a:ext cx="0" cy="0"/>
+          <a:chOff x="0" y="0"/>
+          <a:chExt cx="0" cy="0"/>
+        </a:xfrm>
+      </p:grpSpPr>
+      <p:sp>
+        <p:nvSpPr>
+          <p:cNvPr id="2" name="Slide Image Placeholder 1"/>
+          <p:cNvSpPr>
+            <a:spLocks noGrp="1" noRot="1" noChangeAspect="1"/>
+          </p:cNvSpPr>
+          <p:nvPr>
+            <p:ph type="sldImg"/>
+          </p:nvPr>
+        </p:nvSpPr>
+        <p:spPr/>
+      </p:sp>
+      <p:sp>
+        <p:nvSpPr>
+          <p:cNvPr id="3" name="Notes Placeholder 2"/>
+          <p:cNvSpPr>
+            <a:spLocks noGrp="1"/>
+          </p:cNvSpPr>
+          <p:nvPr>
+            <p:ph type="body" idx="1"/>
+          </p:nvPr>
+        </p:nvSpPr>
+        <p:spPr/>
+        <p:txBody>
+          <a:bodyPr/>
+          <a:lstStyle/>
+          <a:p>
+            <a:r>
+              <a:rPr lang="en-US" dirty="0"/>
+              <a:t/>
+            </a:r>
+            <a:endParaRPr lang="en-US" dirty="0"/>
+          </a:p>
+        </p:txBody>
+      </p:sp>
+      <p:sp>
+        <p:nvSpPr>
+          <p:cNvPr id="4" name="Slide Number Placeholder 3"/>
+          <p:cNvSpPr>
+            <a:spLocks noGrp="1"/>
+          </p:cNvSpPr>
+          <p:nvPr>
+            <p:ph type="sldNum" sz="quarter" idx="10"/>
+          </p:nvPr>
+        </p:nvSpPr>
+        <p:spPr/>
+        <p:txBody>
+          <a:bodyPr/>
+          <a:lstStyle/>
+          <a:p>
+            <a:fld id="{F7021451-1387-4CA6-816F-3879F97B5CBC}" type="slidenum">
+              <a:rPr lang="en-US"/>
+              <a:t>12</a:t>
+            </a:fld>
+            <a:endParaRPr lang="en-US"/>
+          </a:p>
+        </p:txBody>
+      </p:sp>
+    </p:spTree>
+    <p:extLst>
+      <p:ext uri="{BB962C8B-B14F-4D97-AF65-F5344CB8AC3E}">
+        <p14:creationId xmlns:p14="http://schemas.microsoft.com/office/powerpoint/2010/main" val="1024086991"/>
+      </p:ext>
+    </p:extLst>
+  </p:cSld>
+  <p:clrMapOvr>
+    <a:masterClrMapping/>
+  </p:clrMapOvr>
+</p:notes>
+</file>
+
+<file path=ppt/notesSlides/notesSlide13.xml><?xml version="1.0" encoding="utf-8"?>
+<p:notes xmlns:a="http://schemas.openxmlformats.org/drawingml/2006/main" xmlns:r="http://schemas.openxmlformats.org/officeDocument/2006/relationships" xmlns:p="http://schemas.openxmlformats.org/presentationml/2006/main">
+  <p:cSld>
+    <p:spTree>
+      <p:nvGrpSpPr>
+        <p:cNvPr id="1" name=""/>
+        <p:cNvGrpSpPr/>
+        <p:nvPr/>
+      </p:nvGrpSpPr>
+      <p:grpSpPr>
+        <a:xfrm>
+          <a:off x="0" y="0"/>
+          <a:ext cx="0" cy="0"/>
+          <a:chOff x="0" y="0"/>
+          <a:chExt cx="0" cy="0"/>
+        </a:xfrm>
+      </p:grpSpPr>
+      <p:sp>
+        <p:nvSpPr>
+          <p:cNvPr id="2" name="Slide Image Placeholder 1"/>
+          <p:cNvSpPr>
+            <a:spLocks noGrp="1" noRot="1" noChangeAspect="1"/>
+          </p:cNvSpPr>
+          <p:nvPr>
+            <p:ph type="sldImg"/>
+          </p:nvPr>
+        </p:nvSpPr>
+        <p:spPr/>
+      </p:sp>
+      <p:sp>
+        <p:nvSpPr>
+          <p:cNvPr id="3" name="Notes Placeholder 2"/>
+          <p:cNvSpPr>
+            <a:spLocks noGrp="1"/>
+          </p:cNvSpPr>
+          <p:nvPr>
+            <p:ph type="body" idx="1"/>
+          </p:nvPr>
+        </p:nvSpPr>
+        <p:spPr/>
+        <p:txBody>
+          <a:bodyPr/>
+          <a:lstStyle/>
+          <a:p>
+            <a:r>
+              <a:rPr lang="en-US" dirty="0"/>
+              <a:t/>
+            </a:r>
+            <a:endParaRPr lang="en-US" dirty="0"/>
+          </a:p>
+        </p:txBody>
+      </p:sp>
+      <p:sp>
+        <p:nvSpPr>
+          <p:cNvPr id="4" name="Slide Number Placeholder 3"/>
+          <p:cNvSpPr>
+            <a:spLocks noGrp="1"/>
+          </p:cNvSpPr>
+          <p:nvPr>
+            <p:ph type="sldNum" sz="quarter" idx="10"/>
+          </p:nvPr>
+        </p:nvSpPr>
+        <p:spPr/>
+        <p:txBody>
+          <a:bodyPr/>
+          <a:lstStyle/>
+          <a:p>
+            <a:fld id="{F7021451-1387-4CA6-816F-3879F97B5CBC}" type="slidenum">
+              <a:rPr lang="en-US"/>
+              <a:t>13</a:t>
+            </a:fld>
+            <a:endParaRPr lang="en-US"/>
+          </a:p>
+        </p:txBody>
+      </p:sp>
+    </p:spTree>
+    <p:extLst>
+      <p:ext uri="{BB962C8B-B14F-4D97-AF65-F5344CB8AC3E}">
+        <p14:creationId xmlns:p14="http://schemas.microsoft.com/office/powerpoint/2010/main" val="1024086991"/>
+      </p:ext>
+    </p:extLst>
+  </p:cSld>
+  <p:clrMapOvr>
+    <a:masterClrMapping/>
+  </p:clrMapOvr>
+</p:notes>
+</file>
+
+<file path=ppt/notesSlides/notesSlide14.xml><?xml version="1.0" encoding="utf-8"?>
+<p:notes xmlns:a="http://schemas.openxmlformats.org/drawingml/2006/main" xmlns:r="http://schemas.openxmlformats.org/officeDocument/2006/relationships" xmlns:p="http://schemas.openxmlformats.org/presentationml/2006/main">
+  <p:cSld>
+    <p:spTree>
+      <p:nvGrpSpPr>
+        <p:cNvPr id="1" name=""/>
+        <p:cNvGrpSpPr/>
+        <p:nvPr/>
+      </p:nvGrpSpPr>
+      <p:grpSpPr>
+        <a:xfrm>
+          <a:off x="0" y="0"/>
+          <a:ext cx="0" cy="0"/>
+          <a:chOff x="0" y="0"/>
+          <a:chExt cx="0" cy="0"/>
+        </a:xfrm>
+      </p:grpSpPr>
+      <p:sp>
+        <p:nvSpPr>
+          <p:cNvPr id="2" name="Slide Image Placeholder 1"/>
+          <p:cNvSpPr>
+            <a:spLocks noGrp="1" noRot="1" noChangeAspect="1"/>
+          </p:cNvSpPr>
+          <p:nvPr>
+            <p:ph type="sldImg"/>
+          </p:nvPr>
+        </p:nvSpPr>
+        <p:spPr/>
+      </p:sp>
+      <p:sp>
+        <p:nvSpPr>
+          <p:cNvPr id="3" name="Notes Placeholder 2"/>
+          <p:cNvSpPr>
+            <a:spLocks noGrp="1"/>
+          </p:cNvSpPr>
+          <p:nvPr>
+            <p:ph type="body" idx="1"/>
+          </p:nvPr>
+        </p:nvSpPr>
+        <p:spPr/>
+        <p:txBody>
+          <a:bodyPr/>
+          <a:lstStyle/>
+          <a:p>
+            <a:r>
+              <a:rPr lang="en-US" dirty="0"/>
+              <a:t/>
+            </a:r>
+            <a:endParaRPr lang="en-US" dirty="0"/>
+          </a:p>
+        </p:txBody>
+      </p:sp>
+      <p:sp>
+        <p:nvSpPr>
+          <p:cNvPr id="4" name="Slide Number Placeholder 3"/>
+          <p:cNvSpPr>
+            <a:spLocks noGrp="1"/>
+          </p:cNvSpPr>
+          <p:nvPr>
+            <p:ph type="sldNum" sz="quarter" idx="10"/>
+          </p:nvPr>
+        </p:nvSpPr>
+        <p:spPr/>
+        <p:txBody>
+          <a:bodyPr/>
+          <a:lstStyle/>
+          <a:p>
+            <a:fld id="{F7021451-1387-4CA6-816F-3879F97B5CBC}" type="slidenum">
+              <a:rPr lang="en-US"/>
+              <a:t>14</a:t>
+            </a:fld>
+            <a:endParaRPr lang="en-US"/>
+          </a:p>
+        </p:txBody>
+      </p:sp>
+    </p:spTree>
+    <p:extLst>
+      <p:ext uri="{BB962C8B-B14F-4D97-AF65-F5344CB8AC3E}">
+        <p14:creationId xmlns:p14="http://schemas.microsoft.com/office/powerpoint/2010/main" val="1024086991"/>
+      </p:ext>
+    </p:extLst>
+  </p:cSld>
+  <p:clrMapOvr>
+    <a:masterClrMapping/>
+  </p:clrMapOvr>
+</p:notes>
+</file>
+
+<file path=ppt/notesSlides/notesSlide15.xml><?xml version="1.0" encoding="utf-8"?>
+<p:notes xmlns:a="http://schemas.openxmlformats.org/drawingml/2006/main" xmlns:r="http://schemas.openxmlformats.org/officeDocument/2006/relationships" xmlns:p="http://schemas.openxmlformats.org/presentationml/2006/main">
+  <p:cSld>
+    <p:spTree>
+      <p:nvGrpSpPr>
+        <p:cNvPr id="1" name=""/>
+        <p:cNvGrpSpPr/>
+        <p:nvPr/>
+      </p:nvGrpSpPr>
+      <p:grpSpPr>
+        <a:xfrm>
+          <a:off x="0" y="0"/>
+          <a:ext cx="0" cy="0"/>
+          <a:chOff x="0" y="0"/>
+          <a:chExt cx="0" cy="0"/>
+        </a:xfrm>
+      </p:grpSpPr>
+      <p:sp>
+        <p:nvSpPr>
+          <p:cNvPr id="2" name="Slide Image Placeholder 1"/>
+          <p:cNvSpPr>
+            <a:spLocks noGrp="1" noRot="1" noChangeAspect="1"/>
+          </p:cNvSpPr>
+          <p:nvPr>
+            <p:ph type="sldImg"/>
+          </p:nvPr>
+        </p:nvSpPr>
+        <p:spPr/>
+      </p:sp>
+      <p:sp>
+        <p:nvSpPr>
+          <p:cNvPr id="3" name="Notes Placeholder 2"/>
+          <p:cNvSpPr>
+            <a:spLocks noGrp="1"/>
+          </p:cNvSpPr>
+          <p:nvPr>
+            <p:ph type="body" idx="1"/>
+          </p:nvPr>
+        </p:nvSpPr>
+        <p:spPr/>
+        <p:txBody>
+          <a:bodyPr/>
+          <a:lstStyle/>
+          <a:p>
+            <a:r>
+              <a:rPr lang="en-US" dirty="0"/>
+              <a:t/>
+            </a:r>
+            <a:endParaRPr lang="en-US" dirty="0"/>
+          </a:p>
+        </p:txBody>
+      </p:sp>
+      <p:sp>
+        <p:nvSpPr>
+          <p:cNvPr id="4" name="Slide Number Placeholder 3"/>
+          <p:cNvSpPr>
+            <a:spLocks noGrp="1"/>
+          </p:cNvSpPr>
+          <p:nvPr>
+            <p:ph type="sldNum" sz="quarter" idx="10"/>
+          </p:nvPr>
+        </p:nvSpPr>
+        <p:spPr/>
+        <p:txBody>
+          <a:bodyPr/>
+          <a:lstStyle/>
+          <a:p>
+            <a:fld id="{F7021451-1387-4CA6-816F-3879F97B5CBC}" type="slidenum">
+              <a:rPr lang="en-US"/>
+              <a:t>15</a:t>
+            </a:fld>
+            <a:endParaRPr lang="en-US"/>
+          </a:p>
+        </p:txBody>
+      </p:sp>
+    </p:spTree>
+    <p:extLst>
+      <p:ext uri="{BB962C8B-B14F-4D97-AF65-F5344CB8AC3E}">
+        <p14:creationId xmlns:p14="http://schemas.microsoft.com/office/powerpoint/2010/main" val="1024086991"/>
+      </p:ext>
+    </p:extLst>
+  </p:cSld>
+  <p:clrMapOvr>
+    <a:masterClrMapping/>
+  </p:clrMapOvr>
+</p:notes>
+</file>
+
+<file path=ppt/notesSlides/notesSlide16.xml><?xml version="1.0" encoding="utf-8"?>
+<p:notes xmlns:a="http://schemas.openxmlformats.org/drawingml/2006/main" xmlns:r="http://schemas.openxmlformats.org/officeDocument/2006/relationships" xmlns:p="http://schemas.openxmlformats.org/presentationml/2006/main">
+  <p:cSld>
+    <p:spTree>
+      <p:nvGrpSpPr>
+        <p:cNvPr id="1" name=""/>
+        <p:cNvGrpSpPr/>
+        <p:nvPr/>
+      </p:nvGrpSpPr>
+      <p:grpSpPr>
+        <a:xfrm>
+          <a:off x="0" y="0"/>
+          <a:ext cx="0" cy="0"/>
+          <a:chOff x="0" y="0"/>
+          <a:chExt cx="0" cy="0"/>
+        </a:xfrm>
+      </p:grpSpPr>
+      <p:sp>
+        <p:nvSpPr>
+          <p:cNvPr id="2" name="Slide Image Placeholder 1"/>
+          <p:cNvSpPr>
+            <a:spLocks noGrp="1" noRot="1" noChangeAspect="1"/>
+          </p:cNvSpPr>
+          <p:nvPr>
+            <p:ph type="sldImg"/>
+          </p:nvPr>
+        </p:nvSpPr>
+        <p:spPr/>
+      </p:sp>
+      <p:sp>
+        <p:nvSpPr>
+          <p:cNvPr id="3" name="Notes Placeholder 2"/>
+          <p:cNvSpPr>
+            <a:spLocks noGrp="1"/>
+          </p:cNvSpPr>
+          <p:nvPr>
+            <p:ph type="body" idx="1"/>
+          </p:nvPr>
+        </p:nvSpPr>
+        <p:spPr/>
+        <p:txBody>
+          <a:bodyPr/>
+          <a:lstStyle/>
+          <a:p>
+            <a:r>
+              <a:rPr lang="en-US" dirty="0"/>
+              <a:t/>
+            </a:r>
+            <a:endParaRPr lang="en-US" dirty="0"/>
+          </a:p>
+        </p:txBody>
+      </p:sp>
+      <p:sp>
+        <p:nvSpPr>
+          <p:cNvPr id="4" name="Slide Number Placeholder 3"/>
+          <p:cNvSpPr>
+            <a:spLocks noGrp="1"/>
+          </p:cNvSpPr>
+          <p:nvPr>
+            <p:ph type="sldNum" sz="quarter" idx="10"/>
+          </p:nvPr>
+        </p:nvSpPr>
+        <p:spPr/>
+        <p:txBody>
+          <a:bodyPr/>
+          <a:lstStyle/>
+          <a:p>
+            <a:fld id="{F7021451-1387-4CA6-816F-3879F97B5CBC}" type="slidenum">
+              <a:rPr lang="en-US"/>
+              <a:t>16</a:t>
+            </a:fld>
+            <a:endParaRPr lang="en-US"/>
+          </a:p>
+        </p:txBody>
+      </p:sp>
+    </p:spTree>
+    <p:extLst>
+      <p:ext uri="{BB962C8B-B14F-4D97-AF65-F5344CB8AC3E}">
+        <p14:creationId xmlns:p14="http://schemas.microsoft.com/office/powerpoint/2010/main" val="1024086991"/>
+      </p:ext>
+    </p:extLst>
+  </p:cSld>
+  <p:clrMapOvr>
+    <a:masterClrMapping/>
+  </p:clrMapOvr>
+</p:notes>
+</file>
+
+<file path=ppt/notesSlides/notesSlide17.xml><?xml version="1.0" encoding="utf-8"?>
+<p:notes xmlns:a="http://schemas.openxmlformats.org/drawingml/2006/main" xmlns:r="http://schemas.openxmlformats.org/officeDocument/2006/relationships" xmlns:p="http://schemas.openxmlformats.org/presentationml/2006/main">
+  <p:cSld>
+    <p:spTree>
+      <p:nvGrpSpPr>
+        <p:cNvPr id="1" name=""/>
+        <p:cNvGrpSpPr/>
+        <p:nvPr/>
+      </p:nvGrpSpPr>
+      <p:grpSpPr>
+        <a:xfrm>
+          <a:off x="0" y="0"/>
+          <a:ext cx="0" cy="0"/>
+          <a:chOff x="0" y="0"/>
+          <a:chExt cx="0" cy="0"/>
+        </a:xfrm>
+      </p:grpSpPr>
+      <p:sp>
+        <p:nvSpPr>
+          <p:cNvPr id="2" name="Slide Image Placeholder 1"/>
+          <p:cNvSpPr>
+            <a:spLocks noGrp="1" noRot="1" noChangeAspect="1"/>
+          </p:cNvSpPr>
+          <p:nvPr>
+            <p:ph type="sldImg"/>
+          </p:nvPr>
+        </p:nvSpPr>
+        <p:spPr/>
+      </p:sp>
+      <p:sp>
+        <p:nvSpPr>
+          <p:cNvPr id="3" name="Notes Placeholder 2"/>
+          <p:cNvSpPr>
+            <a:spLocks noGrp="1"/>
+          </p:cNvSpPr>
+          <p:nvPr>
+            <p:ph type="body" idx="1"/>
+          </p:nvPr>
+        </p:nvSpPr>
+        <p:spPr/>
+        <p:txBody>
+          <a:bodyPr/>
+          <a:lstStyle/>
+          <a:p>
+            <a:r>
+              <a:rPr lang="en-US" dirty="0"/>
+              <a:t/>
+            </a:r>
+            <a:endParaRPr lang="en-US" dirty="0"/>
+          </a:p>
+        </p:txBody>
+      </p:sp>
+      <p:sp>
+        <p:nvSpPr>
+          <p:cNvPr id="4" name="Slide Number Placeholder 3"/>
+          <p:cNvSpPr>
+            <a:spLocks noGrp="1"/>
+          </p:cNvSpPr>
+          <p:nvPr>
+            <p:ph type="sldNum" sz="quarter" idx="10"/>
+          </p:nvPr>
+        </p:nvSpPr>
+        <p:spPr/>
+        <p:txBody>
+          <a:bodyPr/>
+          <a:lstStyle/>
+          <a:p>
+            <a:fld id="{F7021451-1387-4CA6-816F-3879F97B5CBC}" type="slidenum">
+              <a:rPr lang="en-US"/>
+              <a:t>17</a:t>
+            </a:fld>
+            <a:endParaRPr lang="en-US"/>
+          </a:p>
+        </p:txBody>
+      </p:sp>
+    </p:spTree>
+    <p:extLst>
+      <p:ext uri="{BB962C8B-B14F-4D97-AF65-F5344CB8AC3E}">
+        <p14:creationId xmlns:p14="http://schemas.microsoft.com/office/powerpoint/2010/main" val="1024086991"/>
+      </p:ext>
+    </p:extLst>
+  </p:cSld>
+  <p:clrMapOvr>
+    <a:masterClrMapping/>
+  </p:clrMapOvr>
+</p:notes>
+</file>
+
 <file path=ppt/notesSlides/notesSlide2.xml><?xml version="1.0" encoding="utf-8"?>
 <p:notes xmlns:a="http://schemas.openxmlformats.org/drawingml/2006/main" xmlns:r="http://schemas.openxmlformats.org/officeDocument/2006/relationships" xmlns:p="http://schemas.openxmlformats.org/presentationml/2006/main">
   <p:cSld>
@@ -4402,6 +4936,7495 @@
               <a:t>L'isolation vaut toujours le coût de la duplication en production.</a:t>
             </a:r>
             <a:endParaRPr lang="en-US" sz="1300" dirty="0"/>
+          </a:p>
+        </p:txBody>
+      </p:sp>
+    </p:spTree>
+  </p:cSld>
+  <p:clrMapOvr>
+    <a:masterClrMapping/>
+  </p:clrMapOvr>
+</p:sld>
+</file>
+
+<file path=ppt/slides/slide12.xml><?xml version="1.0" encoding="utf-8"?>
+<p:sld xmlns:a="http://schemas.openxmlformats.org/drawingml/2006/main" xmlns:r="http://schemas.openxmlformats.org/officeDocument/2006/relationships" xmlns:p="http://schemas.openxmlformats.org/presentationml/2006/main">
+  <p:cSld name="Slide 12">
+    <p:bg>
+      <p:bgPr>
+        <a:solidFill>
+          <a:srgbClr val="F0F4F8"/>
+        </a:solidFill>
+      </p:bgPr>
+    </p:bg>
+    <p:spTree>
+      <p:nvGrpSpPr>
+        <p:cNvPr id="1" name=""/>
+        <p:cNvGrpSpPr/>
+        <p:nvPr/>
+      </p:nvGrpSpPr>
+      <p:grpSpPr>
+        <a:xfrm>
+          <a:off x="0" y="0"/>
+          <a:ext cx="0" cy="0"/>
+          <a:chOff x="0" y="0"/>
+          <a:chExt cx="0" cy="0"/>
+        </a:xfrm>
+      </p:grpSpPr>
+      <p:sp>
+        <p:nvSpPr>
+          <p:cNvPr id="2" name="Shape 0"/>
+          <p:cNvSpPr/>
+          <p:nvPr/>
+        </p:nvSpPr>
+        <p:spPr>
+          <a:xfrm>
+            <a:off x="0" y="0"/>
+            <a:ext cx="9144000" cy="685800"/>
+          </a:xfrm>
+          <a:prstGeom prst="rect">
+            <a:avLst/>
+          </a:prstGeom>
+          <a:solidFill>
+            <a:srgbClr val="021B3A"/>
+          </a:solidFill>
+          <a:ln/>
+        </p:spPr>
+      </p:sp>
+      <p:sp>
+        <p:nvSpPr>
+          <p:cNvPr id="3" name="Shape 1"/>
+          <p:cNvSpPr/>
+          <p:nvPr/>
+        </p:nvSpPr>
+        <p:spPr>
+          <a:xfrm>
+            <a:off x="0" y="0"/>
+            <a:ext cx="164592" cy="685800"/>
+          </a:xfrm>
+          <a:prstGeom prst="rect">
+            <a:avLst/>
+          </a:prstGeom>
+          <a:solidFill>
+            <a:srgbClr val="DD6B20"/>
+          </a:solidFill>
+          <a:ln/>
+        </p:spPr>
+      </p:sp>
+      <p:sp>
+        <p:nvSpPr>
+          <p:cNvPr id="4" name="Text 2"/>
+          <p:cNvSpPr/>
+          <p:nvPr/>
+        </p:nvSpPr>
+        <p:spPr>
+          <a:xfrm>
+            <a:off x="365760" y="73152"/>
+            <a:ext cx="8229600" cy="548640"/>
+          </a:xfrm>
+          <a:prstGeom prst="rect">
+            <a:avLst/>
+          </a:prstGeom>
+          <a:noFill/>
+          <a:ln/>
+        </p:spPr>
+        <p:txBody>
+          <a:bodyPr wrap="square" lIns="0" tIns="0" rIns="0" bIns="0" rtlCol="0" anchor="ctr"/>
+          <a:lstStyle/>
+          <a:p>
+            <a:pPr indent="0" marL="0">
+              <a:buNone/>
+            </a:pPr>
+            <a:r>
+              <a:rPr lang="en-US" sz="2400" b="1" dirty="0">
+                <a:solidFill>
+                  <a:srgbClr val="FFFFFF"/>
+                </a:solidFill>
+                <a:latin typeface="Calibri" pitchFamily="34" charset="0"/>
+                <a:ea typeface="Calibri" pitchFamily="34" charset="-122"/>
+                <a:cs typeface="Calibri" pitchFamily="34" charset="-120"/>
+              </a:rPr>
+              <a:t>Exposer les PG Communs en API ?</a:t>
+            </a:r>
+            <a:endParaRPr lang="en-US" sz="2400" dirty="0"/>
+          </a:p>
+        </p:txBody>
+      </p:sp>
+      <p:sp>
+        <p:nvSpPr>
+          <p:cNvPr id="5" name="Shape 3"/>
+          <p:cNvSpPr/>
+          <p:nvPr/>
+        </p:nvSpPr>
+        <p:spPr>
+          <a:xfrm>
+            <a:off x="274320" y="804672"/>
+            <a:ext cx="8595360" cy="384048"/>
+          </a:xfrm>
+          <a:prstGeom prst="rect">
+            <a:avLst/>
+          </a:prstGeom>
+          <a:solidFill>
+            <a:srgbClr val="DD6B20">
+              <a:alpha val="15000"/>
+            </a:srgbClr>
+          </a:solidFill>
+          <a:ln/>
+        </p:spPr>
+      </p:sp>
+      <p:sp>
+        <p:nvSpPr>
+          <p:cNvPr id="6" name="Shape 4"/>
+          <p:cNvSpPr/>
+          <p:nvPr/>
+        </p:nvSpPr>
+        <p:spPr>
+          <a:xfrm>
+            <a:off x="274320" y="804672"/>
+            <a:ext cx="64008" cy="384048"/>
+          </a:xfrm>
+          <a:prstGeom prst="rect">
+            <a:avLst/>
+          </a:prstGeom>
+          <a:solidFill>
+            <a:srgbClr val="DD6B20"/>
+          </a:solidFill>
+          <a:ln/>
+        </p:spPr>
+      </p:sp>
+      <p:sp>
+        <p:nvSpPr>
+          <p:cNvPr id="7" name="Text 5"/>
+          <p:cNvSpPr/>
+          <p:nvPr/>
+        </p:nvSpPr>
+        <p:spPr>
+          <a:xfrm>
+            <a:off x="411480" y="822960"/>
+            <a:ext cx="8321040" cy="347472"/>
+          </a:xfrm>
+          <a:prstGeom prst="rect">
+            <a:avLst/>
+          </a:prstGeom>
+          <a:noFill/>
+          <a:ln/>
+        </p:spPr>
+        <p:txBody>
+          <a:bodyPr wrap="square" lIns="0" tIns="0" rIns="0" bIns="0" rtlCol="0" anchor="ctr"/>
+          <a:lstStyle/>
+          <a:p>
+            <a:pPr indent="0" marL="0">
+              <a:buNone/>
+            </a:pPr>
+            <a:r>
+              <a:rPr lang="en-US" sz="1200" i="1" dirty="0">
+                <a:solidFill>
+                  <a:srgbClr val="021B3A"/>
+                </a:solidFill>
+                <a:latin typeface="Calibri" pitchFamily="34" charset="0"/>
+                <a:ea typeface="Calibri" pitchFamily="34" charset="-122"/>
+                <a:cs typeface="Calibri" pitchFamily="34" charset="-120"/>
+              </a:rPr>
+              <a:t>L'idée : transformer chaque PG commun en "service" appelé via HTTP par les pipelines (style microservices)</a:t>
+            </a:r>
+            <a:endParaRPr lang="en-US" sz="1200" dirty="0"/>
+          </a:p>
+        </p:txBody>
+      </p:sp>
+      <p:sp>
+        <p:nvSpPr>
+          <p:cNvPr id="8" name="Shape 6"/>
+          <p:cNvSpPr/>
+          <p:nvPr/>
+        </p:nvSpPr>
+        <p:spPr>
+          <a:xfrm>
+            <a:off x="274320" y="1298448"/>
+            <a:ext cx="8595360" cy="2103120"/>
+          </a:xfrm>
+          <a:prstGeom prst="rect">
+            <a:avLst/>
+          </a:prstGeom>
+          <a:solidFill>
+            <a:srgbClr val="FFFFFF"/>
+          </a:solidFill>
+          <a:ln/>
+          <a:effectLst>
+            <a:outerShdw sx="100000" sy="100000" kx="0" ky="0" algn="bl" rotWithShape="0" blurRad="101600" dist="38100" dir="8100000">
+              <a:srgbClr val="000000">
+                <a:alpha val="12000"/>
+              </a:srgbClr>
+            </a:outerShdw>
+          </a:effectLst>
+        </p:spPr>
+      </p:sp>
+      <p:sp>
+        <p:nvSpPr>
+          <p:cNvPr id="9" name="Shape 7"/>
+          <p:cNvSpPr/>
+          <p:nvPr/>
+        </p:nvSpPr>
+        <p:spPr>
+          <a:xfrm>
+            <a:off x="274320" y="1298448"/>
+            <a:ext cx="8595360" cy="320040"/>
+          </a:xfrm>
+          <a:prstGeom prst="rect">
+            <a:avLst/>
+          </a:prstGeom>
+          <a:solidFill>
+            <a:srgbClr val="021B3A"/>
+          </a:solidFill>
+          <a:ln/>
+        </p:spPr>
+      </p:sp>
+      <p:sp>
+        <p:nvSpPr>
+          <p:cNvPr id="10" name="Text 8"/>
+          <p:cNvSpPr/>
+          <p:nvPr/>
+        </p:nvSpPr>
+        <p:spPr>
+          <a:xfrm>
+            <a:off x="320040" y="1298448"/>
+            <a:ext cx="8503920" cy="320040"/>
+          </a:xfrm>
+          <a:prstGeom prst="rect">
+            <a:avLst/>
+          </a:prstGeom>
+          <a:noFill/>
+          <a:ln/>
+        </p:spPr>
+        <p:txBody>
+          <a:bodyPr wrap="square" lIns="0" tIns="0" rIns="0" bIns="0" rtlCol="0" anchor="ctr"/>
+          <a:lstStyle/>
+          <a:p>
+            <a:pPr indent="0" marL="0">
+              <a:buNone/>
+            </a:pPr>
+            <a:r>
+              <a:rPr lang="en-US" sz="1200" b="1" dirty="0">
+                <a:solidFill>
+                  <a:srgbClr val="FFFFFF"/>
+                </a:solidFill>
+                <a:latin typeface="Calibri" pitchFamily="34" charset="0"/>
+                <a:ea typeface="Calibri" pitchFamily="34" charset="-122"/>
+                <a:cs typeface="Calibri" pitchFamily="34" charset="-120"/>
+              </a:rPr>
+              <a:t>L'idée en théorie</a:t>
+            </a:r>
+            <a:endParaRPr lang="en-US" sz="1200" dirty="0"/>
+          </a:p>
+        </p:txBody>
+      </p:sp>
+      <p:sp>
+        <p:nvSpPr>
+          <p:cNvPr id="11" name="Shape 9"/>
+          <p:cNvSpPr/>
+          <p:nvPr/>
+        </p:nvSpPr>
+        <p:spPr>
+          <a:xfrm>
+            <a:off x="457200" y="1755648"/>
+            <a:ext cx="1645920" cy="301752"/>
+          </a:xfrm>
+          <a:prstGeom prst="rect">
+            <a:avLst/>
+          </a:prstGeom>
+          <a:solidFill>
+            <a:srgbClr val="065A82"/>
+          </a:solidFill>
+          <a:ln/>
+          <a:effectLst>
+            <a:outerShdw sx="100000" sy="100000" kx="0" ky="0" algn="bl" rotWithShape="0" blurRad="101600" dist="38100" dir="8100000">
+              <a:srgbClr val="000000">
+                <a:alpha val="12000"/>
+              </a:srgbClr>
+            </a:outerShdw>
+          </a:effectLst>
+        </p:spPr>
+      </p:sp>
+      <p:sp>
+        <p:nvSpPr>
+          <p:cNvPr id="12" name="Text 10"/>
+          <p:cNvSpPr/>
+          <p:nvPr/>
+        </p:nvSpPr>
+        <p:spPr>
+          <a:xfrm>
+            <a:off x="457200" y="1755648"/>
+            <a:ext cx="1645920" cy="301752"/>
+          </a:xfrm>
+          <a:prstGeom prst="rect">
+            <a:avLst/>
+          </a:prstGeom>
+          <a:noFill/>
+          <a:ln/>
+        </p:spPr>
+        <p:txBody>
+          <a:bodyPr wrap="square" lIns="0" tIns="0" rIns="0" bIns="0" rtlCol="0" anchor="ctr"/>
+          <a:lstStyle/>
+          <a:p>
+            <a:pPr algn="ctr" indent="0" marL="0">
+              <a:buNone/>
+            </a:pPr>
+            <a:r>
+              <a:rPr lang="en-US" sz="1100" b="1" dirty="0">
+                <a:solidFill>
+                  <a:srgbClr val="FFFFFF"/>
+                </a:solidFill>
+                <a:latin typeface="Calibri" pitchFamily="34" charset="0"/>
+                <a:ea typeface="Calibri" pitchFamily="34" charset="-122"/>
+                <a:cs typeface="Calibri" pitchFamily="34" charset="-120"/>
+              </a:rPr>
+              <a:t>Pipeline A</a:t>
+            </a:r>
+            <a:endParaRPr lang="en-US" sz="1100" dirty="0"/>
+          </a:p>
+        </p:txBody>
+      </p:sp>
+      <p:sp>
+        <p:nvSpPr>
+          <p:cNvPr id="13" name="Shape 11"/>
+          <p:cNvSpPr/>
+          <p:nvPr/>
+        </p:nvSpPr>
+        <p:spPr>
+          <a:xfrm>
+            <a:off x="2103120" y="1901952"/>
+            <a:ext cx="1371600" cy="0"/>
+          </a:xfrm>
+          <a:prstGeom prst="line">
+            <a:avLst/>
+          </a:prstGeom>
+          <a:noFill/>
+          <a:ln w="25400">
+            <a:solidFill>
+              <a:srgbClr val="DD6B20"/>
+            </a:solidFill>
+            <a:prstDash val="solid"/>
+          </a:ln>
+        </p:spPr>
+      </p:sp>
+      <p:sp>
+        <p:nvSpPr>
+          <p:cNvPr id="14" name="Text 12"/>
+          <p:cNvSpPr/>
+          <p:nvPr/>
+        </p:nvSpPr>
+        <p:spPr>
+          <a:xfrm>
+            <a:off x="2121408" y="1755648"/>
+            <a:ext cx="1335024" cy="274320"/>
+          </a:xfrm>
+          <a:prstGeom prst="rect">
+            <a:avLst/>
+          </a:prstGeom>
+          <a:noFill/>
+          <a:ln/>
+        </p:spPr>
+        <p:txBody>
+          <a:bodyPr wrap="square" lIns="0" tIns="0" rIns="0" bIns="0" rtlCol="0" anchor="ctr"/>
+          <a:lstStyle/>
+          <a:p>
+            <a:pPr algn="ctr" indent="0" marL="0">
+              <a:buNone/>
+            </a:pPr>
+            <a:r>
+              <a:rPr lang="en-US" sz="800" dirty="0">
+                <a:solidFill>
+                  <a:srgbClr val="DD6B20"/>
+                </a:solidFill>
+                <a:latin typeface="Calibri" pitchFamily="34" charset="0"/>
+                <a:ea typeface="Calibri" pitchFamily="34" charset="-122"/>
+                <a:cs typeface="Calibri" pitchFamily="34" charset="-120"/>
+              </a:rPr>
+              <a:t>HTTP POST</a:t>
+            </a:r>
+            <a:endParaRPr lang="en-US" sz="800" dirty="0"/>
+          </a:p>
+        </p:txBody>
+      </p:sp>
+      <p:sp>
+        <p:nvSpPr>
+          <p:cNvPr id="15" name="Shape 13"/>
+          <p:cNvSpPr/>
+          <p:nvPr/>
+        </p:nvSpPr>
+        <p:spPr>
+          <a:xfrm>
+            <a:off x="457200" y="2167128"/>
+            <a:ext cx="1645920" cy="301752"/>
+          </a:xfrm>
+          <a:prstGeom prst="rect">
+            <a:avLst/>
+          </a:prstGeom>
+          <a:solidFill>
+            <a:srgbClr val="028090"/>
+          </a:solidFill>
+          <a:ln/>
+          <a:effectLst>
+            <a:outerShdw sx="100000" sy="100000" kx="0" ky="0" algn="bl" rotWithShape="0" blurRad="101600" dist="38100" dir="8100000">
+              <a:srgbClr val="000000">
+                <a:alpha val="12000"/>
+              </a:srgbClr>
+            </a:outerShdw>
+          </a:effectLst>
+        </p:spPr>
+      </p:sp>
+      <p:sp>
+        <p:nvSpPr>
+          <p:cNvPr id="16" name="Text 14"/>
+          <p:cNvSpPr/>
+          <p:nvPr/>
+        </p:nvSpPr>
+        <p:spPr>
+          <a:xfrm>
+            <a:off x="457200" y="2167128"/>
+            <a:ext cx="1645920" cy="301752"/>
+          </a:xfrm>
+          <a:prstGeom prst="rect">
+            <a:avLst/>
+          </a:prstGeom>
+          <a:noFill/>
+          <a:ln/>
+        </p:spPr>
+        <p:txBody>
+          <a:bodyPr wrap="square" lIns="0" tIns="0" rIns="0" bIns="0" rtlCol="0" anchor="ctr"/>
+          <a:lstStyle/>
+          <a:p>
+            <a:pPr algn="ctr" indent="0" marL="0">
+              <a:buNone/>
+            </a:pPr>
+            <a:r>
+              <a:rPr lang="en-US" sz="1100" b="1" dirty="0">
+                <a:solidFill>
+                  <a:srgbClr val="FFFFFF"/>
+                </a:solidFill>
+                <a:latin typeface="Calibri" pitchFamily="34" charset="0"/>
+                <a:ea typeface="Calibri" pitchFamily="34" charset="-122"/>
+                <a:cs typeface="Calibri" pitchFamily="34" charset="-120"/>
+              </a:rPr>
+              <a:t>Pipeline B</a:t>
+            </a:r>
+            <a:endParaRPr lang="en-US" sz="1100" dirty="0"/>
+          </a:p>
+        </p:txBody>
+      </p:sp>
+      <p:sp>
+        <p:nvSpPr>
+          <p:cNvPr id="17" name="Shape 15"/>
+          <p:cNvSpPr/>
+          <p:nvPr/>
+        </p:nvSpPr>
+        <p:spPr>
+          <a:xfrm>
+            <a:off x="2103120" y="2313432"/>
+            <a:ext cx="1371600" cy="0"/>
+          </a:xfrm>
+          <a:prstGeom prst="line">
+            <a:avLst/>
+          </a:prstGeom>
+          <a:noFill/>
+          <a:ln w="25400">
+            <a:solidFill>
+              <a:srgbClr val="DD6B20"/>
+            </a:solidFill>
+            <a:prstDash val="solid"/>
+          </a:ln>
+        </p:spPr>
+      </p:sp>
+      <p:sp>
+        <p:nvSpPr>
+          <p:cNvPr id="18" name="Text 16"/>
+          <p:cNvSpPr/>
+          <p:nvPr/>
+        </p:nvSpPr>
+        <p:spPr>
+          <a:xfrm>
+            <a:off x="2121408" y="2167128"/>
+            <a:ext cx="1335024" cy="274320"/>
+          </a:xfrm>
+          <a:prstGeom prst="rect">
+            <a:avLst/>
+          </a:prstGeom>
+          <a:noFill/>
+          <a:ln/>
+        </p:spPr>
+        <p:txBody>
+          <a:bodyPr wrap="square" lIns="0" tIns="0" rIns="0" bIns="0" rtlCol="0" anchor="ctr"/>
+          <a:lstStyle/>
+          <a:p>
+            <a:pPr algn="ctr" indent="0" marL="0">
+              <a:buNone/>
+            </a:pPr>
+            <a:r>
+              <a:rPr lang="en-US" sz="800" dirty="0">
+                <a:solidFill>
+                  <a:srgbClr val="DD6B20"/>
+                </a:solidFill>
+                <a:latin typeface="Calibri" pitchFamily="34" charset="0"/>
+                <a:ea typeface="Calibri" pitchFamily="34" charset="-122"/>
+                <a:cs typeface="Calibri" pitchFamily="34" charset="-120"/>
+              </a:rPr>
+              <a:t>HTTP POST</a:t>
+            </a:r>
+            <a:endParaRPr lang="en-US" sz="800" dirty="0"/>
+          </a:p>
+        </p:txBody>
+      </p:sp>
+      <p:sp>
+        <p:nvSpPr>
+          <p:cNvPr id="19" name="Shape 17"/>
+          <p:cNvSpPr/>
+          <p:nvPr/>
+        </p:nvSpPr>
+        <p:spPr>
+          <a:xfrm>
+            <a:off x="457200" y="2578608"/>
+            <a:ext cx="1645920" cy="301752"/>
+          </a:xfrm>
+          <a:prstGeom prst="rect">
+            <a:avLst/>
+          </a:prstGeom>
+          <a:solidFill>
+            <a:srgbClr val="6B46C1"/>
+          </a:solidFill>
+          <a:ln/>
+          <a:effectLst>
+            <a:outerShdw sx="100000" sy="100000" kx="0" ky="0" algn="bl" rotWithShape="0" blurRad="101600" dist="38100" dir="8100000">
+              <a:srgbClr val="000000">
+                <a:alpha val="12000"/>
+              </a:srgbClr>
+            </a:outerShdw>
+          </a:effectLst>
+        </p:spPr>
+      </p:sp>
+      <p:sp>
+        <p:nvSpPr>
+          <p:cNvPr id="20" name="Text 18"/>
+          <p:cNvSpPr/>
+          <p:nvPr/>
+        </p:nvSpPr>
+        <p:spPr>
+          <a:xfrm>
+            <a:off x="457200" y="2578608"/>
+            <a:ext cx="1645920" cy="301752"/>
+          </a:xfrm>
+          <a:prstGeom prst="rect">
+            <a:avLst/>
+          </a:prstGeom>
+          <a:noFill/>
+          <a:ln/>
+        </p:spPr>
+        <p:txBody>
+          <a:bodyPr wrap="square" lIns="0" tIns="0" rIns="0" bIns="0" rtlCol="0" anchor="ctr"/>
+          <a:lstStyle/>
+          <a:p>
+            <a:pPr algn="ctr" indent="0" marL="0">
+              <a:buNone/>
+            </a:pPr>
+            <a:r>
+              <a:rPr lang="en-US" sz="1100" b="1" dirty="0">
+                <a:solidFill>
+                  <a:srgbClr val="FFFFFF"/>
+                </a:solidFill>
+                <a:latin typeface="Calibri" pitchFamily="34" charset="0"/>
+                <a:ea typeface="Calibri" pitchFamily="34" charset="-122"/>
+                <a:cs typeface="Calibri" pitchFamily="34" charset="-120"/>
+              </a:rPr>
+              <a:t>Pipeline C</a:t>
+            </a:r>
+            <a:endParaRPr lang="en-US" sz="1100" dirty="0"/>
+          </a:p>
+        </p:txBody>
+      </p:sp>
+      <p:sp>
+        <p:nvSpPr>
+          <p:cNvPr id="21" name="Shape 19"/>
+          <p:cNvSpPr/>
+          <p:nvPr/>
+        </p:nvSpPr>
+        <p:spPr>
+          <a:xfrm>
+            <a:off x="2103120" y="2724912"/>
+            <a:ext cx="1371600" cy="0"/>
+          </a:xfrm>
+          <a:prstGeom prst="line">
+            <a:avLst/>
+          </a:prstGeom>
+          <a:noFill/>
+          <a:ln w="25400">
+            <a:solidFill>
+              <a:srgbClr val="DD6B20"/>
+            </a:solidFill>
+            <a:prstDash val="solid"/>
+          </a:ln>
+        </p:spPr>
+      </p:sp>
+      <p:sp>
+        <p:nvSpPr>
+          <p:cNvPr id="22" name="Text 20"/>
+          <p:cNvSpPr/>
+          <p:nvPr/>
+        </p:nvSpPr>
+        <p:spPr>
+          <a:xfrm>
+            <a:off x="2121408" y="2578608"/>
+            <a:ext cx="1335024" cy="274320"/>
+          </a:xfrm>
+          <a:prstGeom prst="rect">
+            <a:avLst/>
+          </a:prstGeom>
+          <a:noFill/>
+          <a:ln/>
+        </p:spPr>
+        <p:txBody>
+          <a:bodyPr wrap="square" lIns="0" tIns="0" rIns="0" bIns="0" rtlCol="0" anchor="ctr"/>
+          <a:lstStyle/>
+          <a:p>
+            <a:pPr algn="ctr" indent="0" marL="0">
+              <a:buNone/>
+            </a:pPr>
+            <a:r>
+              <a:rPr lang="en-US" sz="800" dirty="0">
+                <a:solidFill>
+                  <a:srgbClr val="DD6B20"/>
+                </a:solidFill>
+                <a:latin typeface="Calibri" pitchFamily="34" charset="0"/>
+                <a:ea typeface="Calibri" pitchFamily="34" charset="-122"/>
+                <a:cs typeface="Calibri" pitchFamily="34" charset="-120"/>
+              </a:rPr>
+              <a:t>HTTP POST</a:t>
+            </a:r>
+            <a:endParaRPr lang="en-US" sz="800" dirty="0"/>
+          </a:p>
+        </p:txBody>
+      </p:sp>
+      <p:sp>
+        <p:nvSpPr>
+          <p:cNvPr id="23" name="Shape 21"/>
+          <p:cNvSpPr/>
+          <p:nvPr/>
+        </p:nvSpPr>
+        <p:spPr>
+          <a:xfrm>
+            <a:off x="3520440" y="1719072"/>
+            <a:ext cx="2560320" cy="1234440"/>
+          </a:xfrm>
+          <a:prstGeom prst="rect">
+            <a:avLst/>
+          </a:prstGeom>
+          <a:solidFill>
+            <a:srgbClr val="F0F4F8"/>
+          </a:solidFill>
+          <a:ln/>
+          <a:effectLst>
+            <a:outerShdw sx="100000" sy="100000" kx="0" ky="0" algn="bl" rotWithShape="0" blurRad="101600" dist="38100" dir="8100000">
+              <a:srgbClr val="000000">
+                <a:alpha val="12000"/>
+              </a:srgbClr>
+            </a:outerShdw>
+          </a:effectLst>
+        </p:spPr>
+      </p:sp>
+      <p:sp>
+        <p:nvSpPr>
+          <p:cNvPr id="24" name="Shape 22"/>
+          <p:cNvSpPr/>
+          <p:nvPr/>
+        </p:nvSpPr>
+        <p:spPr>
+          <a:xfrm>
+            <a:off x="3520440" y="1719072"/>
+            <a:ext cx="2560320" cy="292608"/>
+          </a:xfrm>
+          <a:prstGeom prst="rect">
+            <a:avLst/>
+          </a:prstGeom>
+          <a:solidFill>
+            <a:srgbClr val="DD6B20"/>
+          </a:solidFill>
+          <a:ln/>
+        </p:spPr>
+      </p:sp>
+      <p:sp>
+        <p:nvSpPr>
+          <p:cNvPr id="25" name="Text 23"/>
+          <p:cNvSpPr/>
+          <p:nvPr/>
+        </p:nvSpPr>
+        <p:spPr>
+          <a:xfrm>
+            <a:off x="3538728" y="1719072"/>
+            <a:ext cx="2523744" cy="292608"/>
+          </a:xfrm>
+          <a:prstGeom prst="rect">
+            <a:avLst/>
+          </a:prstGeom>
+          <a:noFill/>
+          <a:ln/>
+        </p:spPr>
+        <p:txBody>
+          <a:bodyPr wrap="square" lIns="0" tIns="0" rIns="0" bIns="0" rtlCol="0" anchor="ctr"/>
+          <a:lstStyle/>
+          <a:p>
+            <a:pPr algn="ctr" indent="0" marL="0">
+              <a:buNone/>
+            </a:pPr>
+            <a:r>
+              <a:rPr lang="en-US" sz="1100" b="1" dirty="0">
+                <a:solidFill>
+                  <a:srgbClr val="FFFFFF"/>
+                </a:solidFill>
+                <a:latin typeface="Calibri" pitchFamily="34" charset="0"/>
+                <a:ea typeface="Calibri" pitchFamily="34" charset="-122"/>
+                <a:cs typeface="Calibri" pitchFamily="34" charset="-120"/>
+              </a:rPr>
+              <a:t>PG Commun (API)</a:t>
+            </a:r>
+            <a:endParaRPr lang="en-US" sz="1100" dirty="0"/>
+          </a:p>
+        </p:txBody>
+      </p:sp>
+      <p:sp>
+        <p:nvSpPr>
+          <p:cNvPr id="26" name="Text 24"/>
+          <p:cNvSpPr/>
+          <p:nvPr/>
+        </p:nvSpPr>
+        <p:spPr>
+          <a:xfrm>
+            <a:off x="3538728" y="2029968"/>
+            <a:ext cx="2523744" cy="868680"/>
+          </a:xfrm>
+          <a:prstGeom prst="rect">
+            <a:avLst/>
+          </a:prstGeom>
+          <a:noFill/>
+          <a:ln/>
+        </p:spPr>
+        <p:txBody>
+          <a:bodyPr wrap="square" lIns="0" tIns="0" rIns="0" bIns="0" rtlCol="0" anchor="ctr"/>
+          <a:lstStyle/>
+          <a:p>
+            <a:pPr algn="ctr" indent="0" marL="0">
+              <a:buNone/>
+            </a:pPr>
+            <a:r>
+              <a:rPr lang="en-US" sz="1000" dirty="0">
+                <a:solidFill>
+                  <a:srgbClr val="021B3A"/>
+                </a:solidFill>
+                <a:latin typeface="Calibri" pitchFamily="34" charset="0"/>
+                <a:ea typeface="Calibri" pitchFamily="34" charset="-122"/>
+                <a:cs typeface="Calibri" pitchFamily="34" charset="-120"/>
+              </a:rPr>
+              <a:t>ListenHTTP</a:t>
+            </a:r>
+            <a:endParaRPr lang="en-US" sz="1000" dirty="0"/>
+          </a:p>
+          <a:p>
+            <a:pPr algn="ctr" indent="0" marL="0">
+              <a:buNone/>
+            </a:pPr>
+            <a:r>
+              <a:rPr lang="en-US" sz="1000" dirty="0">
+                <a:solidFill>
+                  <a:srgbClr val="021B3A"/>
+                </a:solidFill>
+                <a:latin typeface="Calibri" pitchFamily="34" charset="0"/>
+                <a:ea typeface="Calibri" pitchFamily="34" charset="-122"/>
+                <a:cs typeface="Calibri" pitchFamily="34" charset="-120"/>
+              </a:rPr>
+              <a:t>Enrichissement</a:t>
+            </a:r>
+            <a:endParaRPr lang="en-US" sz="1000" dirty="0"/>
+          </a:p>
+          <a:p>
+            <a:pPr algn="ctr" indent="0" marL="0">
+              <a:buNone/>
+            </a:pPr>
+            <a:r>
+              <a:rPr lang="en-US" sz="1000" dirty="0">
+                <a:solidFill>
+                  <a:srgbClr val="021B3A"/>
+                </a:solidFill>
+                <a:latin typeface="Calibri" pitchFamily="34" charset="0"/>
+                <a:ea typeface="Calibri" pitchFamily="34" charset="-122"/>
+                <a:cs typeface="Calibri" pitchFamily="34" charset="-120"/>
+              </a:rPr>
+              <a:t>Gestion Erreurs</a:t>
+            </a:r>
+            <a:endParaRPr lang="en-US" sz="1000" dirty="0"/>
+          </a:p>
+        </p:txBody>
+      </p:sp>
+      <p:sp>
+        <p:nvSpPr>
+          <p:cNvPr id="27" name="Shape 25"/>
+          <p:cNvSpPr/>
+          <p:nvPr/>
+        </p:nvSpPr>
+        <p:spPr>
+          <a:xfrm>
+            <a:off x="6080760" y="1901952"/>
+            <a:ext cx="1097280" cy="0"/>
+          </a:xfrm>
+          <a:prstGeom prst="line">
+            <a:avLst/>
+          </a:prstGeom>
+          <a:noFill/>
+          <a:ln w="12700">
+            <a:solidFill>
+              <a:srgbClr val="64748B"/>
+            </a:solidFill>
+            <a:prstDash val="dash"/>
+          </a:ln>
+        </p:spPr>
+      </p:sp>
+      <p:sp>
+        <p:nvSpPr>
+          <p:cNvPr id="28" name="Text 26"/>
+          <p:cNvSpPr/>
+          <p:nvPr/>
+        </p:nvSpPr>
+        <p:spPr>
+          <a:xfrm>
+            <a:off x="6099048" y="1755648"/>
+            <a:ext cx="1060704" cy="274320"/>
+          </a:xfrm>
+          <a:prstGeom prst="rect">
+            <a:avLst/>
+          </a:prstGeom>
+          <a:noFill/>
+          <a:ln/>
+        </p:spPr>
+        <p:txBody>
+          <a:bodyPr wrap="square" lIns="0" tIns="0" rIns="0" bIns="0" rtlCol="0" anchor="ctr"/>
+          <a:lstStyle/>
+          <a:p>
+            <a:pPr algn="ctr" indent="0" marL="0">
+              <a:buNone/>
+            </a:pPr>
+            <a:r>
+              <a:rPr lang="en-US" sz="800" dirty="0">
+                <a:solidFill>
+                  <a:srgbClr val="64748B"/>
+                </a:solidFill>
+                <a:latin typeface="Calibri" pitchFamily="34" charset="0"/>
+                <a:ea typeface="Calibri" pitchFamily="34" charset="-122"/>
+                <a:cs typeface="Calibri" pitchFamily="34" charset="-120"/>
+              </a:rPr>
+              <a:t>réponse</a:t>
+            </a:r>
+            <a:endParaRPr lang="en-US" sz="800" dirty="0"/>
+          </a:p>
+        </p:txBody>
+      </p:sp>
+      <p:sp>
+        <p:nvSpPr>
+          <p:cNvPr id="29" name="Shape 27"/>
+          <p:cNvSpPr/>
+          <p:nvPr/>
+        </p:nvSpPr>
+        <p:spPr>
+          <a:xfrm>
+            <a:off x="6080760" y="2313432"/>
+            <a:ext cx="1097280" cy="0"/>
+          </a:xfrm>
+          <a:prstGeom prst="line">
+            <a:avLst/>
+          </a:prstGeom>
+          <a:noFill/>
+          <a:ln w="12700">
+            <a:solidFill>
+              <a:srgbClr val="64748B"/>
+            </a:solidFill>
+            <a:prstDash val="dash"/>
+          </a:ln>
+        </p:spPr>
+      </p:sp>
+      <p:sp>
+        <p:nvSpPr>
+          <p:cNvPr id="30" name="Text 28"/>
+          <p:cNvSpPr/>
+          <p:nvPr/>
+        </p:nvSpPr>
+        <p:spPr>
+          <a:xfrm>
+            <a:off x="6099048" y="2167128"/>
+            <a:ext cx="1060704" cy="274320"/>
+          </a:xfrm>
+          <a:prstGeom prst="rect">
+            <a:avLst/>
+          </a:prstGeom>
+          <a:noFill/>
+          <a:ln/>
+        </p:spPr>
+        <p:txBody>
+          <a:bodyPr wrap="square" lIns="0" tIns="0" rIns="0" bIns="0" rtlCol="0" anchor="ctr"/>
+          <a:lstStyle/>
+          <a:p>
+            <a:pPr algn="ctr" indent="0" marL="0">
+              <a:buNone/>
+            </a:pPr>
+            <a:r>
+              <a:rPr lang="en-US" sz="800" dirty="0">
+                <a:solidFill>
+                  <a:srgbClr val="64748B"/>
+                </a:solidFill>
+                <a:latin typeface="Calibri" pitchFamily="34" charset="0"/>
+                <a:ea typeface="Calibri" pitchFamily="34" charset="-122"/>
+                <a:cs typeface="Calibri" pitchFamily="34" charset="-120"/>
+              </a:rPr>
+              <a:t>réponse</a:t>
+            </a:r>
+            <a:endParaRPr lang="en-US" sz="800" dirty="0"/>
+          </a:p>
+        </p:txBody>
+      </p:sp>
+      <p:sp>
+        <p:nvSpPr>
+          <p:cNvPr id="31" name="Shape 29"/>
+          <p:cNvSpPr/>
+          <p:nvPr/>
+        </p:nvSpPr>
+        <p:spPr>
+          <a:xfrm>
+            <a:off x="6080760" y="2724912"/>
+            <a:ext cx="1097280" cy="0"/>
+          </a:xfrm>
+          <a:prstGeom prst="line">
+            <a:avLst/>
+          </a:prstGeom>
+          <a:noFill/>
+          <a:ln w="12700">
+            <a:solidFill>
+              <a:srgbClr val="64748B"/>
+            </a:solidFill>
+            <a:prstDash val="dash"/>
+          </a:ln>
+        </p:spPr>
+      </p:sp>
+      <p:sp>
+        <p:nvSpPr>
+          <p:cNvPr id="32" name="Text 30"/>
+          <p:cNvSpPr/>
+          <p:nvPr/>
+        </p:nvSpPr>
+        <p:spPr>
+          <a:xfrm>
+            <a:off x="6099048" y="2578608"/>
+            <a:ext cx="1060704" cy="274320"/>
+          </a:xfrm>
+          <a:prstGeom prst="rect">
+            <a:avLst/>
+          </a:prstGeom>
+          <a:noFill/>
+          <a:ln/>
+        </p:spPr>
+        <p:txBody>
+          <a:bodyPr wrap="square" lIns="0" tIns="0" rIns="0" bIns="0" rtlCol="0" anchor="ctr"/>
+          <a:lstStyle/>
+          <a:p>
+            <a:pPr algn="ctr" indent="0" marL="0">
+              <a:buNone/>
+            </a:pPr>
+            <a:r>
+              <a:rPr lang="en-US" sz="800" dirty="0">
+                <a:solidFill>
+                  <a:srgbClr val="64748B"/>
+                </a:solidFill>
+                <a:latin typeface="Calibri" pitchFamily="34" charset="0"/>
+                <a:ea typeface="Calibri" pitchFamily="34" charset="-122"/>
+                <a:cs typeface="Calibri" pitchFamily="34" charset="-120"/>
+              </a:rPr>
+              <a:t>réponse</a:t>
+            </a:r>
+            <a:endParaRPr lang="en-US" sz="800" dirty="0"/>
+          </a:p>
+        </p:txBody>
+      </p:sp>
+      <p:sp>
+        <p:nvSpPr>
+          <p:cNvPr id="33" name="Shape 31"/>
+          <p:cNvSpPr/>
+          <p:nvPr/>
+        </p:nvSpPr>
+        <p:spPr>
+          <a:xfrm>
+            <a:off x="7178040" y="1755648"/>
+            <a:ext cx="1554480" cy="301752"/>
+          </a:xfrm>
+          <a:prstGeom prst="rect">
+            <a:avLst/>
+          </a:prstGeom>
+          <a:solidFill>
+            <a:srgbClr val="065A82">
+              <a:alpha val="40000"/>
+            </a:srgbClr>
+          </a:solidFill>
+          <a:ln/>
+          <a:effectLst>
+            <a:outerShdw sx="100000" sy="100000" kx="0" ky="0" algn="bl" rotWithShape="0" blurRad="101600" dist="38100" dir="8100000">
+              <a:srgbClr val="000000">
+                <a:alpha val="12000"/>
+              </a:srgbClr>
+            </a:outerShdw>
+          </a:effectLst>
+        </p:spPr>
+      </p:sp>
+      <p:sp>
+        <p:nvSpPr>
+          <p:cNvPr id="34" name="Text 32"/>
+          <p:cNvSpPr/>
+          <p:nvPr/>
+        </p:nvSpPr>
+        <p:spPr>
+          <a:xfrm>
+            <a:off x="7178040" y="1755648"/>
+            <a:ext cx="1554480" cy="301752"/>
+          </a:xfrm>
+          <a:prstGeom prst="rect">
+            <a:avLst/>
+          </a:prstGeom>
+          <a:noFill/>
+          <a:ln/>
+        </p:spPr>
+        <p:txBody>
+          <a:bodyPr wrap="square" lIns="0" tIns="0" rIns="0" bIns="0" rtlCol="0" anchor="ctr"/>
+          <a:lstStyle/>
+          <a:p>
+            <a:pPr algn="ctr" indent="0" marL="0">
+              <a:buNone/>
+            </a:pPr>
+            <a:r>
+              <a:rPr lang="en-US" sz="1000" dirty="0">
+                <a:solidFill>
+                  <a:srgbClr val="FFFFFF"/>
+                </a:solidFill>
+                <a:latin typeface="Calibri" pitchFamily="34" charset="0"/>
+                <a:ea typeface="Calibri" pitchFamily="34" charset="-122"/>
+                <a:cs typeface="Calibri" pitchFamily="34" charset="-120"/>
+              </a:rPr>
+              <a:t>Pipeline A ▶</a:t>
+            </a:r>
+            <a:endParaRPr lang="en-US" sz="1000" dirty="0"/>
+          </a:p>
+        </p:txBody>
+      </p:sp>
+      <p:sp>
+        <p:nvSpPr>
+          <p:cNvPr id="35" name="Shape 33"/>
+          <p:cNvSpPr/>
+          <p:nvPr/>
+        </p:nvSpPr>
+        <p:spPr>
+          <a:xfrm>
+            <a:off x="7178040" y="2167128"/>
+            <a:ext cx="1554480" cy="301752"/>
+          </a:xfrm>
+          <a:prstGeom prst="rect">
+            <a:avLst/>
+          </a:prstGeom>
+          <a:solidFill>
+            <a:srgbClr val="028090">
+              <a:alpha val="40000"/>
+            </a:srgbClr>
+          </a:solidFill>
+          <a:ln/>
+          <a:effectLst>
+            <a:outerShdw sx="100000" sy="100000" kx="0" ky="0" algn="bl" rotWithShape="0" blurRad="101600" dist="38100" dir="8100000">
+              <a:srgbClr val="000000">
+                <a:alpha val="12000"/>
+              </a:srgbClr>
+            </a:outerShdw>
+          </a:effectLst>
+        </p:spPr>
+      </p:sp>
+      <p:sp>
+        <p:nvSpPr>
+          <p:cNvPr id="36" name="Text 34"/>
+          <p:cNvSpPr/>
+          <p:nvPr/>
+        </p:nvSpPr>
+        <p:spPr>
+          <a:xfrm>
+            <a:off x="7178040" y="2167128"/>
+            <a:ext cx="1554480" cy="301752"/>
+          </a:xfrm>
+          <a:prstGeom prst="rect">
+            <a:avLst/>
+          </a:prstGeom>
+          <a:noFill/>
+          <a:ln/>
+        </p:spPr>
+        <p:txBody>
+          <a:bodyPr wrap="square" lIns="0" tIns="0" rIns="0" bIns="0" rtlCol="0" anchor="ctr"/>
+          <a:lstStyle/>
+          <a:p>
+            <a:pPr algn="ctr" indent="0" marL="0">
+              <a:buNone/>
+            </a:pPr>
+            <a:r>
+              <a:rPr lang="en-US" sz="1000" dirty="0">
+                <a:solidFill>
+                  <a:srgbClr val="FFFFFF"/>
+                </a:solidFill>
+                <a:latin typeface="Calibri" pitchFamily="34" charset="0"/>
+                <a:ea typeface="Calibri" pitchFamily="34" charset="-122"/>
+                <a:cs typeface="Calibri" pitchFamily="34" charset="-120"/>
+              </a:rPr>
+              <a:t>Pipeline B ▶</a:t>
+            </a:r>
+            <a:endParaRPr lang="en-US" sz="1000" dirty="0"/>
+          </a:p>
+        </p:txBody>
+      </p:sp>
+      <p:sp>
+        <p:nvSpPr>
+          <p:cNvPr id="37" name="Shape 35"/>
+          <p:cNvSpPr/>
+          <p:nvPr/>
+        </p:nvSpPr>
+        <p:spPr>
+          <a:xfrm>
+            <a:off x="7178040" y="2578608"/>
+            <a:ext cx="1554480" cy="301752"/>
+          </a:xfrm>
+          <a:prstGeom prst="rect">
+            <a:avLst/>
+          </a:prstGeom>
+          <a:solidFill>
+            <a:srgbClr val="6B46C1">
+              <a:alpha val="40000"/>
+            </a:srgbClr>
+          </a:solidFill>
+          <a:ln/>
+          <a:effectLst>
+            <a:outerShdw sx="100000" sy="100000" kx="0" ky="0" algn="bl" rotWithShape="0" blurRad="101600" dist="38100" dir="8100000">
+              <a:srgbClr val="000000">
+                <a:alpha val="12000"/>
+              </a:srgbClr>
+            </a:outerShdw>
+          </a:effectLst>
+        </p:spPr>
+      </p:sp>
+      <p:sp>
+        <p:nvSpPr>
+          <p:cNvPr id="38" name="Text 36"/>
+          <p:cNvSpPr/>
+          <p:nvPr/>
+        </p:nvSpPr>
+        <p:spPr>
+          <a:xfrm>
+            <a:off x="7178040" y="2578608"/>
+            <a:ext cx="1554480" cy="301752"/>
+          </a:xfrm>
+          <a:prstGeom prst="rect">
+            <a:avLst/>
+          </a:prstGeom>
+          <a:noFill/>
+          <a:ln/>
+        </p:spPr>
+        <p:txBody>
+          <a:bodyPr wrap="square" lIns="0" tIns="0" rIns="0" bIns="0" rtlCol="0" anchor="ctr"/>
+          <a:lstStyle/>
+          <a:p>
+            <a:pPr algn="ctr" indent="0" marL="0">
+              <a:buNone/>
+            </a:pPr>
+            <a:r>
+              <a:rPr lang="en-US" sz="1000" dirty="0">
+                <a:solidFill>
+                  <a:srgbClr val="FFFFFF"/>
+                </a:solidFill>
+                <a:latin typeface="Calibri" pitchFamily="34" charset="0"/>
+                <a:ea typeface="Calibri" pitchFamily="34" charset="-122"/>
+                <a:cs typeface="Calibri" pitchFamily="34" charset="-120"/>
+              </a:rPr>
+              <a:t>Pipeline C ▶</a:t>
+            </a:r>
+            <a:endParaRPr lang="en-US" sz="1000" dirty="0"/>
+          </a:p>
+        </p:txBody>
+      </p:sp>
+      <p:sp>
+        <p:nvSpPr>
+          <p:cNvPr id="39" name="Shape 37"/>
+          <p:cNvSpPr/>
+          <p:nvPr/>
+        </p:nvSpPr>
+        <p:spPr>
+          <a:xfrm>
+            <a:off x="274320" y="3520440"/>
+            <a:ext cx="8595360" cy="1371600"/>
+          </a:xfrm>
+          <a:prstGeom prst="rect">
+            <a:avLst/>
+          </a:prstGeom>
+          <a:solidFill>
+            <a:srgbClr val="FFFFFF"/>
+          </a:solidFill>
+          <a:ln/>
+          <a:effectLst>
+            <a:outerShdw sx="100000" sy="100000" kx="0" ky="0" algn="bl" rotWithShape="0" blurRad="101600" dist="38100" dir="8100000">
+              <a:srgbClr val="000000">
+                <a:alpha val="12000"/>
+              </a:srgbClr>
+            </a:outerShdw>
+          </a:effectLst>
+        </p:spPr>
+      </p:sp>
+      <p:sp>
+        <p:nvSpPr>
+          <p:cNvPr id="40" name="Shape 38"/>
+          <p:cNvSpPr/>
+          <p:nvPr/>
+        </p:nvSpPr>
+        <p:spPr>
+          <a:xfrm>
+            <a:off x="274320" y="3520440"/>
+            <a:ext cx="8595360" cy="320040"/>
+          </a:xfrm>
+          <a:prstGeom prst="rect">
+            <a:avLst/>
+          </a:prstGeom>
+          <a:solidFill>
+            <a:srgbClr val="E53E3E"/>
+          </a:solidFill>
+          <a:ln/>
+        </p:spPr>
+      </p:sp>
+      <p:sp>
+        <p:nvSpPr>
+          <p:cNvPr id="41" name="Text 39"/>
+          <p:cNvSpPr/>
+          <p:nvPr/>
+        </p:nvSpPr>
+        <p:spPr>
+          <a:xfrm>
+            <a:off x="320040" y="3520440"/>
+            <a:ext cx="8503920" cy="320040"/>
+          </a:xfrm>
+          <a:prstGeom prst="rect">
+            <a:avLst/>
+          </a:prstGeom>
+          <a:noFill/>
+          <a:ln/>
+        </p:spPr>
+        <p:txBody>
+          <a:bodyPr wrap="square" lIns="0" tIns="0" rIns="0" bIns="0" rtlCol="0" anchor="ctr"/>
+          <a:lstStyle/>
+          <a:p>
+            <a:pPr indent="0" marL="0">
+              <a:buNone/>
+            </a:pPr>
+            <a:r>
+              <a:rPr lang="en-US" sz="1300" b="1" dirty="0">
+                <a:solidFill>
+                  <a:srgbClr val="FFFFFF"/>
+                </a:solidFill>
+                <a:latin typeface="Calibri" pitchFamily="34" charset="0"/>
+                <a:ea typeface="Calibri" pitchFamily="34" charset="-122"/>
+                <a:cs typeface="Calibri" pitchFamily="34" charset="-120"/>
+              </a:rPr>
+              <a:t>❌  Verdict : Mauvaise idée dans NiFi</a:t>
+            </a:r>
+            <a:endParaRPr lang="en-US" sz="1300" dirty="0"/>
+          </a:p>
+        </p:txBody>
+      </p:sp>
+      <p:sp>
+        <p:nvSpPr>
+          <p:cNvPr id="42" name="Text 40"/>
+          <p:cNvSpPr/>
+          <p:nvPr/>
+        </p:nvSpPr>
+        <p:spPr>
+          <a:xfrm>
+            <a:off x="365760" y="3886200"/>
+            <a:ext cx="8412480" cy="868680"/>
+          </a:xfrm>
+          <a:prstGeom prst="rect">
+            <a:avLst/>
+          </a:prstGeom>
+          <a:noFill/>
+          <a:ln/>
+        </p:spPr>
+        <p:txBody>
+          <a:bodyPr wrap="square" lIns="0" tIns="0" rIns="0" bIns="0" rtlCol="0" anchor="ctr"/>
+          <a:lstStyle/>
+          <a:p>
+            <a:pPr indent="0" marL="0">
+              <a:buNone/>
+            </a:pPr>
+            <a:r>
+              <a:rPr lang="en-US" sz="1100" dirty="0">
+                <a:solidFill>
+                  <a:srgbClr val="021B3A"/>
+                </a:solidFill>
+                <a:latin typeface="Calibri" pitchFamily="34" charset="0"/>
+                <a:ea typeface="Calibri" pitchFamily="34" charset="-122"/>
+                <a:cs typeface="Calibri" pitchFamily="34" charset="-120"/>
+              </a:rPr>
+              <a:t>NiFi est un moteur de flux asynchrone — pas un serveur d'API synchrone. Cette approche réintroduit exactement les mêmes problèmes que le PG partagé, en ajoutant une latence réseau inutile et une complexité supplémentaire.</a:t>
+            </a:r>
+            <a:endParaRPr lang="en-US" sz="1100" dirty="0"/>
+          </a:p>
+        </p:txBody>
+      </p:sp>
+    </p:spTree>
+  </p:cSld>
+  <p:clrMapOvr>
+    <a:masterClrMapping/>
+  </p:clrMapOvr>
+</p:sld>
+</file>
+
+<file path=ppt/slides/slide13.xml><?xml version="1.0" encoding="utf-8"?>
+<p:sld xmlns:a="http://schemas.openxmlformats.org/drawingml/2006/main" xmlns:r="http://schemas.openxmlformats.org/officeDocument/2006/relationships" xmlns:p="http://schemas.openxmlformats.org/presentationml/2006/main">
+  <p:cSld name="Slide 13">
+    <p:bg>
+      <p:bgPr>
+        <a:solidFill>
+          <a:srgbClr val="F0F4F8"/>
+        </a:solidFill>
+      </p:bgPr>
+    </p:bg>
+    <p:spTree>
+      <p:nvGrpSpPr>
+        <p:cNvPr id="1" name=""/>
+        <p:cNvGrpSpPr/>
+        <p:nvPr/>
+      </p:nvGrpSpPr>
+      <p:grpSpPr>
+        <a:xfrm>
+          <a:off x="0" y="0"/>
+          <a:ext cx="0" cy="0"/>
+          <a:chOff x="0" y="0"/>
+          <a:chExt cx="0" cy="0"/>
+        </a:xfrm>
+      </p:grpSpPr>
+      <p:sp>
+        <p:nvSpPr>
+          <p:cNvPr id="2" name="Shape 0"/>
+          <p:cNvSpPr/>
+          <p:nvPr/>
+        </p:nvSpPr>
+        <p:spPr>
+          <a:xfrm>
+            <a:off x="0" y="0"/>
+            <a:ext cx="9144000" cy="685800"/>
+          </a:xfrm>
+          <a:prstGeom prst="rect">
+            <a:avLst/>
+          </a:prstGeom>
+          <a:solidFill>
+            <a:srgbClr val="021B3A"/>
+          </a:solidFill>
+          <a:ln/>
+        </p:spPr>
+      </p:sp>
+      <p:sp>
+        <p:nvSpPr>
+          <p:cNvPr id="3" name="Shape 1"/>
+          <p:cNvSpPr/>
+          <p:nvPr/>
+        </p:nvSpPr>
+        <p:spPr>
+          <a:xfrm>
+            <a:off x="0" y="0"/>
+            <a:ext cx="164592" cy="685800"/>
+          </a:xfrm>
+          <a:prstGeom prst="rect">
+            <a:avLst/>
+          </a:prstGeom>
+          <a:solidFill>
+            <a:srgbClr val="DD6B20"/>
+          </a:solidFill>
+          <a:ln/>
+        </p:spPr>
+      </p:sp>
+      <p:sp>
+        <p:nvSpPr>
+          <p:cNvPr id="4" name="Text 2"/>
+          <p:cNvSpPr/>
+          <p:nvPr/>
+        </p:nvSpPr>
+        <p:spPr>
+          <a:xfrm>
+            <a:off x="365760" y="73152"/>
+            <a:ext cx="8229600" cy="548640"/>
+          </a:xfrm>
+          <a:prstGeom prst="rect">
+            <a:avLst/>
+          </a:prstGeom>
+          <a:noFill/>
+          <a:ln/>
+        </p:spPr>
+        <p:txBody>
+          <a:bodyPr wrap="square" lIns="0" tIns="0" rIns="0" bIns="0" rtlCol="0" anchor="ctr"/>
+          <a:lstStyle/>
+          <a:p>
+            <a:pPr indent="0" marL="0">
+              <a:buNone/>
+            </a:pPr>
+            <a:r>
+              <a:rPr lang="en-US" sz="2400" b="1" dirty="0">
+                <a:solidFill>
+                  <a:srgbClr val="FFFFFF"/>
+                </a:solidFill>
+                <a:latin typeface="Calibri" pitchFamily="34" charset="0"/>
+                <a:ea typeface="Calibri" pitchFamily="34" charset="-122"/>
+                <a:cs typeface="Calibri" pitchFamily="34" charset="-120"/>
+              </a:rPr>
+              <a:t>5 Raisons de ne pas exposer les PG en API</a:t>
+            </a:r>
+            <a:endParaRPr lang="en-US" sz="2400" dirty="0"/>
+          </a:p>
+        </p:txBody>
+      </p:sp>
+      <p:sp>
+        <p:nvSpPr>
+          <p:cNvPr id="5" name="Shape 3"/>
+          <p:cNvSpPr/>
+          <p:nvPr/>
+        </p:nvSpPr>
+        <p:spPr>
+          <a:xfrm>
+            <a:off x="274320" y="804672"/>
+            <a:ext cx="8595360" cy="731520"/>
+          </a:xfrm>
+          <a:prstGeom prst="rect">
+            <a:avLst/>
+          </a:prstGeom>
+          <a:solidFill>
+            <a:srgbClr val="FFFFFF"/>
+          </a:solidFill>
+          <a:ln/>
+          <a:effectLst>
+            <a:outerShdw sx="100000" sy="100000" kx="0" ky="0" algn="bl" rotWithShape="0" blurRad="101600" dist="38100" dir="8100000">
+              <a:srgbClr val="000000">
+                <a:alpha val="12000"/>
+              </a:srgbClr>
+            </a:outerShdw>
+          </a:effectLst>
+        </p:spPr>
+      </p:sp>
+      <p:sp>
+        <p:nvSpPr>
+          <p:cNvPr id="6" name="Shape 4"/>
+          <p:cNvSpPr/>
+          <p:nvPr/>
+        </p:nvSpPr>
+        <p:spPr>
+          <a:xfrm>
+            <a:off x="274320" y="804672"/>
+            <a:ext cx="64008" cy="731520"/>
+          </a:xfrm>
+          <a:prstGeom prst="rect">
+            <a:avLst/>
+          </a:prstGeom>
+          <a:solidFill>
+            <a:srgbClr val="E53E3E"/>
+          </a:solidFill>
+          <a:ln/>
+        </p:spPr>
+      </p:sp>
+      <p:sp>
+        <p:nvSpPr>
+          <p:cNvPr id="7" name="Shape 5"/>
+          <p:cNvSpPr/>
+          <p:nvPr/>
+        </p:nvSpPr>
+        <p:spPr>
+          <a:xfrm>
+            <a:off x="384048" y="960120"/>
+            <a:ext cx="402336" cy="402336"/>
+          </a:xfrm>
+          <a:prstGeom prst="ellipse">
+            <a:avLst/>
+          </a:prstGeom>
+          <a:solidFill>
+            <a:srgbClr val="E53E3E"/>
+          </a:solidFill>
+          <a:ln/>
+        </p:spPr>
+      </p:sp>
+      <p:sp>
+        <p:nvSpPr>
+          <p:cNvPr id="8" name="Text 6"/>
+          <p:cNvSpPr/>
+          <p:nvPr/>
+        </p:nvSpPr>
+        <p:spPr>
+          <a:xfrm>
+            <a:off x="384048" y="960120"/>
+            <a:ext cx="402336" cy="402336"/>
+          </a:xfrm>
+          <a:prstGeom prst="rect">
+            <a:avLst/>
+          </a:prstGeom>
+          <a:noFill/>
+          <a:ln/>
+        </p:spPr>
+        <p:txBody>
+          <a:bodyPr wrap="square" lIns="0" tIns="0" rIns="0" bIns="0" rtlCol="0" anchor="ctr"/>
+          <a:lstStyle/>
+          <a:p>
+            <a:pPr algn="ctr" indent="0" marL="0">
+              <a:buNone/>
+            </a:pPr>
+            <a:r>
+              <a:rPr lang="en-US" sz="1400" b="1" dirty="0">
+                <a:solidFill>
+                  <a:srgbClr val="FFFFFF"/>
+                </a:solidFill>
+                <a:latin typeface="Calibri" pitchFamily="34" charset="0"/>
+                <a:ea typeface="Calibri" pitchFamily="34" charset="-122"/>
+                <a:cs typeface="Calibri" pitchFamily="34" charset="-120"/>
+              </a:rPr>
+              <a:t>1</a:t>
+            </a:r>
+            <a:endParaRPr lang="en-US" sz="1400" dirty="0"/>
+          </a:p>
+        </p:txBody>
+      </p:sp>
+      <p:sp>
+        <p:nvSpPr>
+          <p:cNvPr id="9" name="Text 7"/>
+          <p:cNvSpPr/>
+          <p:nvPr/>
+        </p:nvSpPr>
+        <p:spPr>
+          <a:xfrm>
+            <a:off x="914400" y="859536"/>
+            <a:ext cx="7772400" cy="274320"/>
+          </a:xfrm>
+          <a:prstGeom prst="rect">
+            <a:avLst/>
+          </a:prstGeom>
+          <a:noFill/>
+          <a:ln/>
+        </p:spPr>
+        <p:txBody>
+          <a:bodyPr wrap="square" lIns="0" tIns="0" rIns="0" bIns="0" rtlCol="0" anchor="ctr"/>
+          <a:lstStyle/>
+          <a:p>
+            <a:pPr indent="0" marL="0">
+              <a:buNone/>
+            </a:pPr>
+            <a:r>
+              <a:rPr lang="en-US" sz="1200" b="1" dirty="0">
+                <a:solidFill>
+                  <a:srgbClr val="021B3A"/>
+                </a:solidFill>
+                <a:latin typeface="Calibri" pitchFamily="34" charset="0"/>
+                <a:ea typeface="Calibri" pitchFamily="34" charset="-122"/>
+                <a:cs typeface="Calibri" pitchFamily="34" charset="-120"/>
+              </a:rPr>
+              <a:t>NiFi est asynchrone, pas synchrone</a:t>
+            </a:r>
+            <a:endParaRPr lang="en-US" sz="1200" dirty="0"/>
+          </a:p>
+        </p:txBody>
+      </p:sp>
+      <p:sp>
+        <p:nvSpPr>
+          <p:cNvPr id="10" name="Text 8"/>
+          <p:cNvSpPr/>
+          <p:nvPr/>
+        </p:nvSpPr>
+        <p:spPr>
+          <a:xfrm>
+            <a:off x="914400" y="1152144"/>
+            <a:ext cx="7772400" cy="338328"/>
+          </a:xfrm>
+          <a:prstGeom prst="rect">
+            <a:avLst/>
+          </a:prstGeom>
+          <a:noFill/>
+          <a:ln/>
+        </p:spPr>
+        <p:txBody>
+          <a:bodyPr wrap="square" lIns="0" tIns="0" rIns="0" bIns="0" rtlCol="0" anchor="ctr"/>
+          <a:lstStyle/>
+          <a:p>
+            <a:pPr indent="0" marL="0">
+              <a:buNone/>
+            </a:pPr>
+            <a:r>
+              <a:rPr lang="en-US" sz="1000" dirty="0">
+                <a:solidFill>
+                  <a:srgbClr val="64748B"/>
+                </a:solidFill>
+                <a:latin typeface="Calibri" pitchFamily="34" charset="0"/>
+                <a:ea typeface="Calibri" pitchFamily="34" charset="-122"/>
+                <a:cs typeface="Calibri" pitchFamily="34" charset="-120"/>
+              </a:rPr>
+              <a:t>ListenHTTP reçoit des données mais le traitement est asynchrone. Gérer un vrai pattern requête/réponse synchrone est artificiel et fragile.</a:t>
+            </a:r>
+            <a:endParaRPr lang="en-US" sz="1000" dirty="0"/>
+          </a:p>
+        </p:txBody>
+      </p:sp>
+      <p:sp>
+        <p:nvSpPr>
+          <p:cNvPr id="11" name="Shape 9"/>
+          <p:cNvSpPr/>
+          <p:nvPr/>
+        </p:nvSpPr>
+        <p:spPr>
+          <a:xfrm>
+            <a:off x="274320" y="1655064"/>
+            <a:ext cx="8595360" cy="731520"/>
+          </a:xfrm>
+          <a:prstGeom prst="rect">
+            <a:avLst/>
+          </a:prstGeom>
+          <a:solidFill>
+            <a:srgbClr val="FFFFFF"/>
+          </a:solidFill>
+          <a:ln/>
+          <a:effectLst>
+            <a:outerShdw sx="100000" sy="100000" kx="0" ky="0" algn="bl" rotWithShape="0" blurRad="101600" dist="38100" dir="8100000">
+              <a:srgbClr val="000000">
+                <a:alpha val="12000"/>
+              </a:srgbClr>
+            </a:outerShdw>
+          </a:effectLst>
+        </p:spPr>
+      </p:sp>
+      <p:sp>
+        <p:nvSpPr>
+          <p:cNvPr id="12" name="Shape 10"/>
+          <p:cNvSpPr/>
+          <p:nvPr/>
+        </p:nvSpPr>
+        <p:spPr>
+          <a:xfrm>
+            <a:off x="274320" y="1655064"/>
+            <a:ext cx="64008" cy="731520"/>
+          </a:xfrm>
+          <a:prstGeom prst="rect">
+            <a:avLst/>
+          </a:prstGeom>
+          <a:solidFill>
+            <a:srgbClr val="DD6B20"/>
+          </a:solidFill>
+          <a:ln/>
+        </p:spPr>
+      </p:sp>
+      <p:sp>
+        <p:nvSpPr>
+          <p:cNvPr id="13" name="Shape 11"/>
+          <p:cNvSpPr/>
+          <p:nvPr/>
+        </p:nvSpPr>
+        <p:spPr>
+          <a:xfrm>
+            <a:off x="384048" y="1810512"/>
+            <a:ext cx="402336" cy="402336"/>
+          </a:xfrm>
+          <a:prstGeom prst="ellipse">
+            <a:avLst/>
+          </a:prstGeom>
+          <a:solidFill>
+            <a:srgbClr val="DD6B20"/>
+          </a:solidFill>
+          <a:ln/>
+        </p:spPr>
+      </p:sp>
+      <p:sp>
+        <p:nvSpPr>
+          <p:cNvPr id="14" name="Text 12"/>
+          <p:cNvSpPr/>
+          <p:nvPr/>
+        </p:nvSpPr>
+        <p:spPr>
+          <a:xfrm>
+            <a:off x="384048" y="1810512"/>
+            <a:ext cx="402336" cy="402336"/>
+          </a:xfrm>
+          <a:prstGeom prst="rect">
+            <a:avLst/>
+          </a:prstGeom>
+          <a:noFill/>
+          <a:ln/>
+        </p:spPr>
+        <p:txBody>
+          <a:bodyPr wrap="square" lIns="0" tIns="0" rIns="0" bIns="0" rtlCol="0" anchor="ctr"/>
+          <a:lstStyle/>
+          <a:p>
+            <a:pPr algn="ctr" indent="0" marL="0">
+              <a:buNone/>
+            </a:pPr>
+            <a:r>
+              <a:rPr lang="en-US" sz="1400" b="1" dirty="0">
+                <a:solidFill>
+                  <a:srgbClr val="FFFFFF"/>
+                </a:solidFill>
+                <a:latin typeface="Calibri" pitchFamily="34" charset="0"/>
+                <a:ea typeface="Calibri" pitchFamily="34" charset="-122"/>
+                <a:cs typeface="Calibri" pitchFamily="34" charset="-120"/>
+              </a:rPr>
+              <a:t>2</a:t>
+            </a:r>
+            <a:endParaRPr lang="en-US" sz="1400" dirty="0"/>
+          </a:p>
+        </p:txBody>
+      </p:sp>
+      <p:sp>
+        <p:nvSpPr>
+          <p:cNvPr id="15" name="Text 13"/>
+          <p:cNvSpPr/>
+          <p:nvPr/>
+        </p:nvSpPr>
+        <p:spPr>
+          <a:xfrm>
+            <a:off x="914400" y="1709928"/>
+            <a:ext cx="7772400" cy="274320"/>
+          </a:xfrm>
+          <a:prstGeom prst="rect">
+            <a:avLst/>
+          </a:prstGeom>
+          <a:noFill/>
+          <a:ln/>
+        </p:spPr>
+        <p:txBody>
+          <a:bodyPr wrap="square" lIns="0" tIns="0" rIns="0" bIns="0" rtlCol="0" anchor="ctr"/>
+          <a:lstStyle/>
+          <a:p>
+            <a:pPr indent="0" marL="0">
+              <a:buNone/>
+            </a:pPr>
+            <a:r>
+              <a:rPr lang="en-US" sz="1200" b="1" dirty="0">
+                <a:solidFill>
+                  <a:srgbClr val="021B3A"/>
+                </a:solidFill>
+                <a:latin typeface="Calibri" pitchFamily="34" charset="0"/>
+                <a:ea typeface="Calibri" pitchFamily="34" charset="-122"/>
+                <a:cs typeface="Calibri" pitchFamily="34" charset="-120"/>
+              </a:rPr>
+              <a:t>Mêmes problèmes que le PG partagé</a:t>
+            </a:r>
+            <a:endParaRPr lang="en-US" sz="1200" dirty="0"/>
+          </a:p>
+        </p:txBody>
+      </p:sp>
+      <p:sp>
+        <p:nvSpPr>
+          <p:cNvPr id="16" name="Text 14"/>
+          <p:cNvSpPr/>
+          <p:nvPr/>
+        </p:nvSpPr>
+        <p:spPr>
+          <a:xfrm>
+            <a:off x="914400" y="2002536"/>
+            <a:ext cx="7772400" cy="338328"/>
+          </a:xfrm>
+          <a:prstGeom prst="rect">
+            <a:avLst/>
+          </a:prstGeom>
+          <a:noFill/>
+          <a:ln/>
+        </p:spPr>
+        <p:txBody>
+          <a:bodyPr wrap="square" lIns="0" tIns="0" rIns="0" bIns="0" rtlCol="0" anchor="ctr"/>
+          <a:lstStyle/>
+          <a:p>
+            <a:pPr indent="0" marL="0">
+              <a:buNone/>
+            </a:pPr>
+            <a:r>
+              <a:rPr lang="en-US" sz="1000" dirty="0">
+                <a:solidFill>
+                  <a:srgbClr val="64748B"/>
+                </a:solidFill>
+                <a:latin typeface="Calibri" pitchFamily="34" charset="0"/>
+                <a:ea typeface="Calibri" pitchFamily="34" charset="-122"/>
+                <a:cs typeface="Calibri" pitchFamily="34" charset="-120"/>
+              </a:rPr>
+              <a:t>Un seul point de défaillance, back-pressure partagé, déploiement risqué. Tu réintroduis exactement ce que tu voulais éviter.</a:t>
+            </a:r>
+            <a:endParaRPr lang="en-US" sz="1000" dirty="0"/>
+          </a:p>
+        </p:txBody>
+      </p:sp>
+      <p:sp>
+        <p:nvSpPr>
+          <p:cNvPr id="17" name="Shape 15"/>
+          <p:cNvSpPr/>
+          <p:nvPr/>
+        </p:nvSpPr>
+        <p:spPr>
+          <a:xfrm>
+            <a:off x="274320" y="2505456"/>
+            <a:ext cx="8595360" cy="731520"/>
+          </a:xfrm>
+          <a:prstGeom prst="rect">
+            <a:avLst/>
+          </a:prstGeom>
+          <a:solidFill>
+            <a:srgbClr val="FFFFFF"/>
+          </a:solidFill>
+          <a:ln/>
+          <a:effectLst>
+            <a:outerShdw sx="100000" sy="100000" kx="0" ky="0" algn="bl" rotWithShape="0" blurRad="101600" dist="38100" dir="8100000">
+              <a:srgbClr val="000000">
+                <a:alpha val="12000"/>
+              </a:srgbClr>
+            </a:outerShdw>
+          </a:effectLst>
+        </p:spPr>
+      </p:sp>
+      <p:sp>
+        <p:nvSpPr>
+          <p:cNvPr id="18" name="Shape 16"/>
+          <p:cNvSpPr/>
+          <p:nvPr/>
+        </p:nvSpPr>
+        <p:spPr>
+          <a:xfrm>
+            <a:off x="274320" y="2505456"/>
+            <a:ext cx="64008" cy="731520"/>
+          </a:xfrm>
+          <a:prstGeom prst="rect">
+            <a:avLst/>
+          </a:prstGeom>
+          <a:solidFill>
+            <a:srgbClr val="D69E2E"/>
+          </a:solidFill>
+          <a:ln/>
+        </p:spPr>
+      </p:sp>
+      <p:sp>
+        <p:nvSpPr>
+          <p:cNvPr id="19" name="Shape 17"/>
+          <p:cNvSpPr/>
+          <p:nvPr/>
+        </p:nvSpPr>
+        <p:spPr>
+          <a:xfrm>
+            <a:off x="384048" y="2660904"/>
+            <a:ext cx="402336" cy="402336"/>
+          </a:xfrm>
+          <a:prstGeom prst="ellipse">
+            <a:avLst/>
+          </a:prstGeom>
+          <a:solidFill>
+            <a:srgbClr val="D69E2E"/>
+          </a:solidFill>
+          <a:ln/>
+        </p:spPr>
+      </p:sp>
+      <p:sp>
+        <p:nvSpPr>
+          <p:cNvPr id="20" name="Text 18"/>
+          <p:cNvSpPr/>
+          <p:nvPr/>
+        </p:nvSpPr>
+        <p:spPr>
+          <a:xfrm>
+            <a:off x="384048" y="2660904"/>
+            <a:ext cx="402336" cy="402336"/>
+          </a:xfrm>
+          <a:prstGeom prst="rect">
+            <a:avLst/>
+          </a:prstGeom>
+          <a:noFill/>
+          <a:ln/>
+        </p:spPr>
+        <p:txBody>
+          <a:bodyPr wrap="square" lIns="0" tIns="0" rIns="0" bIns="0" rtlCol="0" anchor="ctr"/>
+          <a:lstStyle/>
+          <a:p>
+            <a:pPr algn="ctr" indent="0" marL="0">
+              <a:buNone/>
+            </a:pPr>
+            <a:r>
+              <a:rPr lang="en-US" sz="1400" b="1" dirty="0">
+                <a:solidFill>
+                  <a:srgbClr val="FFFFFF"/>
+                </a:solidFill>
+                <a:latin typeface="Calibri" pitchFamily="34" charset="0"/>
+                <a:ea typeface="Calibri" pitchFamily="34" charset="-122"/>
+                <a:cs typeface="Calibri" pitchFamily="34" charset="-120"/>
+              </a:rPr>
+              <a:t>3</a:t>
+            </a:r>
+            <a:endParaRPr lang="en-US" sz="1400" dirty="0"/>
+          </a:p>
+        </p:txBody>
+      </p:sp>
+      <p:sp>
+        <p:nvSpPr>
+          <p:cNvPr id="21" name="Text 19"/>
+          <p:cNvSpPr/>
+          <p:nvPr/>
+        </p:nvSpPr>
+        <p:spPr>
+          <a:xfrm>
+            <a:off x="914400" y="2560320"/>
+            <a:ext cx="7772400" cy="274320"/>
+          </a:xfrm>
+          <a:prstGeom prst="rect">
+            <a:avLst/>
+          </a:prstGeom>
+          <a:noFill/>
+          <a:ln/>
+        </p:spPr>
+        <p:txBody>
+          <a:bodyPr wrap="square" lIns="0" tIns="0" rIns="0" bIns="0" rtlCol="0" anchor="ctr"/>
+          <a:lstStyle/>
+          <a:p>
+            <a:pPr indent="0" marL="0">
+              <a:buNone/>
+            </a:pPr>
+            <a:r>
+              <a:rPr lang="en-US" sz="1200" b="1" dirty="0">
+                <a:solidFill>
+                  <a:srgbClr val="021B3A"/>
+                </a:solidFill>
+                <a:latin typeface="Calibri" pitchFamily="34" charset="0"/>
+                <a:ea typeface="Calibri" pitchFamily="34" charset="-122"/>
+                <a:cs typeface="Calibri" pitchFamily="34" charset="-120"/>
+              </a:rPr>
+              <a:t>Latence réseau inutile</a:t>
+            </a:r>
+            <a:endParaRPr lang="en-US" sz="1200" dirty="0"/>
+          </a:p>
+        </p:txBody>
+      </p:sp>
+      <p:sp>
+        <p:nvSpPr>
+          <p:cNvPr id="22" name="Text 20"/>
+          <p:cNvSpPr/>
+          <p:nvPr/>
+        </p:nvSpPr>
+        <p:spPr>
+          <a:xfrm>
+            <a:off x="914400" y="2852928"/>
+            <a:ext cx="7772400" cy="338328"/>
+          </a:xfrm>
+          <a:prstGeom prst="rect">
+            <a:avLst/>
+          </a:prstGeom>
+          <a:noFill/>
+          <a:ln/>
+        </p:spPr>
+        <p:txBody>
+          <a:bodyPr wrap="square" lIns="0" tIns="0" rIns="0" bIns="0" rtlCol="0" anchor="ctr"/>
+          <a:lstStyle/>
+          <a:p>
+            <a:pPr indent="0" marL="0">
+              <a:buNone/>
+            </a:pPr>
+            <a:r>
+              <a:rPr lang="en-US" sz="1000" dirty="0">
+                <a:solidFill>
+                  <a:srgbClr val="64748B"/>
+                </a:solidFill>
+                <a:latin typeface="Calibri" pitchFamily="34" charset="0"/>
+                <a:ea typeface="Calibri" pitchFamily="34" charset="-122"/>
+                <a:cs typeface="Calibri" pitchFamily="34" charset="-120"/>
+              </a:rPr>
+              <a:t>Chaque appel HTTP ajoute sérialisation + connexion + timeout entre composants du MÊME processus NiFi. Coût réseau pour rien.</a:t>
+            </a:r>
+            <a:endParaRPr lang="en-US" sz="1000" dirty="0"/>
+          </a:p>
+        </p:txBody>
+      </p:sp>
+      <p:sp>
+        <p:nvSpPr>
+          <p:cNvPr id="23" name="Shape 21"/>
+          <p:cNvSpPr/>
+          <p:nvPr/>
+        </p:nvSpPr>
+        <p:spPr>
+          <a:xfrm>
+            <a:off x="274320" y="3355848"/>
+            <a:ext cx="8595360" cy="731520"/>
+          </a:xfrm>
+          <a:prstGeom prst="rect">
+            <a:avLst/>
+          </a:prstGeom>
+          <a:solidFill>
+            <a:srgbClr val="FFFFFF"/>
+          </a:solidFill>
+          <a:ln/>
+          <a:effectLst>
+            <a:outerShdw sx="100000" sy="100000" kx="0" ky="0" algn="bl" rotWithShape="0" blurRad="101600" dist="38100" dir="8100000">
+              <a:srgbClr val="000000">
+                <a:alpha val="12000"/>
+              </a:srgbClr>
+            </a:outerShdw>
+          </a:effectLst>
+        </p:spPr>
+      </p:sp>
+      <p:sp>
+        <p:nvSpPr>
+          <p:cNvPr id="24" name="Shape 22"/>
+          <p:cNvSpPr/>
+          <p:nvPr/>
+        </p:nvSpPr>
+        <p:spPr>
+          <a:xfrm>
+            <a:off x="274320" y="3355848"/>
+            <a:ext cx="64008" cy="731520"/>
+          </a:xfrm>
+          <a:prstGeom prst="rect">
+            <a:avLst/>
+          </a:prstGeom>
+          <a:solidFill>
+            <a:srgbClr val="028090"/>
+          </a:solidFill>
+          <a:ln/>
+        </p:spPr>
+      </p:sp>
+      <p:sp>
+        <p:nvSpPr>
+          <p:cNvPr id="25" name="Shape 23"/>
+          <p:cNvSpPr/>
+          <p:nvPr/>
+        </p:nvSpPr>
+        <p:spPr>
+          <a:xfrm>
+            <a:off x="384048" y="3511296"/>
+            <a:ext cx="402336" cy="402336"/>
+          </a:xfrm>
+          <a:prstGeom prst="ellipse">
+            <a:avLst/>
+          </a:prstGeom>
+          <a:solidFill>
+            <a:srgbClr val="028090"/>
+          </a:solidFill>
+          <a:ln/>
+        </p:spPr>
+      </p:sp>
+      <p:sp>
+        <p:nvSpPr>
+          <p:cNvPr id="26" name="Text 24"/>
+          <p:cNvSpPr/>
+          <p:nvPr/>
+        </p:nvSpPr>
+        <p:spPr>
+          <a:xfrm>
+            <a:off x="384048" y="3511296"/>
+            <a:ext cx="402336" cy="402336"/>
+          </a:xfrm>
+          <a:prstGeom prst="rect">
+            <a:avLst/>
+          </a:prstGeom>
+          <a:noFill/>
+          <a:ln/>
+        </p:spPr>
+        <p:txBody>
+          <a:bodyPr wrap="square" lIns="0" tIns="0" rIns="0" bIns="0" rtlCol="0" anchor="ctr"/>
+          <a:lstStyle/>
+          <a:p>
+            <a:pPr algn="ctr" indent="0" marL="0">
+              <a:buNone/>
+            </a:pPr>
+            <a:r>
+              <a:rPr lang="en-US" sz="1400" b="1" dirty="0">
+                <a:solidFill>
+                  <a:srgbClr val="FFFFFF"/>
+                </a:solidFill>
+                <a:latin typeface="Calibri" pitchFamily="34" charset="0"/>
+                <a:ea typeface="Calibri" pitchFamily="34" charset="-122"/>
+                <a:cs typeface="Calibri" pitchFamily="34" charset="-120"/>
+              </a:rPr>
+              <a:t>4</a:t>
+            </a:r>
+            <a:endParaRPr lang="en-US" sz="1400" dirty="0"/>
+          </a:p>
+        </p:txBody>
+      </p:sp>
+      <p:sp>
+        <p:nvSpPr>
+          <p:cNvPr id="27" name="Text 25"/>
+          <p:cNvSpPr/>
+          <p:nvPr/>
+        </p:nvSpPr>
+        <p:spPr>
+          <a:xfrm>
+            <a:off x="914400" y="3410712"/>
+            <a:ext cx="7772400" cy="274320"/>
+          </a:xfrm>
+          <a:prstGeom prst="rect">
+            <a:avLst/>
+          </a:prstGeom>
+          <a:noFill/>
+          <a:ln/>
+        </p:spPr>
+        <p:txBody>
+          <a:bodyPr wrap="square" lIns="0" tIns="0" rIns="0" bIns="0" rtlCol="0" anchor="ctr"/>
+          <a:lstStyle/>
+          <a:p>
+            <a:pPr indent="0" marL="0">
+              <a:buNone/>
+            </a:pPr>
+            <a:r>
+              <a:rPr lang="en-US" sz="1200" b="1" dirty="0">
+                <a:solidFill>
+                  <a:srgbClr val="021B3A"/>
+                </a:solidFill>
+                <a:latin typeface="Calibri" pitchFamily="34" charset="0"/>
+                <a:ea typeface="Calibri" pitchFamily="34" charset="-122"/>
+                <a:cs typeface="Calibri" pitchFamily="34" charset="-120"/>
+              </a:rPr>
+              <a:t>Complexité explosive</a:t>
+            </a:r>
+            <a:endParaRPr lang="en-US" sz="1200" dirty="0"/>
+          </a:p>
+        </p:txBody>
+      </p:sp>
+      <p:sp>
+        <p:nvSpPr>
+          <p:cNvPr id="28" name="Text 26"/>
+          <p:cNvSpPr/>
+          <p:nvPr/>
+        </p:nvSpPr>
+        <p:spPr>
+          <a:xfrm>
+            <a:off x="914400" y="3703320"/>
+            <a:ext cx="7772400" cy="338328"/>
+          </a:xfrm>
+          <a:prstGeom prst="rect">
+            <a:avLst/>
+          </a:prstGeom>
+          <a:noFill/>
+          <a:ln/>
+        </p:spPr>
+        <p:txBody>
+          <a:bodyPr wrap="square" lIns="0" tIns="0" rIns="0" bIns="0" rtlCol="0" anchor="ctr"/>
+          <a:lstStyle/>
+          <a:p>
+            <a:pPr indent="0" marL="0">
+              <a:buNone/>
+            </a:pPr>
+            <a:r>
+              <a:rPr lang="en-US" sz="1000" dirty="0">
+                <a:solidFill>
+                  <a:srgbClr val="64748B"/>
+                </a:solidFill>
+                <a:latin typeface="Calibri" pitchFamily="34" charset="0"/>
+                <a:ea typeface="Calibri" pitchFamily="34" charset="-122"/>
+                <a:cs typeface="Calibri" pitchFamily="34" charset="-120"/>
+              </a:rPr>
+              <a:t>Timeouts, erreurs réseau, authentification, versioning d'API interne... Tous les problèmes des microservices distribués dans un outil pas fait pour ça.</a:t>
+            </a:r>
+            <a:endParaRPr lang="en-US" sz="1000" dirty="0"/>
+          </a:p>
+        </p:txBody>
+      </p:sp>
+      <p:sp>
+        <p:nvSpPr>
+          <p:cNvPr id="29" name="Shape 27"/>
+          <p:cNvSpPr/>
+          <p:nvPr/>
+        </p:nvSpPr>
+        <p:spPr>
+          <a:xfrm>
+            <a:off x="274320" y="4206240"/>
+            <a:ext cx="8595360" cy="731520"/>
+          </a:xfrm>
+          <a:prstGeom prst="rect">
+            <a:avLst/>
+          </a:prstGeom>
+          <a:solidFill>
+            <a:srgbClr val="FFFFFF"/>
+          </a:solidFill>
+          <a:ln/>
+          <a:effectLst>
+            <a:outerShdw sx="100000" sy="100000" kx="0" ky="0" algn="bl" rotWithShape="0" blurRad="101600" dist="38100" dir="8100000">
+              <a:srgbClr val="000000">
+                <a:alpha val="12000"/>
+              </a:srgbClr>
+            </a:outerShdw>
+          </a:effectLst>
+        </p:spPr>
+      </p:sp>
+      <p:sp>
+        <p:nvSpPr>
+          <p:cNvPr id="30" name="Shape 28"/>
+          <p:cNvSpPr/>
+          <p:nvPr/>
+        </p:nvSpPr>
+        <p:spPr>
+          <a:xfrm>
+            <a:off x="274320" y="4206240"/>
+            <a:ext cx="64008" cy="731520"/>
+          </a:xfrm>
+          <a:prstGeom prst="rect">
+            <a:avLst/>
+          </a:prstGeom>
+          <a:solidFill>
+            <a:srgbClr val="065A82"/>
+          </a:solidFill>
+          <a:ln/>
+        </p:spPr>
+      </p:sp>
+      <p:sp>
+        <p:nvSpPr>
+          <p:cNvPr id="31" name="Shape 29"/>
+          <p:cNvSpPr/>
+          <p:nvPr/>
+        </p:nvSpPr>
+        <p:spPr>
+          <a:xfrm>
+            <a:off x="384048" y="4361688"/>
+            <a:ext cx="402336" cy="402336"/>
+          </a:xfrm>
+          <a:prstGeom prst="ellipse">
+            <a:avLst/>
+          </a:prstGeom>
+          <a:solidFill>
+            <a:srgbClr val="065A82"/>
+          </a:solidFill>
+          <a:ln/>
+        </p:spPr>
+      </p:sp>
+      <p:sp>
+        <p:nvSpPr>
+          <p:cNvPr id="32" name="Text 30"/>
+          <p:cNvSpPr/>
+          <p:nvPr/>
+        </p:nvSpPr>
+        <p:spPr>
+          <a:xfrm>
+            <a:off x="384048" y="4361688"/>
+            <a:ext cx="402336" cy="402336"/>
+          </a:xfrm>
+          <a:prstGeom prst="rect">
+            <a:avLst/>
+          </a:prstGeom>
+          <a:noFill/>
+          <a:ln/>
+        </p:spPr>
+        <p:txBody>
+          <a:bodyPr wrap="square" lIns="0" tIns="0" rIns="0" bIns="0" rtlCol="0" anchor="ctr"/>
+          <a:lstStyle/>
+          <a:p>
+            <a:pPr algn="ctr" indent="0" marL="0">
+              <a:buNone/>
+            </a:pPr>
+            <a:r>
+              <a:rPr lang="en-US" sz="1400" b="1" dirty="0">
+                <a:solidFill>
+                  <a:srgbClr val="FFFFFF"/>
+                </a:solidFill>
+                <a:latin typeface="Calibri" pitchFamily="34" charset="0"/>
+                <a:ea typeface="Calibri" pitchFamily="34" charset="-122"/>
+                <a:cs typeface="Calibri" pitchFamily="34" charset="-120"/>
+              </a:rPr>
+              <a:t>5</a:t>
+            </a:r>
+            <a:endParaRPr lang="en-US" sz="1400" dirty="0"/>
+          </a:p>
+        </p:txBody>
+      </p:sp>
+      <p:sp>
+        <p:nvSpPr>
+          <p:cNvPr id="33" name="Text 31"/>
+          <p:cNvSpPr/>
+          <p:nvPr/>
+        </p:nvSpPr>
+        <p:spPr>
+          <a:xfrm>
+            <a:off x="914400" y="4261104"/>
+            <a:ext cx="7772400" cy="274320"/>
+          </a:xfrm>
+          <a:prstGeom prst="rect">
+            <a:avLst/>
+          </a:prstGeom>
+          <a:noFill/>
+          <a:ln/>
+        </p:spPr>
+        <p:txBody>
+          <a:bodyPr wrap="square" lIns="0" tIns="0" rIns="0" bIns="0" rtlCol="0" anchor="ctr"/>
+          <a:lstStyle/>
+          <a:p>
+            <a:pPr indent="0" marL="0">
+              <a:buNone/>
+            </a:pPr>
+            <a:r>
+              <a:rPr lang="en-US" sz="1200" b="1" dirty="0">
+                <a:solidFill>
+                  <a:srgbClr val="021B3A"/>
+                </a:solidFill>
+                <a:latin typeface="Calibri" pitchFamily="34" charset="0"/>
+                <a:ea typeface="Calibri" pitchFamily="34" charset="-122"/>
+                <a:cs typeface="Calibri" pitchFamily="34" charset="-120"/>
+              </a:rPr>
+              <a:t>Perte de traçabilité des FlowFiles</a:t>
+            </a:r>
+            <a:endParaRPr lang="en-US" sz="1200" dirty="0"/>
+          </a:p>
+        </p:txBody>
+      </p:sp>
+      <p:sp>
+        <p:nvSpPr>
+          <p:cNvPr id="34" name="Text 32"/>
+          <p:cNvSpPr/>
+          <p:nvPr/>
+        </p:nvSpPr>
+        <p:spPr>
+          <a:xfrm>
+            <a:off x="914400" y="4553712"/>
+            <a:ext cx="7772400" cy="338328"/>
+          </a:xfrm>
+          <a:prstGeom prst="rect">
+            <a:avLst/>
+          </a:prstGeom>
+          <a:noFill/>
+          <a:ln/>
+        </p:spPr>
+        <p:txBody>
+          <a:bodyPr wrap="square" lIns="0" tIns="0" rIns="0" bIns="0" rtlCol="0" anchor="ctr"/>
+          <a:lstStyle/>
+          <a:p>
+            <a:pPr indent="0" marL="0">
+              <a:buNone/>
+            </a:pPr>
+            <a:r>
+              <a:rPr lang="en-US" sz="1000" dirty="0">
+                <a:solidFill>
+                  <a:srgbClr val="64748B"/>
+                </a:solidFill>
+                <a:latin typeface="Calibri" pitchFamily="34" charset="0"/>
+                <a:ea typeface="Calibri" pitchFamily="34" charset="-122"/>
+                <a:cs typeface="Calibri" pitchFamily="34" charset="-120"/>
+              </a:rPr>
+              <a:t>Dans NiFi, tu traces les FlowFiles visuellement. Dès que tu passes par HTTP, le FlowFile disparaît d'un côté et réapparaît de l'autre — sans lien visible.</a:t>
+            </a:r>
+            <a:endParaRPr lang="en-US" sz="1000" dirty="0"/>
+          </a:p>
+        </p:txBody>
+      </p:sp>
+    </p:spTree>
+  </p:cSld>
+  <p:clrMapOvr>
+    <a:masterClrMapping/>
+  </p:clrMapOvr>
+</p:sld>
+</file>
+
+<file path=ppt/slides/slide14.xml><?xml version="1.0" encoding="utf-8"?>
+<p:sld xmlns:a="http://schemas.openxmlformats.org/drawingml/2006/main" xmlns:r="http://schemas.openxmlformats.org/officeDocument/2006/relationships" xmlns:p="http://schemas.openxmlformats.org/presentationml/2006/main">
+  <p:cSld name="Slide 14">
+    <p:bg>
+      <p:bgPr>
+        <a:solidFill>
+          <a:srgbClr val="F0F4F8"/>
+        </a:solidFill>
+      </p:bgPr>
+    </p:bg>
+    <p:spTree>
+      <p:nvGrpSpPr>
+        <p:cNvPr id="1" name=""/>
+        <p:cNvGrpSpPr/>
+        <p:nvPr/>
+      </p:nvGrpSpPr>
+      <p:grpSpPr>
+        <a:xfrm>
+          <a:off x="0" y="0"/>
+          <a:ext cx="0" cy="0"/>
+          <a:chOff x="0" y="0"/>
+          <a:chExt cx="0" cy="0"/>
+        </a:xfrm>
+      </p:grpSpPr>
+      <p:sp>
+        <p:nvSpPr>
+          <p:cNvPr id="2" name="Shape 0"/>
+          <p:cNvSpPr/>
+          <p:nvPr/>
+        </p:nvSpPr>
+        <p:spPr>
+          <a:xfrm>
+            <a:off x="0" y="0"/>
+            <a:ext cx="9144000" cy="685800"/>
+          </a:xfrm>
+          <a:prstGeom prst="rect">
+            <a:avLst/>
+          </a:prstGeom>
+          <a:solidFill>
+            <a:srgbClr val="021B3A"/>
+          </a:solidFill>
+          <a:ln/>
+        </p:spPr>
+      </p:sp>
+      <p:sp>
+        <p:nvSpPr>
+          <p:cNvPr id="3" name="Shape 1"/>
+          <p:cNvSpPr/>
+          <p:nvPr/>
+        </p:nvSpPr>
+        <p:spPr>
+          <a:xfrm>
+            <a:off x="0" y="0"/>
+            <a:ext cx="164592" cy="685800"/>
+          </a:xfrm>
+          <a:prstGeom prst="rect">
+            <a:avLst/>
+          </a:prstGeom>
+          <a:solidFill>
+            <a:srgbClr val="02C39A"/>
+          </a:solidFill>
+          <a:ln/>
+        </p:spPr>
+      </p:sp>
+      <p:sp>
+        <p:nvSpPr>
+          <p:cNvPr id="4" name="Text 2"/>
+          <p:cNvSpPr/>
+          <p:nvPr/>
+        </p:nvSpPr>
+        <p:spPr>
+          <a:xfrm>
+            <a:off x="365760" y="73152"/>
+            <a:ext cx="8229600" cy="548640"/>
+          </a:xfrm>
+          <a:prstGeom prst="rect">
+            <a:avLst/>
+          </a:prstGeom>
+          <a:noFill/>
+          <a:ln/>
+        </p:spPr>
+        <p:txBody>
+          <a:bodyPr wrap="square" lIns="0" tIns="0" rIns="0" bIns="0" rtlCol="0" anchor="ctr"/>
+          <a:lstStyle/>
+          <a:p>
+            <a:pPr indent="0" marL="0">
+              <a:buNone/>
+            </a:pPr>
+            <a:r>
+              <a:rPr lang="en-US" sz="2400" b="1" dirty="0">
+                <a:solidFill>
+                  <a:srgbClr val="FFFFFF"/>
+                </a:solidFill>
+                <a:latin typeface="Calibri" pitchFamily="34" charset="0"/>
+                <a:ea typeface="Calibri" pitchFamily="34" charset="-122"/>
+                <a:cs typeface="Calibri" pitchFamily="34" charset="-120"/>
+              </a:rPr>
+              <a:t>Quand l'API est Légitime dans NiFi ?</a:t>
+            </a:r>
+            <a:endParaRPr lang="en-US" sz="2400" dirty="0"/>
+          </a:p>
+        </p:txBody>
+      </p:sp>
+      <p:sp>
+        <p:nvSpPr>
+          <p:cNvPr id="5" name="Shape 3"/>
+          <p:cNvSpPr/>
+          <p:nvPr/>
+        </p:nvSpPr>
+        <p:spPr>
+          <a:xfrm>
+            <a:off x="274320" y="804672"/>
+            <a:ext cx="8595360" cy="2148840"/>
+          </a:xfrm>
+          <a:prstGeom prst="rect">
+            <a:avLst/>
+          </a:prstGeom>
+          <a:solidFill>
+            <a:srgbClr val="FFFFFF"/>
+          </a:solidFill>
+          <a:ln/>
+          <a:effectLst>
+            <a:outerShdw sx="100000" sy="100000" kx="0" ky="0" algn="bl" rotWithShape="0" blurRad="101600" dist="38100" dir="8100000">
+              <a:srgbClr val="000000">
+                <a:alpha val="12000"/>
+              </a:srgbClr>
+            </a:outerShdw>
+          </a:effectLst>
+        </p:spPr>
+      </p:sp>
+      <p:sp>
+        <p:nvSpPr>
+          <p:cNvPr id="6" name="Shape 4"/>
+          <p:cNvSpPr/>
+          <p:nvPr/>
+        </p:nvSpPr>
+        <p:spPr>
+          <a:xfrm>
+            <a:off x="274320" y="804672"/>
+            <a:ext cx="8595360" cy="320040"/>
+          </a:xfrm>
+          <a:prstGeom prst="rect">
+            <a:avLst/>
+          </a:prstGeom>
+          <a:solidFill>
+            <a:srgbClr val="38A169"/>
+          </a:solidFill>
+          <a:ln/>
+        </p:spPr>
+      </p:sp>
+      <p:sp>
+        <p:nvSpPr>
+          <p:cNvPr id="7" name="Text 5"/>
+          <p:cNvSpPr/>
+          <p:nvPr/>
+        </p:nvSpPr>
+        <p:spPr>
+          <a:xfrm>
+            <a:off x="320040" y="804672"/>
+            <a:ext cx="8503920" cy="320040"/>
+          </a:xfrm>
+          <a:prstGeom prst="rect">
+            <a:avLst/>
+          </a:prstGeom>
+          <a:noFill/>
+          <a:ln/>
+        </p:spPr>
+        <p:txBody>
+          <a:bodyPr wrap="square" lIns="0" tIns="0" rIns="0" bIns="0" rtlCol="0" anchor="ctr"/>
+          <a:lstStyle/>
+          <a:p>
+            <a:pPr indent="0" marL="0">
+              <a:buNone/>
+            </a:pPr>
+            <a:r>
+              <a:rPr lang="en-US" sz="1300" b="1" dirty="0">
+                <a:solidFill>
+                  <a:srgbClr val="FFFFFF"/>
+                </a:solidFill>
+                <a:latin typeface="Calibri" pitchFamily="34" charset="0"/>
+                <a:ea typeface="Calibri" pitchFamily="34" charset="-122"/>
+                <a:cs typeface="Calibri" pitchFamily="34" charset="-120"/>
+              </a:rPr>
+              <a:t>✅  Le seul cas légitime : exposer NiFi vers l'EXTÉRIEUR</a:t>
+            </a:r>
+            <a:endParaRPr lang="en-US" sz="1300" dirty="0"/>
+          </a:p>
+        </p:txBody>
+      </p:sp>
+      <p:sp>
+        <p:nvSpPr>
+          <p:cNvPr id="8" name="Shape 6"/>
+          <p:cNvSpPr/>
+          <p:nvPr/>
+        </p:nvSpPr>
+        <p:spPr>
+          <a:xfrm>
+            <a:off x="457200" y="1234440"/>
+            <a:ext cx="1280160" cy="594360"/>
+          </a:xfrm>
+          <a:prstGeom prst="rect">
+            <a:avLst/>
+          </a:prstGeom>
+          <a:solidFill>
+            <a:srgbClr val="8B5CF6"/>
+          </a:solidFill>
+          <a:ln/>
+          <a:effectLst>
+            <a:outerShdw sx="100000" sy="100000" kx="0" ky="0" algn="bl" rotWithShape="0" blurRad="101600" dist="38100" dir="8100000">
+              <a:srgbClr val="000000">
+                <a:alpha val="12000"/>
+              </a:srgbClr>
+            </a:outerShdw>
+          </a:effectLst>
+        </p:spPr>
+      </p:sp>
+      <p:sp>
+        <p:nvSpPr>
+          <p:cNvPr id="9" name="Text 7"/>
+          <p:cNvSpPr/>
+          <p:nvPr/>
+        </p:nvSpPr>
+        <p:spPr>
+          <a:xfrm>
+            <a:off x="457200" y="1234440"/>
+            <a:ext cx="1280160" cy="594360"/>
+          </a:xfrm>
+          <a:prstGeom prst="rect">
+            <a:avLst/>
+          </a:prstGeom>
+          <a:noFill/>
+          <a:ln/>
+        </p:spPr>
+        <p:txBody>
+          <a:bodyPr wrap="square" lIns="0" tIns="0" rIns="0" bIns="0" rtlCol="0" anchor="ctr"/>
+          <a:lstStyle/>
+          <a:p>
+            <a:pPr algn="ctr" indent="0" marL="0">
+              <a:buNone/>
+            </a:pPr>
+            <a:r>
+              <a:rPr lang="en-US" sz="900" b="1" dirty="0">
+                <a:solidFill>
+                  <a:srgbClr val="FFFFFF"/>
+                </a:solidFill>
+                <a:latin typeface="Calibri" pitchFamily="34" charset="0"/>
+                <a:ea typeface="Calibri" pitchFamily="34" charset="-122"/>
+                <a:cs typeface="Calibri" pitchFamily="34" charset="-120"/>
+              </a:rPr>
+              <a:t>Système</a:t>
+            </a:r>
+            <a:endParaRPr lang="en-US" sz="900" dirty="0"/>
+          </a:p>
+          <a:p>
+            <a:pPr algn="ctr" indent="0" marL="0">
+              <a:buNone/>
+            </a:pPr>
+            <a:r>
+              <a:rPr lang="en-US" sz="900" b="1" dirty="0">
+                <a:solidFill>
+                  <a:srgbClr val="FFFFFF"/>
+                </a:solidFill>
+                <a:latin typeface="Calibri" pitchFamily="34" charset="0"/>
+                <a:ea typeface="Calibri" pitchFamily="34" charset="-122"/>
+                <a:cs typeface="Calibri" pitchFamily="34" charset="-120"/>
+              </a:rPr>
+              <a:t>externe A</a:t>
+            </a:r>
+            <a:endParaRPr lang="en-US" sz="900" dirty="0"/>
+          </a:p>
+        </p:txBody>
+      </p:sp>
+      <p:sp>
+        <p:nvSpPr>
+          <p:cNvPr id="10" name="Shape 8"/>
+          <p:cNvSpPr/>
+          <p:nvPr/>
+        </p:nvSpPr>
+        <p:spPr>
+          <a:xfrm>
+            <a:off x="1737360" y="1527048"/>
+            <a:ext cx="365760" cy="0"/>
+          </a:xfrm>
+          <a:prstGeom prst="line">
+            <a:avLst/>
+          </a:prstGeom>
+          <a:noFill/>
+          <a:ln w="25400">
+            <a:solidFill>
+              <a:srgbClr val="38A169"/>
+            </a:solidFill>
+            <a:prstDash val="solid"/>
+          </a:ln>
+        </p:spPr>
+      </p:sp>
+      <p:sp>
+        <p:nvSpPr>
+          <p:cNvPr id="11" name="Shape 9"/>
+          <p:cNvSpPr/>
+          <p:nvPr/>
+        </p:nvSpPr>
+        <p:spPr>
+          <a:xfrm>
+            <a:off x="1920240" y="1234440"/>
+            <a:ext cx="1280160" cy="594360"/>
+          </a:xfrm>
+          <a:prstGeom prst="rect">
+            <a:avLst/>
+          </a:prstGeom>
+          <a:solidFill>
+            <a:srgbClr val="DD6B20"/>
+          </a:solidFill>
+          <a:ln/>
+          <a:effectLst>
+            <a:outerShdw sx="100000" sy="100000" kx="0" ky="0" algn="bl" rotWithShape="0" blurRad="101600" dist="38100" dir="8100000">
+              <a:srgbClr val="000000">
+                <a:alpha val="12000"/>
+              </a:srgbClr>
+            </a:outerShdw>
+          </a:effectLst>
+        </p:spPr>
+      </p:sp>
+      <p:sp>
+        <p:nvSpPr>
+          <p:cNvPr id="12" name="Text 10"/>
+          <p:cNvSpPr/>
+          <p:nvPr/>
+        </p:nvSpPr>
+        <p:spPr>
+          <a:xfrm>
+            <a:off x="1920240" y="1234440"/>
+            <a:ext cx="1280160" cy="594360"/>
+          </a:xfrm>
+          <a:prstGeom prst="rect">
+            <a:avLst/>
+          </a:prstGeom>
+          <a:noFill/>
+          <a:ln/>
+        </p:spPr>
+        <p:txBody>
+          <a:bodyPr wrap="square" lIns="0" tIns="0" rIns="0" bIns="0" rtlCol="0" anchor="ctr"/>
+          <a:lstStyle/>
+          <a:p>
+            <a:pPr algn="ctr" indent="0" marL="0">
+              <a:buNone/>
+            </a:pPr>
+            <a:r>
+              <a:rPr lang="en-US" sz="900" b="1" dirty="0">
+                <a:solidFill>
+                  <a:srgbClr val="FFFFFF"/>
+                </a:solidFill>
+                <a:latin typeface="Calibri" pitchFamily="34" charset="0"/>
+                <a:ea typeface="Calibri" pitchFamily="34" charset="-122"/>
+                <a:cs typeface="Calibri" pitchFamily="34" charset="-120"/>
+              </a:rPr>
+              <a:t>Application</a:t>
+            </a:r>
+            <a:endParaRPr lang="en-US" sz="900" dirty="0"/>
+          </a:p>
+          <a:p>
+            <a:pPr algn="ctr" indent="0" marL="0">
+              <a:buNone/>
+            </a:pPr>
+            <a:r>
+              <a:rPr lang="en-US" sz="900" b="1" dirty="0">
+                <a:solidFill>
+                  <a:srgbClr val="FFFFFF"/>
+                </a:solidFill>
+                <a:latin typeface="Calibri" pitchFamily="34" charset="0"/>
+                <a:ea typeface="Calibri" pitchFamily="34" charset="-122"/>
+                <a:cs typeface="Calibri" pitchFamily="34" charset="-120"/>
+              </a:rPr>
+              <a:t>tierce B</a:t>
+            </a:r>
+            <a:endParaRPr lang="en-US" sz="900" dirty="0"/>
+          </a:p>
+        </p:txBody>
+      </p:sp>
+      <p:sp>
+        <p:nvSpPr>
+          <p:cNvPr id="13" name="Shape 11"/>
+          <p:cNvSpPr/>
+          <p:nvPr/>
+        </p:nvSpPr>
+        <p:spPr>
+          <a:xfrm>
+            <a:off x="3200400" y="1527048"/>
+            <a:ext cx="365760" cy="0"/>
+          </a:xfrm>
+          <a:prstGeom prst="line">
+            <a:avLst/>
+          </a:prstGeom>
+          <a:noFill/>
+          <a:ln w="25400">
+            <a:solidFill>
+              <a:srgbClr val="38A169"/>
+            </a:solidFill>
+            <a:prstDash val="solid"/>
+          </a:ln>
+        </p:spPr>
+      </p:sp>
+      <p:sp>
+        <p:nvSpPr>
+          <p:cNvPr id="14" name="Shape 12"/>
+          <p:cNvSpPr/>
+          <p:nvPr/>
+        </p:nvSpPr>
+        <p:spPr>
+          <a:xfrm>
+            <a:off x="3383280" y="1234440"/>
+            <a:ext cx="1280160" cy="594360"/>
+          </a:xfrm>
+          <a:prstGeom prst="rect">
+            <a:avLst/>
+          </a:prstGeom>
+          <a:solidFill>
+            <a:srgbClr val="065A82"/>
+          </a:solidFill>
+          <a:ln/>
+          <a:effectLst>
+            <a:outerShdw sx="100000" sy="100000" kx="0" ky="0" algn="bl" rotWithShape="0" blurRad="101600" dist="38100" dir="8100000">
+              <a:srgbClr val="000000">
+                <a:alpha val="12000"/>
+              </a:srgbClr>
+            </a:outerShdw>
+          </a:effectLst>
+        </p:spPr>
+      </p:sp>
+      <p:sp>
+        <p:nvSpPr>
+          <p:cNvPr id="15" name="Text 13"/>
+          <p:cNvSpPr/>
+          <p:nvPr/>
+        </p:nvSpPr>
+        <p:spPr>
+          <a:xfrm>
+            <a:off x="3383280" y="1234440"/>
+            <a:ext cx="1280160" cy="594360"/>
+          </a:xfrm>
+          <a:prstGeom prst="rect">
+            <a:avLst/>
+          </a:prstGeom>
+          <a:noFill/>
+          <a:ln/>
+        </p:spPr>
+        <p:txBody>
+          <a:bodyPr wrap="square" lIns="0" tIns="0" rIns="0" bIns="0" rtlCol="0" anchor="ctr"/>
+          <a:lstStyle/>
+          <a:p>
+            <a:pPr algn="ctr" indent="0" marL="0">
+              <a:buNone/>
+            </a:pPr>
+            <a:r>
+              <a:rPr lang="en-US" sz="900" b="1" dirty="0">
+                <a:solidFill>
+                  <a:srgbClr val="FFFFFF"/>
+                </a:solidFill>
+                <a:latin typeface="Calibri" pitchFamily="34" charset="0"/>
+                <a:ea typeface="Calibri" pitchFamily="34" charset="-122"/>
+                <a:cs typeface="Calibri" pitchFamily="34" charset="-120"/>
+              </a:rPr>
+              <a:t>API</a:t>
+            </a:r>
+            <a:endParaRPr lang="en-US" sz="900" dirty="0"/>
+          </a:p>
+          <a:p>
+            <a:pPr algn="ctr" indent="0" marL="0">
+              <a:buNone/>
+            </a:pPr>
+            <a:r>
+              <a:rPr lang="en-US" sz="900" b="1" dirty="0">
+                <a:solidFill>
+                  <a:srgbClr val="FFFFFF"/>
+                </a:solidFill>
+                <a:latin typeface="Calibri" pitchFamily="34" charset="0"/>
+                <a:ea typeface="Calibri" pitchFamily="34" charset="-122"/>
+                <a:cs typeface="Calibri" pitchFamily="34" charset="-120"/>
+              </a:rPr>
+              <a:t>externe C</a:t>
+            </a:r>
+            <a:endParaRPr lang="en-US" sz="900" dirty="0"/>
+          </a:p>
+        </p:txBody>
+      </p:sp>
+      <p:sp>
+        <p:nvSpPr>
+          <p:cNvPr id="16" name="Shape 14"/>
+          <p:cNvSpPr/>
+          <p:nvPr/>
+        </p:nvSpPr>
+        <p:spPr>
+          <a:xfrm>
+            <a:off x="4663440" y="1527048"/>
+            <a:ext cx="365760" cy="0"/>
+          </a:xfrm>
+          <a:prstGeom prst="line">
+            <a:avLst/>
+          </a:prstGeom>
+          <a:noFill/>
+          <a:ln w="25400">
+            <a:solidFill>
+              <a:srgbClr val="38A169"/>
+            </a:solidFill>
+            <a:prstDash val="solid"/>
+          </a:ln>
+        </p:spPr>
+      </p:sp>
+      <p:sp>
+        <p:nvSpPr>
+          <p:cNvPr id="17" name="Text 15"/>
+          <p:cNvSpPr/>
+          <p:nvPr/>
+        </p:nvSpPr>
+        <p:spPr>
+          <a:xfrm>
+            <a:off x="4663440" y="1389888"/>
+            <a:ext cx="731520" cy="256032"/>
+          </a:xfrm>
+          <a:prstGeom prst="rect">
+            <a:avLst/>
+          </a:prstGeom>
+          <a:noFill/>
+          <a:ln/>
+        </p:spPr>
+        <p:txBody>
+          <a:bodyPr wrap="square" lIns="0" tIns="0" rIns="0" bIns="0" rtlCol="0" anchor="ctr"/>
+          <a:lstStyle/>
+          <a:p>
+            <a:pPr algn="ctr" indent="0" marL="0">
+              <a:buNone/>
+            </a:pPr>
+            <a:r>
+              <a:rPr lang="en-US" sz="900" dirty="0">
+                <a:solidFill>
+                  <a:srgbClr val="38A169"/>
+                </a:solidFill>
+                <a:latin typeface="Calibri" pitchFamily="34" charset="0"/>
+                <a:ea typeface="Calibri" pitchFamily="34" charset="-122"/>
+                <a:cs typeface="Calibri" pitchFamily="34" charset="-120"/>
+              </a:rPr>
+              <a:t>HTTP</a:t>
+            </a:r>
+            <a:endParaRPr lang="en-US" sz="900" dirty="0"/>
+          </a:p>
+        </p:txBody>
+      </p:sp>
+      <p:sp>
+        <p:nvSpPr>
+          <p:cNvPr id="18" name="Shape 16"/>
+          <p:cNvSpPr/>
+          <p:nvPr/>
+        </p:nvSpPr>
+        <p:spPr>
+          <a:xfrm>
+            <a:off x="4663440" y="1527048"/>
+            <a:ext cx="731520" cy="0"/>
+          </a:xfrm>
+          <a:prstGeom prst="line">
+            <a:avLst/>
+          </a:prstGeom>
+          <a:noFill/>
+          <a:ln w="25400">
+            <a:solidFill>
+              <a:srgbClr val="38A169"/>
+            </a:solidFill>
+            <a:prstDash val="solid"/>
+          </a:ln>
+        </p:spPr>
+      </p:sp>
+      <p:sp>
+        <p:nvSpPr>
+          <p:cNvPr id="19" name="Shape 17"/>
+          <p:cNvSpPr/>
+          <p:nvPr/>
+        </p:nvSpPr>
+        <p:spPr>
+          <a:xfrm>
+            <a:off x="5440680" y="1170432"/>
+            <a:ext cx="2011680" cy="731520"/>
+          </a:xfrm>
+          <a:prstGeom prst="rect">
+            <a:avLst/>
+          </a:prstGeom>
+          <a:solidFill>
+            <a:srgbClr val="021B3A"/>
+          </a:solidFill>
+          <a:ln/>
+          <a:effectLst>
+            <a:outerShdw sx="100000" sy="100000" kx="0" ky="0" algn="bl" rotWithShape="0" blurRad="101600" dist="38100" dir="8100000">
+              <a:srgbClr val="000000">
+                <a:alpha val="12000"/>
+              </a:srgbClr>
+            </a:outerShdw>
+          </a:effectLst>
+        </p:spPr>
+      </p:sp>
+      <p:sp>
+        <p:nvSpPr>
+          <p:cNvPr id="20" name="Text 18"/>
+          <p:cNvSpPr/>
+          <p:nvPr/>
+        </p:nvSpPr>
+        <p:spPr>
+          <a:xfrm>
+            <a:off x="5440680" y="1170432"/>
+            <a:ext cx="2011680" cy="731520"/>
+          </a:xfrm>
+          <a:prstGeom prst="rect">
+            <a:avLst/>
+          </a:prstGeom>
+          <a:noFill/>
+          <a:ln/>
+        </p:spPr>
+        <p:txBody>
+          <a:bodyPr wrap="square" lIns="0" tIns="0" rIns="0" bIns="0" rtlCol="0" anchor="ctr"/>
+          <a:lstStyle/>
+          <a:p>
+            <a:pPr algn="ctr" indent="0" marL="0">
+              <a:buNone/>
+            </a:pPr>
+            <a:r>
+              <a:rPr lang="en-US" sz="1100" b="1" dirty="0">
+                <a:solidFill>
+                  <a:srgbClr val="02C39A"/>
+                </a:solidFill>
+                <a:latin typeface="Calibri" pitchFamily="34" charset="0"/>
+                <a:ea typeface="Calibri" pitchFamily="34" charset="-122"/>
+                <a:cs typeface="Calibri" pitchFamily="34" charset="-120"/>
+              </a:rPr>
+              <a:t>NiFi</a:t>
+            </a:r>
+            <a:endParaRPr lang="en-US" sz="1100" dirty="0"/>
+          </a:p>
+          <a:p>
+            <a:pPr algn="ctr" indent="0" marL="0">
+              <a:buNone/>
+            </a:pPr>
+            <a:r>
+              <a:rPr lang="en-US" sz="1100" b="1" dirty="0">
+                <a:solidFill>
+                  <a:srgbClr val="02C39A"/>
+                </a:solidFill>
+                <a:latin typeface="Calibri" pitchFamily="34" charset="0"/>
+                <a:ea typeface="Calibri" pitchFamily="34" charset="-122"/>
+                <a:cs typeface="Calibri" pitchFamily="34" charset="-120"/>
+              </a:rPr>
+              <a:t>ListenHTTP</a:t>
+            </a:r>
+            <a:endParaRPr lang="en-US" sz="1100" dirty="0"/>
+          </a:p>
+        </p:txBody>
+      </p:sp>
+      <p:sp>
+        <p:nvSpPr>
+          <p:cNvPr id="21" name="Shape 19"/>
+          <p:cNvSpPr/>
+          <p:nvPr/>
+        </p:nvSpPr>
+        <p:spPr>
+          <a:xfrm>
+            <a:off x="7452360" y="1527048"/>
+            <a:ext cx="548640" cy="0"/>
+          </a:xfrm>
+          <a:prstGeom prst="line">
+            <a:avLst/>
+          </a:prstGeom>
+          <a:noFill/>
+          <a:ln w="25400">
+            <a:solidFill>
+              <a:srgbClr val="028090"/>
+            </a:solidFill>
+            <a:prstDash val="solid"/>
+          </a:ln>
+        </p:spPr>
+      </p:sp>
+      <p:sp>
+        <p:nvSpPr>
+          <p:cNvPr id="22" name="Shape 20"/>
+          <p:cNvSpPr/>
+          <p:nvPr/>
+        </p:nvSpPr>
+        <p:spPr>
+          <a:xfrm>
+            <a:off x="8001000" y="1170432"/>
+            <a:ext cx="777240" cy="731520"/>
+          </a:xfrm>
+          <a:prstGeom prst="rect">
+            <a:avLst/>
+          </a:prstGeom>
+          <a:solidFill>
+            <a:srgbClr val="028090"/>
+          </a:solidFill>
+          <a:ln/>
+          <a:effectLst>
+            <a:outerShdw sx="100000" sy="100000" kx="0" ky="0" algn="bl" rotWithShape="0" blurRad="101600" dist="38100" dir="8100000">
+              <a:srgbClr val="000000">
+                <a:alpha val="12000"/>
+              </a:srgbClr>
+            </a:outerShdw>
+          </a:effectLst>
+        </p:spPr>
+      </p:sp>
+      <p:sp>
+        <p:nvSpPr>
+          <p:cNvPr id="23" name="Text 21"/>
+          <p:cNvSpPr/>
+          <p:nvPr/>
+        </p:nvSpPr>
+        <p:spPr>
+          <a:xfrm>
+            <a:off x="8001000" y="1170432"/>
+            <a:ext cx="777240" cy="731520"/>
+          </a:xfrm>
+          <a:prstGeom prst="rect">
+            <a:avLst/>
+          </a:prstGeom>
+          <a:noFill/>
+          <a:ln/>
+        </p:spPr>
+        <p:txBody>
+          <a:bodyPr wrap="square" lIns="0" tIns="0" rIns="0" bIns="0" rtlCol="0" anchor="ctr"/>
+          <a:lstStyle/>
+          <a:p>
+            <a:pPr algn="ctr" indent="0" marL="0">
+              <a:buNone/>
+            </a:pPr>
+            <a:r>
+              <a:rPr lang="en-US" sz="800" b="1" dirty="0">
+                <a:solidFill>
+                  <a:srgbClr val="FFFFFF"/>
+                </a:solidFill>
+                <a:latin typeface="Calibri" pitchFamily="34" charset="0"/>
+                <a:ea typeface="Calibri" pitchFamily="34" charset="-122"/>
+                <a:cs typeface="Calibri" pitchFamily="34" charset="-120"/>
+              </a:rPr>
+              <a:t>Pipeline</a:t>
+            </a:r>
+            <a:endParaRPr lang="en-US" sz="800" dirty="0"/>
+          </a:p>
+          <a:p>
+            <a:pPr algn="ctr" indent="0" marL="0">
+              <a:buNone/>
+            </a:pPr>
+            <a:r>
+              <a:rPr lang="en-US" sz="800" b="1" dirty="0">
+                <a:solidFill>
+                  <a:srgbClr val="FFFFFF"/>
+                </a:solidFill>
+                <a:latin typeface="Calibri" pitchFamily="34" charset="0"/>
+                <a:ea typeface="Calibri" pitchFamily="34" charset="-122"/>
+                <a:cs typeface="Calibri" pitchFamily="34" charset="-120"/>
+              </a:rPr>
+              <a:t>interne</a:t>
+            </a:r>
+            <a:endParaRPr lang="en-US" sz="800" dirty="0"/>
+          </a:p>
+        </p:txBody>
+      </p:sp>
+      <p:sp>
+        <p:nvSpPr>
+          <p:cNvPr id="24" name="Text 22"/>
+          <p:cNvSpPr/>
+          <p:nvPr/>
+        </p:nvSpPr>
+        <p:spPr>
+          <a:xfrm>
+            <a:off x="365760" y="1901952"/>
+            <a:ext cx="8412480" cy="347472"/>
+          </a:xfrm>
+          <a:prstGeom prst="rect">
+            <a:avLst/>
+          </a:prstGeom>
+          <a:noFill/>
+          <a:ln/>
+        </p:spPr>
+        <p:txBody>
+          <a:bodyPr wrap="square" lIns="0" tIns="0" rIns="0" bIns="0" rtlCol="0" anchor="ctr"/>
+          <a:lstStyle/>
+          <a:p>
+            <a:pPr indent="0" marL="0">
+              <a:buNone/>
+            </a:pPr>
+            <a:r>
+              <a:rPr lang="en-US" sz="1100" i="1" dirty="0">
+                <a:solidFill>
+                  <a:srgbClr val="38A169"/>
+                </a:solidFill>
+                <a:latin typeface="Calibri" pitchFamily="34" charset="0"/>
+                <a:ea typeface="Calibri" pitchFamily="34" charset="-122"/>
+                <a:cs typeface="Calibri" pitchFamily="34" charset="-120"/>
+              </a:rPr>
+              <a:t>✓ Systèmes externes qui ne sont pas NiFi → tout à fait normal et recommandé</a:t>
+            </a:r>
+            <a:endParaRPr lang="en-US" sz="1100" dirty="0"/>
+          </a:p>
+        </p:txBody>
+      </p:sp>
+      <p:sp>
+        <p:nvSpPr>
+          <p:cNvPr id="25" name="Shape 23"/>
+          <p:cNvSpPr/>
+          <p:nvPr/>
+        </p:nvSpPr>
+        <p:spPr>
+          <a:xfrm>
+            <a:off x="274320" y="3063240"/>
+            <a:ext cx="8595360" cy="1828800"/>
+          </a:xfrm>
+          <a:prstGeom prst="rect">
+            <a:avLst/>
+          </a:prstGeom>
+          <a:solidFill>
+            <a:srgbClr val="021B3A"/>
+          </a:solidFill>
+          <a:ln/>
+          <a:effectLst>
+            <a:outerShdw sx="100000" sy="100000" kx="0" ky="0" algn="bl" rotWithShape="0" blurRad="101600" dist="38100" dir="8100000">
+              <a:srgbClr val="000000">
+                <a:alpha val="12000"/>
+              </a:srgbClr>
+            </a:outerShdw>
+          </a:effectLst>
+        </p:spPr>
+      </p:sp>
+      <p:sp>
+        <p:nvSpPr>
+          <p:cNvPr id="26" name="Shape 24"/>
+          <p:cNvSpPr/>
+          <p:nvPr/>
+        </p:nvSpPr>
+        <p:spPr>
+          <a:xfrm>
+            <a:off x="274320" y="3063240"/>
+            <a:ext cx="64008" cy="1828800"/>
+          </a:xfrm>
+          <a:prstGeom prst="rect">
+            <a:avLst/>
+          </a:prstGeom>
+          <a:solidFill>
+            <a:srgbClr val="02C39A"/>
+          </a:solidFill>
+          <a:ln/>
+        </p:spPr>
+      </p:sp>
+      <p:sp>
+        <p:nvSpPr>
+          <p:cNvPr id="27" name="Shape 25"/>
+          <p:cNvSpPr/>
+          <p:nvPr/>
+        </p:nvSpPr>
+        <p:spPr>
+          <a:xfrm>
+            <a:off x="457200" y="3200400"/>
+            <a:ext cx="502920" cy="502920"/>
+          </a:xfrm>
+          <a:prstGeom prst="ellipse">
+            <a:avLst/>
+          </a:prstGeom>
+          <a:solidFill>
+            <a:srgbClr val="02C39A"/>
+          </a:solidFill>
+          <a:ln/>
+        </p:spPr>
+      </p:sp>
+      <p:sp>
+        <p:nvSpPr>
+          <p:cNvPr id="28" name="Text 26"/>
+          <p:cNvSpPr/>
+          <p:nvPr/>
+        </p:nvSpPr>
+        <p:spPr>
+          <a:xfrm>
+            <a:off x="457200" y="3200400"/>
+            <a:ext cx="502920" cy="502920"/>
+          </a:xfrm>
+          <a:prstGeom prst="rect">
+            <a:avLst/>
+          </a:prstGeom>
+          <a:noFill/>
+          <a:ln/>
+        </p:spPr>
+        <p:txBody>
+          <a:bodyPr wrap="square" lIns="0" tIns="0" rIns="0" bIns="0" rtlCol="0" anchor="ctr"/>
+          <a:lstStyle/>
+          <a:p>
+            <a:pPr algn="ctr" indent="0" marL="0">
+              <a:buNone/>
+            </a:pPr>
+            <a:r>
+              <a:rPr lang="en-US" sz="1800" dirty="0">
+                <a:solidFill>
+                  <a:srgbClr val="021B3A"/>
+                </a:solidFill>
+                <a:latin typeface="Calibri" pitchFamily="34" charset="0"/>
+                <a:ea typeface="Calibri" pitchFamily="34" charset="-122"/>
+                <a:cs typeface="Calibri" pitchFamily="34" charset="-120"/>
+              </a:rPr>
+              <a:t>★</a:t>
+            </a:r>
+            <a:endParaRPr lang="en-US" sz="1800" dirty="0"/>
+          </a:p>
+        </p:txBody>
+      </p:sp>
+      <p:sp>
+        <p:nvSpPr>
+          <p:cNvPr id="29" name="Text 27"/>
+          <p:cNvSpPr/>
+          <p:nvPr/>
+        </p:nvSpPr>
+        <p:spPr>
+          <a:xfrm>
+            <a:off x="1097280" y="3127248"/>
+            <a:ext cx="7589520" cy="347472"/>
+          </a:xfrm>
+          <a:prstGeom prst="rect">
+            <a:avLst/>
+          </a:prstGeom>
+          <a:noFill/>
+          <a:ln/>
+        </p:spPr>
+        <p:txBody>
+          <a:bodyPr wrap="square" lIns="0" tIns="0" rIns="0" bIns="0" rtlCol="0" anchor="ctr"/>
+          <a:lstStyle/>
+          <a:p>
+            <a:pPr indent="0" marL="0">
+              <a:buNone/>
+            </a:pPr>
+            <a:r>
+              <a:rPr lang="en-US" sz="1600" b="1" dirty="0">
+                <a:solidFill>
+                  <a:srgbClr val="02C39A"/>
+                </a:solidFill>
+                <a:latin typeface="Calibri" pitchFamily="34" charset="0"/>
+                <a:ea typeface="Calibri" pitchFamily="34" charset="-122"/>
+                <a:cs typeface="Calibri" pitchFamily="34" charset="-120"/>
+              </a:rPr>
+              <a:t>Règle d'or</a:t>
+            </a:r>
+            <a:endParaRPr lang="en-US" sz="1600" dirty="0"/>
+          </a:p>
+        </p:txBody>
+      </p:sp>
+      <p:sp>
+        <p:nvSpPr>
+          <p:cNvPr id="30" name="Text 28"/>
+          <p:cNvSpPr/>
+          <p:nvPr/>
+        </p:nvSpPr>
+        <p:spPr>
+          <a:xfrm>
+            <a:off x="1097280" y="3520440"/>
+            <a:ext cx="7589520" cy="594360"/>
+          </a:xfrm>
+          <a:prstGeom prst="rect">
+            <a:avLst/>
+          </a:prstGeom>
+          <a:noFill/>
+          <a:ln/>
+        </p:spPr>
+        <p:txBody>
+          <a:bodyPr wrap="square" lIns="0" tIns="0" rIns="0" bIns="0" rtlCol="0" anchor="ctr"/>
+          <a:lstStyle/>
+          <a:p>
+            <a:pPr indent="0" marL="0">
+              <a:buNone/>
+            </a:pPr>
+            <a:r>
+              <a:rPr lang="en-US" sz="1300" i="1" dirty="0">
+                <a:solidFill>
+                  <a:srgbClr val="FFFFFF"/>
+                </a:solidFill>
+                <a:latin typeface="Calibri" pitchFamily="34" charset="0"/>
+                <a:ea typeface="Calibri" pitchFamily="34" charset="-122"/>
+                <a:cs typeface="Calibri" pitchFamily="34" charset="-120"/>
+              </a:rPr>
+              <a:t>Si un PG commun est si complexe que le dupliquer te fait peur,</a:t>
+            </a:r>
+            <a:endParaRPr lang="en-US" sz="1300" dirty="0"/>
+          </a:p>
+          <a:p>
+            <a:pPr indent="0" marL="0">
+              <a:buNone/>
+            </a:pPr>
+            <a:r>
+              <a:rPr lang="en-US" sz="1300" i="1" dirty="0">
+                <a:solidFill>
+                  <a:srgbClr val="FFFFFF"/>
+                </a:solidFill>
+                <a:latin typeface="Calibri" pitchFamily="34" charset="0"/>
+                <a:ea typeface="Calibri" pitchFamily="34" charset="-122"/>
+                <a:cs typeface="Calibri" pitchFamily="34" charset="-120"/>
+              </a:rPr>
+              <a:t>c'est qu'il faut le refactoriser — pas l'exposer en API.</a:t>
+            </a:r>
+            <a:endParaRPr lang="en-US" sz="1300" dirty="0"/>
+          </a:p>
+        </p:txBody>
+      </p:sp>
+      <p:sp>
+        <p:nvSpPr>
+          <p:cNvPr id="31" name="Shape 29"/>
+          <p:cNvSpPr/>
+          <p:nvPr/>
+        </p:nvSpPr>
+        <p:spPr>
+          <a:xfrm>
+            <a:off x="457200" y="4187952"/>
+            <a:ext cx="8321040" cy="548640"/>
+          </a:xfrm>
+          <a:prstGeom prst="rect">
+            <a:avLst/>
+          </a:prstGeom>
+          <a:solidFill>
+            <a:srgbClr val="065A82">
+              <a:alpha val="30000"/>
+            </a:srgbClr>
+          </a:solidFill>
+          <a:ln/>
+        </p:spPr>
+      </p:sp>
+      <p:sp>
+        <p:nvSpPr>
+          <p:cNvPr id="32" name="Text 30"/>
+          <p:cNvSpPr/>
+          <p:nvPr/>
+        </p:nvSpPr>
+        <p:spPr>
+          <a:xfrm>
+            <a:off x="548640" y="4206240"/>
+            <a:ext cx="8138160" cy="502920"/>
+          </a:xfrm>
+          <a:prstGeom prst="rect">
+            <a:avLst/>
+          </a:prstGeom>
+          <a:noFill/>
+          <a:ln/>
+        </p:spPr>
+        <p:txBody>
+          <a:bodyPr wrap="square" lIns="0" tIns="0" rIns="0" bIns="0" rtlCol="0" anchor="ctr"/>
+          <a:lstStyle/>
+          <a:p>
+            <a:pPr indent="0" marL="0">
+              <a:buNone/>
+            </a:pPr>
+            <a:r>
+              <a:rPr lang="en-US" sz="1100" dirty="0">
+                <a:solidFill>
+                  <a:srgbClr val="F0F4F8"/>
+                </a:solidFill>
+                <a:latin typeface="Calibri" pitchFamily="34" charset="0"/>
+                <a:ea typeface="Calibri" pitchFamily="34" charset="-122"/>
+                <a:cs typeface="Calibri" pitchFamily="34" charset="-120"/>
+              </a:rPr>
+              <a:t>Un PG commun trop complexe à dupliquer = signal d'alarme → le découper en processeurs plus petits et focalisés.</a:t>
+            </a:r>
+            <a:endParaRPr lang="en-US" sz="1100" dirty="0"/>
+          </a:p>
+        </p:txBody>
+      </p:sp>
+    </p:spTree>
+  </p:cSld>
+  <p:clrMapOvr>
+    <a:masterClrMapping/>
+  </p:clrMapOvr>
+</p:sld>
+</file>
+
+<file path=ppt/slides/slide15.xml><?xml version="1.0" encoding="utf-8"?>
+<p:sld xmlns:a="http://schemas.openxmlformats.org/drawingml/2006/main" xmlns:r="http://schemas.openxmlformats.org/officeDocument/2006/relationships" xmlns:p="http://schemas.openxmlformats.org/presentationml/2006/main">
+  <p:cSld name="Slide 15">
+    <p:bg>
+      <p:bgPr>
+        <a:solidFill>
+          <a:srgbClr val="F0F4F8"/>
+        </a:solidFill>
+      </p:bgPr>
+    </p:bg>
+    <p:spTree>
+      <p:nvGrpSpPr>
+        <p:cNvPr id="1" name=""/>
+        <p:cNvGrpSpPr/>
+        <p:nvPr/>
+      </p:nvGrpSpPr>
+      <p:grpSpPr>
+        <a:xfrm>
+          <a:off x="0" y="0"/>
+          <a:ext cx="0" cy="0"/>
+          <a:chOff x="0" y="0"/>
+          <a:chExt cx="0" cy="0"/>
+        </a:xfrm>
+      </p:grpSpPr>
+      <p:sp>
+        <p:nvSpPr>
+          <p:cNvPr id="2" name="Shape 0"/>
+          <p:cNvSpPr/>
+          <p:nvPr/>
+        </p:nvSpPr>
+        <p:spPr>
+          <a:xfrm>
+            <a:off x="0" y="0"/>
+            <a:ext cx="9144000" cy="685800"/>
+          </a:xfrm>
+          <a:prstGeom prst="rect">
+            <a:avLst/>
+          </a:prstGeom>
+          <a:solidFill>
+            <a:srgbClr val="021B3A"/>
+          </a:solidFill>
+          <a:ln/>
+        </p:spPr>
+      </p:sp>
+      <p:sp>
+        <p:nvSpPr>
+          <p:cNvPr id="3" name="Shape 1"/>
+          <p:cNvSpPr/>
+          <p:nvPr/>
+        </p:nvSpPr>
+        <p:spPr>
+          <a:xfrm>
+            <a:off x="0" y="0"/>
+            <a:ext cx="164592" cy="685800"/>
+          </a:xfrm>
+          <a:prstGeom prst="rect">
+            <a:avLst/>
+          </a:prstGeom>
+          <a:solidFill>
+            <a:srgbClr val="028090"/>
+          </a:solidFill>
+          <a:ln/>
+        </p:spPr>
+      </p:sp>
+      <p:sp>
+        <p:nvSpPr>
+          <p:cNvPr id="4" name="Text 2"/>
+          <p:cNvSpPr/>
+          <p:nvPr/>
+        </p:nvSpPr>
+        <p:spPr>
+          <a:xfrm>
+            <a:off x="365760" y="73152"/>
+            <a:ext cx="8595360" cy="548640"/>
+          </a:xfrm>
+          <a:prstGeom prst="rect">
+            <a:avLst/>
+          </a:prstGeom>
+          <a:noFill/>
+          <a:ln/>
+        </p:spPr>
+        <p:txBody>
+          <a:bodyPr wrap="square" lIns="0" tIns="0" rIns="0" bIns="0" rtlCol="0" anchor="ctr"/>
+          <a:lstStyle/>
+          <a:p>
+            <a:pPr indent="0" marL="0">
+              <a:buNone/>
+            </a:pPr>
+            <a:r>
+              <a:rPr lang="en-US" sz="2200" b="1" dirty="0">
+                <a:solidFill>
+                  <a:srgbClr val="FFFFFF"/>
+                </a:solidFill>
+                <a:latin typeface="Calibri" pitchFamily="34" charset="0"/>
+                <a:ea typeface="Calibri" pitchFamily="34" charset="-122"/>
+                <a:cs typeface="Calibri" pitchFamily="34" charset="-120"/>
+              </a:rPr>
+              <a:t>Pourquoi NiFi est Fondamentalement Asynchrone</a:t>
+            </a:r>
+            <a:endParaRPr lang="en-US" sz="2200" dirty="0"/>
+          </a:p>
+        </p:txBody>
+      </p:sp>
+      <p:sp>
+        <p:nvSpPr>
+          <p:cNvPr id="5" name="Shape 3"/>
+          <p:cNvSpPr/>
+          <p:nvPr/>
+        </p:nvSpPr>
+        <p:spPr>
+          <a:xfrm>
+            <a:off x="274320" y="804672"/>
+            <a:ext cx="8595360" cy="1417320"/>
+          </a:xfrm>
+          <a:prstGeom prst="rect">
+            <a:avLst/>
+          </a:prstGeom>
+          <a:solidFill>
+            <a:srgbClr val="FFFFFF"/>
+          </a:solidFill>
+          <a:ln/>
+          <a:effectLst>
+            <a:outerShdw sx="100000" sy="100000" kx="0" ky="0" algn="bl" rotWithShape="0" blurRad="101600" dist="38100" dir="8100000">
+              <a:srgbClr val="000000">
+                <a:alpha val="12000"/>
+              </a:srgbClr>
+            </a:outerShdw>
+          </a:effectLst>
+        </p:spPr>
+      </p:sp>
+      <p:sp>
+        <p:nvSpPr>
+          <p:cNvPr id="6" name="Shape 4"/>
+          <p:cNvSpPr/>
+          <p:nvPr/>
+        </p:nvSpPr>
+        <p:spPr>
+          <a:xfrm>
+            <a:off x="274320" y="804672"/>
+            <a:ext cx="8595360" cy="320040"/>
+          </a:xfrm>
+          <a:prstGeom prst="rect">
+            <a:avLst/>
+          </a:prstGeom>
+          <a:solidFill>
+            <a:srgbClr val="021B3A"/>
+          </a:solidFill>
+          <a:ln/>
+        </p:spPr>
+      </p:sp>
+      <p:sp>
+        <p:nvSpPr>
+          <p:cNvPr id="7" name="Text 5"/>
+          <p:cNvSpPr/>
+          <p:nvPr/>
+        </p:nvSpPr>
+        <p:spPr>
+          <a:xfrm>
+            <a:off x="320040" y="804672"/>
+            <a:ext cx="8503920" cy="320040"/>
+          </a:xfrm>
+          <a:prstGeom prst="rect">
+            <a:avLst/>
+          </a:prstGeom>
+          <a:noFill/>
+          <a:ln/>
+        </p:spPr>
+        <p:txBody>
+          <a:bodyPr wrap="square" lIns="0" tIns="0" rIns="0" bIns="0" rtlCol="0" anchor="ctr"/>
+          <a:lstStyle/>
+          <a:p>
+            <a:pPr indent="0" marL="0">
+              <a:buNone/>
+            </a:pPr>
+            <a:r>
+              <a:rPr lang="en-US" sz="1200" b="1" dirty="0">
+                <a:solidFill>
+                  <a:srgbClr val="FFFFFF"/>
+                </a:solidFill>
+                <a:latin typeface="Calibri" pitchFamily="34" charset="0"/>
+                <a:ea typeface="Calibri" pitchFamily="34" charset="-122"/>
+                <a:cs typeface="Calibri" pitchFamily="34" charset="-120"/>
+              </a:rPr>
+              <a:t>Le FlowFile — Unité de base de NiFi</a:t>
+            </a:r>
+            <a:endParaRPr lang="en-US" sz="1200" dirty="0"/>
+          </a:p>
+        </p:txBody>
+      </p:sp>
+      <p:sp>
+        <p:nvSpPr>
+          <p:cNvPr id="8" name="Text 6"/>
+          <p:cNvSpPr/>
+          <p:nvPr/>
+        </p:nvSpPr>
+        <p:spPr>
+          <a:xfrm>
+            <a:off x="365760" y="1188720"/>
+            <a:ext cx="5029200" cy="320040"/>
+          </a:xfrm>
+          <a:prstGeom prst="rect">
+            <a:avLst/>
+          </a:prstGeom>
+          <a:noFill/>
+          <a:ln/>
+        </p:spPr>
+        <p:txBody>
+          <a:bodyPr wrap="square" lIns="0" tIns="0" rIns="0" bIns="0" rtlCol="0" anchor="ctr"/>
+          <a:lstStyle/>
+          <a:p>
+            <a:pPr indent="0" marL="0">
+              <a:buNone/>
+            </a:pPr>
+            <a:r>
+              <a:rPr lang="en-US" sz="1100" b="1" dirty="0">
+                <a:solidFill>
+                  <a:srgbClr val="021B3A"/>
+                </a:solidFill>
+                <a:latin typeface="Calibri" pitchFamily="34" charset="0"/>
+                <a:ea typeface="Calibri" pitchFamily="34" charset="-122"/>
+                <a:cs typeface="Calibri" pitchFamily="34" charset="-120"/>
+              </a:rPr>
+              <a:t>Un FlowFile est une unité de données qui voyage à travers les processeurs.</a:t>
+            </a:r>
+            <a:endParaRPr lang="en-US" sz="1100" dirty="0"/>
+          </a:p>
+        </p:txBody>
+      </p:sp>
+      <p:sp>
+        <p:nvSpPr>
+          <p:cNvPr id="9" name="Text 7"/>
+          <p:cNvSpPr/>
+          <p:nvPr/>
+        </p:nvSpPr>
+        <p:spPr>
+          <a:xfrm>
+            <a:off x="365760" y="1508760"/>
+            <a:ext cx="5029200" cy="594360"/>
+          </a:xfrm>
+          <a:prstGeom prst="rect">
+            <a:avLst/>
+          </a:prstGeom>
+          <a:noFill/>
+          <a:ln/>
+        </p:spPr>
+        <p:txBody>
+          <a:bodyPr wrap="square" lIns="0" tIns="0" rIns="0" bIns="0" rtlCol="0" anchor="ctr"/>
+          <a:lstStyle/>
+          <a:p>
+            <a:pPr indent="0" marL="0">
+              <a:buNone/>
+            </a:pPr>
+            <a:r>
+              <a:rPr lang="en-US" sz="1000" dirty="0">
+                <a:solidFill>
+                  <a:srgbClr val="64748B"/>
+                </a:solidFill>
+                <a:latin typeface="Calibri" pitchFamily="34" charset="0"/>
+                <a:ea typeface="Calibri" pitchFamily="34" charset="-122"/>
+                <a:cs typeface="Calibri" pitchFamily="34" charset="-120"/>
+              </a:rPr>
+              <a:t>Il n'attend pas de réponse. Il entre dans un processeur, est traité, repart vers le suivant.</a:t>
+            </a:r>
+            <a:endParaRPr lang="en-US" sz="1000" dirty="0"/>
+          </a:p>
+          <a:p>
+            <a:pPr indent="0" marL="0">
+              <a:buNone/>
+            </a:pPr>
+            <a:r>
+              <a:rPr lang="en-US" sz="1000" dirty="0">
+                <a:solidFill>
+                  <a:srgbClr val="64748B"/>
+                </a:solidFill>
+                <a:latin typeface="Calibri" pitchFamily="34" charset="0"/>
+                <a:ea typeface="Calibri" pitchFamily="34" charset="-122"/>
+                <a:cs typeface="Calibri" pitchFamily="34" charset="-120"/>
+              </a:rPr>
+              <a:t>C'est un modèle "fire and forget" — je t'envoie la donnée, je n'attends pas de confirmation.</a:t>
+            </a:r>
+            <a:endParaRPr lang="en-US" sz="1000" dirty="0"/>
+          </a:p>
+        </p:txBody>
+      </p:sp>
+      <p:sp>
+        <p:nvSpPr>
+          <p:cNvPr id="10" name="Shape 8"/>
+          <p:cNvSpPr/>
+          <p:nvPr/>
+        </p:nvSpPr>
+        <p:spPr>
+          <a:xfrm>
+            <a:off x="5669280" y="960120"/>
+            <a:ext cx="3017520" cy="1097280"/>
+          </a:xfrm>
+          <a:prstGeom prst="rect">
+            <a:avLst/>
+          </a:prstGeom>
+          <a:solidFill>
+            <a:srgbClr val="F0F4F8"/>
+          </a:solidFill>
+          <a:ln/>
+          <a:effectLst>
+            <a:outerShdw sx="100000" sy="100000" kx="0" ky="0" algn="bl" rotWithShape="0" blurRad="101600" dist="38100" dir="8100000">
+              <a:srgbClr val="000000">
+                <a:alpha val="12000"/>
+              </a:srgbClr>
+            </a:outerShdw>
+          </a:effectLst>
+        </p:spPr>
+      </p:sp>
+      <p:sp>
+        <p:nvSpPr>
+          <p:cNvPr id="11" name="Shape 9"/>
+          <p:cNvSpPr/>
+          <p:nvPr/>
+        </p:nvSpPr>
+        <p:spPr>
+          <a:xfrm>
+            <a:off x="5669280" y="960120"/>
+            <a:ext cx="64008" cy="1097280"/>
+          </a:xfrm>
+          <a:prstGeom prst="rect">
+            <a:avLst/>
+          </a:prstGeom>
+          <a:solidFill>
+            <a:srgbClr val="028090"/>
+          </a:solidFill>
+          <a:ln/>
+        </p:spPr>
+      </p:sp>
+      <p:sp>
+        <p:nvSpPr>
+          <p:cNvPr id="12" name="Text 10"/>
+          <p:cNvSpPr/>
+          <p:nvPr/>
+        </p:nvSpPr>
+        <p:spPr>
+          <a:xfrm>
+            <a:off x="5806440" y="987552"/>
+            <a:ext cx="2743200" cy="274320"/>
+          </a:xfrm>
+          <a:prstGeom prst="rect">
+            <a:avLst/>
+          </a:prstGeom>
+          <a:noFill/>
+          <a:ln/>
+        </p:spPr>
+        <p:txBody>
+          <a:bodyPr wrap="square" lIns="0" tIns="0" rIns="0" bIns="0" rtlCol="0" anchor="ctr"/>
+          <a:lstStyle/>
+          <a:p>
+            <a:pPr indent="0" marL="0">
+              <a:buNone/>
+            </a:pPr>
+            <a:r>
+              <a:rPr lang="en-US" sz="1200" b="1" dirty="0">
+                <a:solidFill>
+                  <a:srgbClr val="028090"/>
+                </a:solidFill>
+                <a:latin typeface="Calibri" pitchFamily="34" charset="0"/>
+                <a:ea typeface="Calibri" pitchFamily="34" charset="-122"/>
+                <a:cs typeface="Calibri" pitchFamily="34" charset="-120"/>
+              </a:rPr>
+              <a:t>FlowFile</a:t>
+            </a:r>
+            <a:endParaRPr lang="en-US" sz="1200" dirty="0"/>
+          </a:p>
+        </p:txBody>
+      </p:sp>
+      <p:sp>
+        <p:nvSpPr>
+          <p:cNvPr id="13" name="Text 11"/>
+          <p:cNvSpPr/>
+          <p:nvPr/>
+        </p:nvSpPr>
+        <p:spPr>
+          <a:xfrm>
+            <a:off x="5806440" y="1280160"/>
+            <a:ext cx="2743200" cy="713232"/>
+          </a:xfrm>
+          <a:prstGeom prst="rect">
+            <a:avLst/>
+          </a:prstGeom>
+          <a:noFill/>
+          <a:ln/>
+        </p:spPr>
+        <p:txBody>
+          <a:bodyPr wrap="square" lIns="0" tIns="0" rIns="0" bIns="0" rtlCol="0" anchor="ctr"/>
+          <a:lstStyle/>
+          <a:p>
+            <a:pPr indent="0" marL="0">
+              <a:buNone/>
+            </a:pPr>
+            <a:r>
+              <a:rPr lang="en-US" sz="1000" dirty="0">
+                <a:solidFill>
+                  <a:srgbClr val="021B3A"/>
+                </a:solidFill>
+                <a:latin typeface="Calibri" pitchFamily="34" charset="0"/>
+                <a:ea typeface="Calibri" pitchFamily="34" charset="-122"/>
+                <a:cs typeface="Calibri" pitchFamily="34" charset="-120"/>
+              </a:rPr>
+              <a:t>• Contenu (données)</a:t>
+            </a:r>
+            <a:endParaRPr lang="en-US" sz="1000" dirty="0"/>
+          </a:p>
+          <a:p>
+            <a:pPr indent="0" marL="0">
+              <a:buNone/>
+            </a:pPr>
+            <a:r>
+              <a:rPr lang="en-US" sz="1000" dirty="0">
+                <a:solidFill>
+                  <a:srgbClr val="021B3A"/>
+                </a:solidFill>
+                <a:latin typeface="Calibri" pitchFamily="34" charset="0"/>
+                <a:ea typeface="Calibri" pitchFamily="34" charset="-122"/>
+                <a:cs typeface="Calibri" pitchFamily="34" charset="-120"/>
+              </a:rPr>
+              <a:t>• Attributs (métadonnées)</a:t>
+            </a:r>
+            <a:endParaRPr lang="en-US" sz="1000" dirty="0"/>
+          </a:p>
+          <a:p>
+            <a:pPr indent="0" marL="0">
+              <a:buNone/>
+            </a:pPr>
+            <a:r>
+              <a:rPr lang="en-US" sz="1000" dirty="0">
+                <a:solidFill>
+                  <a:srgbClr val="021B3A"/>
+                </a:solidFill>
+                <a:latin typeface="Calibri" pitchFamily="34" charset="0"/>
+                <a:ea typeface="Calibri" pitchFamily="34" charset="-122"/>
+                <a:cs typeface="Calibri" pitchFamily="34" charset="-120"/>
+              </a:rPr>
+              <a:t>• Pas de mécanisme de retour natif</a:t>
+            </a:r>
+            <a:endParaRPr lang="en-US" sz="1000" dirty="0"/>
+          </a:p>
+        </p:txBody>
+      </p:sp>
+      <p:sp>
+        <p:nvSpPr>
+          <p:cNvPr id="14" name="Shape 12"/>
+          <p:cNvSpPr/>
+          <p:nvPr/>
+        </p:nvSpPr>
+        <p:spPr>
+          <a:xfrm>
+            <a:off x="274320" y="2331720"/>
+            <a:ext cx="8595360" cy="2514600"/>
+          </a:xfrm>
+          <a:prstGeom prst="rect">
+            <a:avLst/>
+          </a:prstGeom>
+          <a:solidFill>
+            <a:srgbClr val="FFFFFF"/>
+          </a:solidFill>
+          <a:ln/>
+          <a:effectLst>
+            <a:outerShdw sx="100000" sy="100000" kx="0" ky="0" algn="bl" rotWithShape="0" blurRad="101600" dist="38100" dir="8100000">
+              <a:srgbClr val="000000">
+                <a:alpha val="12000"/>
+              </a:srgbClr>
+            </a:outerShdw>
+          </a:effectLst>
+        </p:spPr>
+      </p:sp>
+      <p:sp>
+        <p:nvSpPr>
+          <p:cNvPr id="15" name="Shape 13"/>
+          <p:cNvSpPr/>
+          <p:nvPr/>
+        </p:nvSpPr>
+        <p:spPr>
+          <a:xfrm>
+            <a:off x="274320" y="2331720"/>
+            <a:ext cx="8595360" cy="320040"/>
+          </a:xfrm>
+          <a:prstGeom prst="rect">
+            <a:avLst/>
+          </a:prstGeom>
+          <a:solidFill>
+            <a:srgbClr val="021B3A"/>
+          </a:solidFill>
+          <a:ln/>
+        </p:spPr>
+      </p:sp>
+      <p:sp>
+        <p:nvSpPr>
+          <p:cNvPr id="16" name="Text 14"/>
+          <p:cNvSpPr/>
+          <p:nvPr/>
+        </p:nvSpPr>
+        <p:spPr>
+          <a:xfrm>
+            <a:off x="320040" y="2331720"/>
+            <a:ext cx="8503920" cy="320040"/>
+          </a:xfrm>
+          <a:prstGeom prst="rect">
+            <a:avLst/>
+          </a:prstGeom>
+          <a:noFill/>
+          <a:ln/>
+        </p:spPr>
+        <p:txBody>
+          <a:bodyPr wrap="square" lIns="0" tIns="0" rIns="0" bIns="0" rtlCol="0" anchor="ctr"/>
+          <a:lstStyle/>
+          <a:p>
+            <a:pPr indent="0" marL="0">
+              <a:buNone/>
+            </a:pPr>
+            <a:r>
+              <a:rPr lang="en-US" sz="1200" b="1" dirty="0">
+                <a:solidFill>
+                  <a:srgbClr val="FFFFFF"/>
+                </a:solidFill>
+                <a:latin typeface="Calibri" pitchFamily="34" charset="0"/>
+                <a:ea typeface="Calibri" pitchFamily="34" charset="-122"/>
+                <a:cs typeface="Calibri" pitchFamily="34" charset="-120"/>
+              </a:rPr>
+              <a:t>Ce qui se passe réellement dans NiFi</a:t>
+            </a:r>
+            <a:endParaRPr lang="en-US" sz="1200" dirty="0"/>
+          </a:p>
+        </p:txBody>
+      </p:sp>
+      <p:sp>
+        <p:nvSpPr>
+          <p:cNvPr id="17" name="Shape 15"/>
+          <p:cNvSpPr/>
+          <p:nvPr/>
+        </p:nvSpPr>
+        <p:spPr>
+          <a:xfrm>
+            <a:off x="457200" y="2788920"/>
+            <a:ext cx="1463040" cy="658368"/>
+          </a:xfrm>
+          <a:prstGeom prst="rect">
+            <a:avLst/>
+          </a:prstGeom>
+          <a:solidFill>
+            <a:srgbClr val="065A82"/>
+          </a:solidFill>
+          <a:ln/>
+          <a:effectLst>
+            <a:outerShdw sx="100000" sy="100000" kx="0" ky="0" algn="bl" rotWithShape="0" blurRad="101600" dist="38100" dir="8100000">
+              <a:srgbClr val="000000">
+                <a:alpha val="12000"/>
+              </a:srgbClr>
+            </a:outerShdw>
+          </a:effectLst>
+        </p:spPr>
+      </p:sp>
+      <p:sp>
+        <p:nvSpPr>
+          <p:cNvPr id="18" name="Text 16"/>
+          <p:cNvSpPr/>
+          <p:nvPr/>
+        </p:nvSpPr>
+        <p:spPr>
+          <a:xfrm>
+            <a:off x="457200" y="2788920"/>
+            <a:ext cx="1463040" cy="658368"/>
+          </a:xfrm>
+          <a:prstGeom prst="rect">
+            <a:avLst/>
+          </a:prstGeom>
+          <a:noFill/>
+          <a:ln/>
+        </p:spPr>
+        <p:txBody>
+          <a:bodyPr wrap="square" lIns="0" tIns="0" rIns="0" bIns="0" rtlCol="0" anchor="ctr"/>
+          <a:lstStyle/>
+          <a:p>
+            <a:pPr algn="ctr" indent="0" marL="0">
+              <a:buNone/>
+            </a:pPr>
+            <a:r>
+              <a:rPr lang="en-US" sz="1100" b="1" dirty="0">
+                <a:solidFill>
+                  <a:srgbClr val="FFFFFF"/>
+                </a:solidFill>
+                <a:latin typeface="Calibri" pitchFamily="34" charset="0"/>
+                <a:ea typeface="Calibri" pitchFamily="34" charset="-122"/>
+                <a:cs typeface="Calibri" pitchFamily="34" charset="-120"/>
+              </a:rPr>
+              <a:t>Source</a:t>
+            </a:r>
+            <a:endParaRPr lang="en-US" sz="1100" dirty="0"/>
+          </a:p>
+        </p:txBody>
+      </p:sp>
+      <p:sp>
+        <p:nvSpPr>
+          <p:cNvPr id="19" name="Shape 17"/>
+          <p:cNvSpPr/>
+          <p:nvPr/>
+        </p:nvSpPr>
+        <p:spPr>
+          <a:xfrm>
+            <a:off x="2148840" y="2788920"/>
+            <a:ext cx="1463040" cy="658368"/>
+          </a:xfrm>
+          <a:prstGeom prst="rect">
+            <a:avLst/>
+          </a:prstGeom>
+          <a:solidFill>
+            <a:srgbClr val="028090"/>
+          </a:solidFill>
+          <a:ln/>
+          <a:effectLst>
+            <a:outerShdw sx="100000" sy="100000" kx="0" ky="0" algn="bl" rotWithShape="0" blurRad="101600" dist="38100" dir="8100000">
+              <a:srgbClr val="000000">
+                <a:alpha val="12000"/>
+              </a:srgbClr>
+            </a:outerShdw>
+          </a:effectLst>
+        </p:spPr>
+      </p:sp>
+      <p:sp>
+        <p:nvSpPr>
+          <p:cNvPr id="20" name="Text 18"/>
+          <p:cNvSpPr/>
+          <p:nvPr/>
+        </p:nvSpPr>
+        <p:spPr>
+          <a:xfrm>
+            <a:off x="2148840" y="2788920"/>
+            <a:ext cx="1463040" cy="658368"/>
+          </a:xfrm>
+          <a:prstGeom prst="rect">
+            <a:avLst/>
+          </a:prstGeom>
+          <a:noFill/>
+          <a:ln/>
+        </p:spPr>
+        <p:txBody>
+          <a:bodyPr wrap="square" lIns="0" tIns="0" rIns="0" bIns="0" rtlCol="0" anchor="ctr"/>
+          <a:lstStyle/>
+          <a:p>
+            <a:pPr algn="ctr" indent="0" marL="0">
+              <a:buNone/>
+            </a:pPr>
+            <a:r>
+              <a:rPr lang="en-US" sz="1100" b="1" dirty="0">
+                <a:solidFill>
+                  <a:srgbClr val="FFFFFF"/>
+                </a:solidFill>
+                <a:latin typeface="Calibri" pitchFamily="34" charset="0"/>
+                <a:ea typeface="Calibri" pitchFamily="34" charset="-122"/>
+                <a:cs typeface="Calibri" pitchFamily="34" charset="-120"/>
+              </a:rPr>
+              <a:t>Processeur</a:t>
+            </a:r>
+            <a:endParaRPr lang="en-US" sz="1100" dirty="0"/>
+          </a:p>
+          <a:p>
+            <a:pPr algn="ctr" indent="0" marL="0">
+              <a:buNone/>
+            </a:pPr>
+            <a:r>
+              <a:rPr lang="en-US" sz="1100" b="1" dirty="0">
+                <a:solidFill>
+                  <a:srgbClr val="FFFFFF"/>
+                </a:solidFill>
+                <a:latin typeface="Calibri" pitchFamily="34" charset="0"/>
+                <a:ea typeface="Calibri" pitchFamily="34" charset="-122"/>
+                <a:cs typeface="Calibri" pitchFamily="34" charset="-120"/>
+              </a:rPr>
+              <a:t>A</a:t>
+            </a:r>
+            <a:endParaRPr lang="en-US" sz="1100" dirty="0"/>
+          </a:p>
+        </p:txBody>
+      </p:sp>
+      <p:sp>
+        <p:nvSpPr>
+          <p:cNvPr id="21" name="Shape 19"/>
+          <p:cNvSpPr/>
+          <p:nvPr/>
+        </p:nvSpPr>
+        <p:spPr>
+          <a:xfrm>
+            <a:off x="4389120" y="2788920"/>
+            <a:ext cx="1463040" cy="658368"/>
+          </a:xfrm>
+          <a:prstGeom prst="rect">
+            <a:avLst/>
+          </a:prstGeom>
+          <a:solidFill>
+            <a:srgbClr val="028090"/>
+          </a:solidFill>
+          <a:ln/>
+          <a:effectLst>
+            <a:outerShdw sx="100000" sy="100000" kx="0" ky="0" algn="bl" rotWithShape="0" blurRad="101600" dist="38100" dir="8100000">
+              <a:srgbClr val="000000">
+                <a:alpha val="12000"/>
+              </a:srgbClr>
+            </a:outerShdw>
+          </a:effectLst>
+        </p:spPr>
+      </p:sp>
+      <p:sp>
+        <p:nvSpPr>
+          <p:cNvPr id="22" name="Text 20"/>
+          <p:cNvSpPr/>
+          <p:nvPr/>
+        </p:nvSpPr>
+        <p:spPr>
+          <a:xfrm>
+            <a:off x="4389120" y="2788920"/>
+            <a:ext cx="1463040" cy="658368"/>
+          </a:xfrm>
+          <a:prstGeom prst="rect">
+            <a:avLst/>
+          </a:prstGeom>
+          <a:noFill/>
+          <a:ln/>
+        </p:spPr>
+        <p:txBody>
+          <a:bodyPr wrap="square" lIns="0" tIns="0" rIns="0" bIns="0" rtlCol="0" anchor="ctr"/>
+          <a:lstStyle/>
+          <a:p>
+            <a:pPr algn="ctr" indent="0" marL="0">
+              <a:buNone/>
+            </a:pPr>
+            <a:r>
+              <a:rPr lang="en-US" sz="1100" b="1" dirty="0">
+                <a:solidFill>
+                  <a:srgbClr val="FFFFFF"/>
+                </a:solidFill>
+                <a:latin typeface="Calibri" pitchFamily="34" charset="0"/>
+                <a:ea typeface="Calibri" pitchFamily="34" charset="-122"/>
+                <a:cs typeface="Calibri" pitchFamily="34" charset="-120"/>
+              </a:rPr>
+              <a:t>Processeur</a:t>
+            </a:r>
+            <a:endParaRPr lang="en-US" sz="1100" dirty="0"/>
+          </a:p>
+          <a:p>
+            <a:pPr algn="ctr" indent="0" marL="0">
+              <a:buNone/>
+            </a:pPr>
+            <a:r>
+              <a:rPr lang="en-US" sz="1100" b="1" dirty="0">
+                <a:solidFill>
+                  <a:srgbClr val="FFFFFF"/>
+                </a:solidFill>
+                <a:latin typeface="Calibri" pitchFamily="34" charset="0"/>
+                <a:ea typeface="Calibri" pitchFamily="34" charset="-122"/>
+                <a:cs typeface="Calibri" pitchFamily="34" charset="-120"/>
+              </a:rPr>
+              <a:t>B</a:t>
+            </a:r>
+            <a:endParaRPr lang="en-US" sz="1100" dirty="0"/>
+          </a:p>
+        </p:txBody>
+      </p:sp>
+      <p:sp>
+        <p:nvSpPr>
+          <p:cNvPr id="23" name="Shape 21"/>
+          <p:cNvSpPr/>
+          <p:nvPr/>
+        </p:nvSpPr>
+        <p:spPr>
+          <a:xfrm>
+            <a:off x="6629400" y="2788920"/>
+            <a:ext cx="1463040" cy="658368"/>
+          </a:xfrm>
+          <a:prstGeom prst="rect">
+            <a:avLst/>
+          </a:prstGeom>
+          <a:solidFill>
+            <a:srgbClr val="028090"/>
+          </a:solidFill>
+          <a:ln/>
+          <a:effectLst>
+            <a:outerShdw sx="100000" sy="100000" kx="0" ky="0" algn="bl" rotWithShape="0" blurRad="101600" dist="38100" dir="8100000">
+              <a:srgbClr val="000000">
+                <a:alpha val="12000"/>
+              </a:srgbClr>
+            </a:outerShdw>
+          </a:effectLst>
+        </p:spPr>
+      </p:sp>
+      <p:sp>
+        <p:nvSpPr>
+          <p:cNvPr id="24" name="Text 22"/>
+          <p:cNvSpPr/>
+          <p:nvPr/>
+        </p:nvSpPr>
+        <p:spPr>
+          <a:xfrm>
+            <a:off x="6629400" y="2788920"/>
+            <a:ext cx="1463040" cy="658368"/>
+          </a:xfrm>
+          <a:prstGeom prst="rect">
+            <a:avLst/>
+          </a:prstGeom>
+          <a:noFill/>
+          <a:ln/>
+        </p:spPr>
+        <p:txBody>
+          <a:bodyPr wrap="square" lIns="0" tIns="0" rIns="0" bIns="0" rtlCol="0" anchor="ctr"/>
+          <a:lstStyle/>
+          <a:p>
+            <a:pPr algn="ctr" indent="0" marL="0">
+              <a:buNone/>
+            </a:pPr>
+            <a:r>
+              <a:rPr lang="en-US" sz="1100" b="1" dirty="0">
+                <a:solidFill>
+                  <a:srgbClr val="FFFFFF"/>
+                </a:solidFill>
+                <a:latin typeface="Calibri" pitchFamily="34" charset="0"/>
+                <a:ea typeface="Calibri" pitchFamily="34" charset="-122"/>
+                <a:cs typeface="Calibri" pitchFamily="34" charset="-120"/>
+              </a:rPr>
+              <a:t>Processeur</a:t>
+            </a:r>
+            <a:endParaRPr lang="en-US" sz="1100" dirty="0"/>
+          </a:p>
+          <a:p>
+            <a:pPr algn="ctr" indent="0" marL="0">
+              <a:buNone/>
+            </a:pPr>
+            <a:r>
+              <a:rPr lang="en-US" sz="1100" b="1" dirty="0">
+                <a:solidFill>
+                  <a:srgbClr val="FFFFFF"/>
+                </a:solidFill>
+                <a:latin typeface="Calibri" pitchFamily="34" charset="0"/>
+                <a:ea typeface="Calibri" pitchFamily="34" charset="-122"/>
+                <a:cs typeface="Calibri" pitchFamily="34" charset="-120"/>
+              </a:rPr>
+              <a:t>C</a:t>
+            </a:r>
+            <a:endParaRPr lang="en-US" sz="1100" dirty="0"/>
+          </a:p>
+        </p:txBody>
+      </p:sp>
+      <p:sp>
+        <p:nvSpPr>
+          <p:cNvPr id="25" name="Shape 23"/>
+          <p:cNvSpPr/>
+          <p:nvPr/>
+        </p:nvSpPr>
+        <p:spPr>
+          <a:xfrm>
+            <a:off x="1920240" y="3118104"/>
+            <a:ext cx="228600" cy="0"/>
+          </a:xfrm>
+          <a:prstGeom prst="line">
+            <a:avLst/>
+          </a:prstGeom>
+          <a:noFill/>
+          <a:ln w="25400">
+            <a:solidFill>
+              <a:srgbClr val="64748B"/>
+            </a:solidFill>
+            <a:prstDash val="solid"/>
+          </a:ln>
+        </p:spPr>
+      </p:sp>
+      <p:sp>
+        <p:nvSpPr>
+          <p:cNvPr id="26" name="Shape 24"/>
+          <p:cNvSpPr/>
+          <p:nvPr/>
+        </p:nvSpPr>
+        <p:spPr>
+          <a:xfrm>
+            <a:off x="2148840" y="2944368"/>
+            <a:ext cx="502920" cy="347472"/>
+          </a:xfrm>
+          <a:prstGeom prst="rect">
+            <a:avLst/>
+          </a:prstGeom>
+          <a:solidFill>
+            <a:srgbClr val="D69E2E">
+              <a:alpha val="70000"/>
+            </a:srgbClr>
+          </a:solidFill>
+          <a:ln/>
+          <a:effectLst>
+            <a:outerShdw sx="100000" sy="100000" kx="0" ky="0" algn="bl" rotWithShape="0" blurRad="101600" dist="38100" dir="8100000">
+              <a:srgbClr val="000000">
+                <a:alpha val="12000"/>
+              </a:srgbClr>
+            </a:outerShdw>
+          </a:effectLst>
+        </p:spPr>
+      </p:sp>
+      <p:sp>
+        <p:nvSpPr>
+          <p:cNvPr id="27" name="Text 25"/>
+          <p:cNvSpPr/>
+          <p:nvPr/>
+        </p:nvSpPr>
+        <p:spPr>
+          <a:xfrm>
+            <a:off x="2148840" y="2944368"/>
+            <a:ext cx="502920" cy="347472"/>
+          </a:xfrm>
+          <a:prstGeom prst="rect">
+            <a:avLst/>
+          </a:prstGeom>
+          <a:noFill/>
+          <a:ln/>
+        </p:spPr>
+        <p:txBody>
+          <a:bodyPr wrap="square" lIns="0" tIns="0" rIns="0" bIns="0" rtlCol="0" anchor="ctr"/>
+          <a:lstStyle/>
+          <a:p>
+            <a:pPr algn="ctr" indent="0" marL="0">
+              <a:buNone/>
+            </a:pPr>
+            <a:r>
+              <a:rPr lang="en-US" sz="1200" dirty="0">
+                <a:solidFill>
+                  <a:srgbClr val="000000"/>
+                </a:solidFill>
+                <a:latin typeface="Calibri" pitchFamily="34" charset="0"/>
+                <a:ea typeface="Calibri" pitchFamily="34" charset="-122"/>
+                <a:cs typeface="Calibri" pitchFamily="34" charset="-120"/>
+              </a:rPr>
+              <a:t>⏳</a:t>
+            </a:r>
+            <a:endParaRPr lang="en-US" sz="1200" dirty="0"/>
+          </a:p>
+        </p:txBody>
+      </p:sp>
+      <p:sp>
+        <p:nvSpPr>
+          <p:cNvPr id="28" name="Shape 26"/>
+          <p:cNvSpPr/>
+          <p:nvPr/>
+        </p:nvSpPr>
+        <p:spPr>
+          <a:xfrm>
+            <a:off x="2651760" y="3118104"/>
+            <a:ext cx="228600" cy="0"/>
+          </a:xfrm>
+          <a:prstGeom prst="line">
+            <a:avLst/>
+          </a:prstGeom>
+          <a:noFill/>
+          <a:ln w="25400">
+            <a:solidFill>
+              <a:srgbClr val="64748B"/>
+            </a:solidFill>
+            <a:prstDash val="solid"/>
+          </a:ln>
+        </p:spPr>
+      </p:sp>
+      <p:sp>
+        <p:nvSpPr>
+          <p:cNvPr id="29" name="Shape 27"/>
+          <p:cNvSpPr/>
+          <p:nvPr/>
+        </p:nvSpPr>
+        <p:spPr>
+          <a:xfrm>
+            <a:off x="4160520" y="3118104"/>
+            <a:ext cx="228600" cy="0"/>
+          </a:xfrm>
+          <a:prstGeom prst="line">
+            <a:avLst/>
+          </a:prstGeom>
+          <a:noFill/>
+          <a:ln w="25400">
+            <a:solidFill>
+              <a:srgbClr val="64748B"/>
+            </a:solidFill>
+            <a:prstDash val="solid"/>
+          </a:ln>
+        </p:spPr>
+      </p:sp>
+      <p:sp>
+        <p:nvSpPr>
+          <p:cNvPr id="30" name="Shape 28"/>
+          <p:cNvSpPr/>
+          <p:nvPr/>
+        </p:nvSpPr>
+        <p:spPr>
+          <a:xfrm>
+            <a:off x="4389120" y="2944368"/>
+            <a:ext cx="502920" cy="347472"/>
+          </a:xfrm>
+          <a:prstGeom prst="rect">
+            <a:avLst/>
+          </a:prstGeom>
+          <a:solidFill>
+            <a:srgbClr val="D69E2E">
+              <a:alpha val="70000"/>
+            </a:srgbClr>
+          </a:solidFill>
+          <a:ln/>
+          <a:effectLst>
+            <a:outerShdw sx="100000" sy="100000" kx="0" ky="0" algn="bl" rotWithShape="0" blurRad="101600" dist="38100" dir="8100000">
+              <a:srgbClr val="000000">
+                <a:alpha val="12000"/>
+              </a:srgbClr>
+            </a:outerShdw>
+          </a:effectLst>
+        </p:spPr>
+      </p:sp>
+      <p:sp>
+        <p:nvSpPr>
+          <p:cNvPr id="31" name="Text 29"/>
+          <p:cNvSpPr/>
+          <p:nvPr/>
+        </p:nvSpPr>
+        <p:spPr>
+          <a:xfrm>
+            <a:off x="4389120" y="2944368"/>
+            <a:ext cx="502920" cy="347472"/>
+          </a:xfrm>
+          <a:prstGeom prst="rect">
+            <a:avLst/>
+          </a:prstGeom>
+          <a:noFill/>
+          <a:ln/>
+        </p:spPr>
+        <p:txBody>
+          <a:bodyPr wrap="square" lIns="0" tIns="0" rIns="0" bIns="0" rtlCol="0" anchor="ctr"/>
+          <a:lstStyle/>
+          <a:p>
+            <a:pPr algn="ctr" indent="0" marL="0">
+              <a:buNone/>
+            </a:pPr>
+            <a:r>
+              <a:rPr lang="en-US" sz="1200" dirty="0">
+                <a:solidFill>
+                  <a:srgbClr val="000000"/>
+                </a:solidFill>
+                <a:latin typeface="Calibri" pitchFamily="34" charset="0"/>
+                <a:ea typeface="Calibri" pitchFamily="34" charset="-122"/>
+                <a:cs typeface="Calibri" pitchFamily="34" charset="-120"/>
+              </a:rPr>
+              <a:t>⏳</a:t>
+            </a:r>
+            <a:endParaRPr lang="en-US" sz="1200" dirty="0"/>
+          </a:p>
+        </p:txBody>
+      </p:sp>
+      <p:sp>
+        <p:nvSpPr>
+          <p:cNvPr id="32" name="Shape 30"/>
+          <p:cNvSpPr/>
+          <p:nvPr/>
+        </p:nvSpPr>
+        <p:spPr>
+          <a:xfrm>
+            <a:off x="4892040" y="3118104"/>
+            <a:ext cx="228600" cy="0"/>
+          </a:xfrm>
+          <a:prstGeom prst="line">
+            <a:avLst/>
+          </a:prstGeom>
+          <a:noFill/>
+          <a:ln w="25400">
+            <a:solidFill>
+              <a:srgbClr val="64748B"/>
+            </a:solidFill>
+            <a:prstDash val="solid"/>
+          </a:ln>
+        </p:spPr>
+      </p:sp>
+      <p:sp>
+        <p:nvSpPr>
+          <p:cNvPr id="33" name="Shape 31"/>
+          <p:cNvSpPr/>
+          <p:nvPr/>
+        </p:nvSpPr>
+        <p:spPr>
+          <a:xfrm>
+            <a:off x="6400800" y="3118104"/>
+            <a:ext cx="228600" cy="0"/>
+          </a:xfrm>
+          <a:prstGeom prst="line">
+            <a:avLst/>
+          </a:prstGeom>
+          <a:noFill/>
+          <a:ln w="25400">
+            <a:solidFill>
+              <a:srgbClr val="64748B"/>
+            </a:solidFill>
+            <a:prstDash val="solid"/>
+          </a:ln>
+        </p:spPr>
+      </p:sp>
+      <p:sp>
+        <p:nvSpPr>
+          <p:cNvPr id="34" name="Shape 32"/>
+          <p:cNvSpPr/>
+          <p:nvPr/>
+        </p:nvSpPr>
+        <p:spPr>
+          <a:xfrm>
+            <a:off x="6629400" y="2944368"/>
+            <a:ext cx="502920" cy="347472"/>
+          </a:xfrm>
+          <a:prstGeom prst="rect">
+            <a:avLst/>
+          </a:prstGeom>
+          <a:solidFill>
+            <a:srgbClr val="D69E2E">
+              <a:alpha val="70000"/>
+            </a:srgbClr>
+          </a:solidFill>
+          <a:ln/>
+          <a:effectLst>
+            <a:outerShdw sx="100000" sy="100000" kx="0" ky="0" algn="bl" rotWithShape="0" blurRad="101600" dist="38100" dir="8100000">
+              <a:srgbClr val="000000">
+                <a:alpha val="12000"/>
+              </a:srgbClr>
+            </a:outerShdw>
+          </a:effectLst>
+        </p:spPr>
+      </p:sp>
+      <p:sp>
+        <p:nvSpPr>
+          <p:cNvPr id="35" name="Text 33"/>
+          <p:cNvSpPr/>
+          <p:nvPr/>
+        </p:nvSpPr>
+        <p:spPr>
+          <a:xfrm>
+            <a:off x="6629400" y="2944368"/>
+            <a:ext cx="502920" cy="347472"/>
+          </a:xfrm>
+          <a:prstGeom prst="rect">
+            <a:avLst/>
+          </a:prstGeom>
+          <a:noFill/>
+          <a:ln/>
+        </p:spPr>
+        <p:txBody>
+          <a:bodyPr wrap="square" lIns="0" tIns="0" rIns="0" bIns="0" rtlCol="0" anchor="ctr"/>
+          <a:lstStyle/>
+          <a:p>
+            <a:pPr algn="ctr" indent="0" marL="0">
+              <a:buNone/>
+            </a:pPr>
+            <a:r>
+              <a:rPr lang="en-US" sz="1200" dirty="0">
+                <a:solidFill>
+                  <a:srgbClr val="000000"/>
+                </a:solidFill>
+                <a:latin typeface="Calibri" pitchFamily="34" charset="0"/>
+                <a:ea typeface="Calibri" pitchFamily="34" charset="-122"/>
+                <a:cs typeface="Calibri" pitchFamily="34" charset="-120"/>
+              </a:rPr>
+              <a:t>⏳</a:t>
+            </a:r>
+            <a:endParaRPr lang="en-US" sz="1200" dirty="0"/>
+          </a:p>
+        </p:txBody>
+      </p:sp>
+      <p:sp>
+        <p:nvSpPr>
+          <p:cNvPr id="36" name="Shape 34"/>
+          <p:cNvSpPr/>
+          <p:nvPr/>
+        </p:nvSpPr>
+        <p:spPr>
+          <a:xfrm>
+            <a:off x="7132320" y="3118104"/>
+            <a:ext cx="228600" cy="0"/>
+          </a:xfrm>
+          <a:prstGeom prst="line">
+            <a:avLst/>
+          </a:prstGeom>
+          <a:noFill/>
+          <a:ln w="25400">
+            <a:solidFill>
+              <a:srgbClr val="64748B"/>
+            </a:solidFill>
+            <a:prstDash val="solid"/>
+          </a:ln>
+        </p:spPr>
+      </p:sp>
+      <p:sp>
+        <p:nvSpPr>
+          <p:cNvPr id="37" name="Text 35"/>
+          <p:cNvSpPr/>
+          <p:nvPr/>
+        </p:nvSpPr>
+        <p:spPr>
+          <a:xfrm>
+            <a:off x="1874520" y="3337560"/>
+            <a:ext cx="868680" cy="256032"/>
+          </a:xfrm>
+          <a:prstGeom prst="rect">
+            <a:avLst/>
+          </a:prstGeom>
+          <a:noFill/>
+          <a:ln/>
+        </p:spPr>
+        <p:txBody>
+          <a:bodyPr wrap="square" lIns="0" tIns="0" rIns="0" bIns="0" rtlCol="0" anchor="ctr"/>
+          <a:lstStyle/>
+          <a:p>
+            <a:pPr algn="ctr" indent="0" marL="0">
+              <a:buNone/>
+            </a:pPr>
+            <a:r>
+              <a:rPr lang="en-US" sz="800" dirty="0">
+                <a:solidFill>
+                  <a:srgbClr val="DD6B20"/>
+                </a:solidFill>
+                <a:latin typeface="Calibri" pitchFamily="34" charset="0"/>
+                <a:ea typeface="Calibri" pitchFamily="34" charset="-122"/>
+                <a:cs typeface="Calibri" pitchFamily="34" charset="-120"/>
+              </a:rPr>
+              <a:t>File d'attente</a:t>
+            </a:r>
+            <a:endParaRPr lang="en-US" sz="800" dirty="0"/>
+          </a:p>
+        </p:txBody>
+      </p:sp>
+      <p:sp>
+        <p:nvSpPr>
+          <p:cNvPr id="38" name="Text 36"/>
+          <p:cNvSpPr/>
+          <p:nvPr/>
+        </p:nvSpPr>
+        <p:spPr>
+          <a:xfrm>
+            <a:off x="4114800" y="3337560"/>
+            <a:ext cx="868680" cy="256032"/>
+          </a:xfrm>
+          <a:prstGeom prst="rect">
+            <a:avLst/>
+          </a:prstGeom>
+          <a:noFill/>
+          <a:ln/>
+        </p:spPr>
+        <p:txBody>
+          <a:bodyPr wrap="square" lIns="0" tIns="0" rIns="0" bIns="0" rtlCol="0" anchor="ctr"/>
+          <a:lstStyle/>
+          <a:p>
+            <a:pPr algn="ctr" indent="0" marL="0">
+              <a:buNone/>
+            </a:pPr>
+            <a:r>
+              <a:rPr lang="en-US" sz="800" dirty="0">
+                <a:solidFill>
+                  <a:srgbClr val="DD6B20"/>
+                </a:solidFill>
+                <a:latin typeface="Calibri" pitchFamily="34" charset="0"/>
+                <a:ea typeface="Calibri" pitchFamily="34" charset="-122"/>
+                <a:cs typeface="Calibri" pitchFamily="34" charset="-120"/>
+              </a:rPr>
+              <a:t>File d'attente</a:t>
+            </a:r>
+            <a:endParaRPr lang="en-US" sz="800" dirty="0"/>
+          </a:p>
+        </p:txBody>
+      </p:sp>
+      <p:sp>
+        <p:nvSpPr>
+          <p:cNvPr id="39" name="Text 37"/>
+          <p:cNvSpPr/>
+          <p:nvPr/>
+        </p:nvSpPr>
+        <p:spPr>
+          <a:xfrm>
+            <a:off x="6355080" y="3337560"/>
+            <a:ext cx="868680" cy="256032"/>
+          </a:xfrm>
+          <a:prstGeom prst="rect">
+            <a:avLst/>
+          </a:prstGeom>
+          <a:noFill/>
+          <a:ln/>
+        </p:spPr>
+        <p:txBody>
+          <a:bodyPr wrap="square" lIns="0" tIns="0" rIns="0" bIns="0" rtlCol="0" anchor="ctr"/>
+          <a:lstStyle/>
+          <a:p>
+            <a:pPr algn="ctr" indent="0" marL="0">
+              <a:buNone/>
+            </a:pPr>
+            <a:r>
+              <a:rPr lang="en-US" sz="800" dirty="0">
+                <a:solidFill>
+                  <a:srgbClr val="DD6B20"/>
+                </a:solidFill>
+                <a:latin typeface="Calibri" pitchFamily="34" charset="0"/>
+                <a:ea typeface="Calibri" pitchFamily="34" charset="-122"/>
+                <a:cs typeface="Calibri" pitchFamily="34" charset="-120"/>
+              </a:rPr>
+              <a:t>File d'attente</a:t>
+            </a:r>
+            <a:endParaRPr lang="en-US" sz="800" dirty="0"/>
+          </a:p>
+        </p:txBody>
+      </p:sp>
+      <p:sp>
+        <p:nvSpPr>
+          <p:cNvPr id="40" name="Text 38"/>
+          <p:cNvSpPr/>
+          <p:nvPr/>
+        </p:nvSpPr>
+        <p:spPr>
+          <a:xfrm>
+            <a:off x="365760" y="3675888"/>
+            <a:ext cx="8412480" cy="594360"/>
+          </a:xfrm>
+          <a:prstGeom prst="rect">
+            <a:avLst/>
+          </a:prstGeom>
+          <a:noFill/>
+          <a:ln/>
+        </p:spPr>
+        <p:txBody>
+          <a:bodyPr wrap="square" lIns="0" tIns="0" rIns="0" bIns="0" rtlCol="0" anchor="ctr"/>
+          <a:lstStyle/>
+          <a:p>
+            <a:pPr indent="0" marL="0">
+              <a:buNone/>
+            </a:pPr>
+            <a:r>
+              <a:rPr lang="en-US" sz="1000" i="1" dirty="0">
+                <a:solidFill>
+                  <a:srgbClr val="64748B"/>
+                </a:solidFill>
+                <a:latin typeface="Calibri" pitchFamily="34" charset="0"/>
+                <a:ea typeface="Calibri" pitchFamily="34" charset="-122"/>
+                <a:cs typeface="Calibri" pitchFamily="34" charset="-120"/>
+              </a:rPr>
+              <a:t>Chaque processeur tourne dans son propre thread, à son propre rythme. Les files d'attente absorbent les écarts de vitesse entre processeurs.</a:t>
+            </a:r>
+            <a:endParaRPr lang="en-US" sz="1000" dirty="0"/>
+          </a:p>
+        </p:txBody>
+      </p:sp>
+      <p:sp>
+        <p:nvSpPr>
+          <p:cNvPr id="41" name="Shape 39"/>
+          <p:cNvSpPr/>
+          <p:nvPr/>
+        </p:nvSpPr>
+        <p:spPr>
+          <a:xfrm>
+            <a:off x="365760" y="4315968"/>
+            <a:ext cx="8412480" cy="256032"/>
+          </a:xfrm>
+          <a:prstGeom prst="rect">
+            <a:avLst/>
+          </a:prstGeom>
+          <a:solidFill>
+            <a:srgbClr val="028090">
+              <a:alpha val="20000"/>
+            </a:srgbClr>
+          </a:solidFill>
+          <a:ln/>
+        </p:spPr>
+      </p:sp>
+      <p:sp>
+        <p:nvSpPr>
+          <p:cNvPr id="42" name="Text 40"/>
+          <p:cNvSpPr/>
+          <p:nvPr/>
+        </p:nvSpPr>
+        <p:spPr>
+          <a:xfrm>
+            <a:off x="457200" y="4325112"/>
+            <a:ext cx="8229600" cy="237744"/>
+          </a:xfrm>
+          <a:prstGeom prst="rect">
+            <a:avLst/>
+          </a:prstGeom>
+          <a:noFill/>
+          <a:ln/>
+        </p:spPr>
+        <p:txBody>
+          <a:bodyPr wrap="square" lIns="0" tIns="0" rIns="0" bIns="0" rtlCol="0" anchor="ctr"/>
+          <a:lstStyle/>
+          <a:p>
+            <a:pPr indent="0" marL="0">
+              <a:buNone/>
+            </a:pPr>
+            <a:r>
+              <a:rPr lang="en-US" sz="900" dirty="0">
+                <a:solidFill>
+                  <a:srgbClr val="021B3A"/>
+                </a:solidFill>
+                <a:latin typeface="Calibri" pitchFamily="34" charset="0"/>
+                <a:ea typeface="Calibri" pitchFamily="34" charset="-122"/>
+                <a:cs typeface="Calibri" pitchFamily="34" charset="-120"/>
+              </a:rPr>
+              <a:t>Back-pressure : si Processeur B est saturé → la file grossit → Processeur A ralentit automatiquement</a:t>
+            </a:r>
+            <a:endParaRPr lang="en-US" sz="900" dirty="0"/>
+          </a:p>
+        </p:txBody>
+      </p:sp>
+    </p:spTree>
+  </p:cSld>
+  <p:clrMapOvr>
+    <a:masterClrMapping/>
+  </p:clrMapOvr>
+</p:sld>
+</file>
+
+<file path=ppt/slides/slide16.xml><?xml version="1.0" encoding="utf-8"?>
+<p:sld xmlns:a="http://schemas.openxmlformats.org/drawingml/2006/main" xmlns:r="http://schemas.openxmlformats.org/officeDocument/2006/relationships" xmlns:p="http://schemas.openxmlformats.org/presentationml/2006/main">
+  <p:cSld name="Slide 16">
+    <p:bg>
+      <p:bgPr>
+        <a:solidFill>
+          <a:srgbClr val="F0F4F8"/>
+        </a:solidFill>
+      </p:bgPr>
+    </p:bg>
+    <p:spTree>
+      <p:nvGrpSpPr>
+        <p:cNvPr id="1" name=""/>
+        <p:cNvGrpSpPr/>
+        <p:nvPr/>
+      </p:nvGrpSpPr>
+      <p:grpSpPr>
+        <a:xfrm>
+          <a:off x="0" y="0"/>
+          <a:ext cx="0" cy="0"/>
+          <a:chOff x="0" y="0"/>
+          <a:chExt cx="0" cy="0"/>
+        </a:xfrm>
+      </p:grpSpPr>
+      <p:sp>
+        <p:nvSpPr>
+          <p:cNvPr id="2" name="Shape 0"/>
+          <p:cNvSpPr/>
+          <p:nvPr/>
+        </p:nvSpPr>
+        <p:spPr>
+          <a:xfrm>
+            <a:off x="0" y="0"/>
+            <a:ext cx="9144000" cy="685800"/>
+          </a:xfrm>
+          <a:prstGeom prst="rect">
+            <a:avLst/>
+          </a:prstGeom>
+          <a:solidFill>
+            <a:srgbClr val="021B3A"/>
+          </a:solidFill>
+          <a:ln/>
+        </p:spPr>
+      </p:sp>
+      <p:sp>
+        <p:nvSpPr>
+          <p:cNvPr id="3" name="Shape 1"/>
+          <p:cNvSpPr/>
+          <p:nvPr/>
+        </p:nvSpPr>
+        <p:spPr>
+          <a:xfrm>
+            <a:off x="0" y="0"/>
+            <a:ext cx="164592" cy="685800"/>
+          </a:xfrm>
+          <a:prstGeom prst="rect">
+            <a:avLst/>
+          </a:prstGeom>
+          <a:solidFill>
+            <a:srgbClr val="028090"/>
+          </a:solidFill>
+          <a:ln/>
+        </p:spPr>
+      </p:sp>
+      <p:sp>
+        <p:nvSpPr>
+          <p:cNvPr id="4" name="Text 2"/>
+          <p:cNvSpPr/>
+          <p:nvPr/>
+        </p:nvSpPr>
+        <p:spPr>
+          <a:xfrm>
+            <a:off x="365760" y="73152"/>
+            <a:ext cx="8595360" cy="548640"/>
+          </a:xfrm>
+          <a:prstGeom prst="rect">
+            <a:avLst/>
+          </a:prstGeom>
+          <a:noFill/>
+          <a:ln/>
+        </p:spPr>
+        <p:txBody>
+          <a:bodyPr wrap="square" lIns="0" tIns="0" rIns="0" bIns="0" rtlCol="0" anchor="ctr"/>
+          <a:lstStyle/>
+          <a:p>
+            <a:pPr indent="0" marL="0">
+              <a:buNone/>
+            </a:pPr>
+            <a:r>
+              <a:rPr lang="en-US" sz="2200" b="1" dirty="0">
+                <a:solidFill>
+                  <a:srgbClr val="FFFFFF"/>
+                </a:solidFill>
+                <a:latin typeface="Calibri" pitchFamily="34" charset="0"/>
+                <a:ea typeface="Calibri" pitchFamily="34" charset="-122"/>
+                <a:cs typeface="Calibri" pitchFamily="34" charset="-120"/>
+              </a:rPr>
+              <a:t>Synchrone vs Asynchrone — La Différence Fondamentale</a:t>
+            </a:r>
+            <a:endParaRPr lang="en-US" sz="2200" dirty="0"/>
+          </a:p>
+        </p:txBody>
+      </p:sp>
+      <p:sp>
+        <p:nvSpPr>
+          <p:cNvPr id="5" name="Shape 3"/>
+          <p:cNvSpPr/>
+          <p:nvPr/>
+        </p:nvSpPr>
+        <p:spPr>
+          <a:xfrm>
+            <a:off x="274320" y="804672"/>
+            <a:ext cx="3931920" cy="4069080"/>
+          </a:xfrm>
+          <a:prstGeom prst="rect">
+            <a:avLst/>
+          </a:prstGeom>
+          <a:solidFill>
+            <a:srgbClr val="FFFFFF"/>
+          </a:solidFill>
+          <a:ln/>
+          <a:effectLst>
+            <a:outerShdw sx="100000" sy="100000" kx="0" ky="0" algn="bl" rotWithShape="0" blurRad="101600" dist="38100" dir="8100000">
+              <a:srgbClr val="000000">
+                <a:alpha val="12000"/>
+              </a:srgbClr>
+            </a:outerShdw>
+          </a:effectLst>
+        </p:spPr>
+      </p:sp>
+      <p:sp>
+        <p:nvSpPr>
+          <p:cNvPr id="6" name="Shape 4"/>
+          <p:cNvSpPr/>
+          <p:nvPr/>
+        </p:nvSpPr>
+        <p:spPr>
+          <a:xfrm>
+            <a:off x="274320" y="804672"/>
+            <a:ext cx="3931920" cy="320040"/>
+          </a:xfrm>
+          <a:prstGeom prst="rect">
+            <a:avLst/>
+          </a:prstGeom>
+          <a:solidFill>
+            <a:srgbClr val="E53E3E"/>
+          </a:solidFill>
+          <a:ln/>
+        </p:spPr>
+      </p:sp>
+      <p:sp>
+        <p:nvSpPr>
+          <p:cNvPr id="7" name="Text 5"/>
+          <p:cNvSpPr/>
+          <p:nvPr/>
+        </p:nvSpPr>
+        <p:spPr>
+          <a:xfrm>
+            <a:off x="320040" y="804672"/>
+            <a:ext cx="3840480" cy="320040"/>
+          </a:xfrm>
+          <a:prstGeom prst="rect">
+            <a:avLst/>
+          </a:prstGeom>
+          <a:noFill/>
+          <a:ln/>
+        </p:spPr>
+        <p:txBody>
+          <a:bodyPr wrap="square" lIns="0" tIns="0" rIns="0" bIns="0" rtlCol="0" anchor="ctr"/>
+          <a:lstStyle/>
+          <a:p>
+            <a:pPr indent="0" marL="0">
+              <a:buNone/>
+            </a:pPr>
+            <a:r>
+              <a:rPr lang="en-US" sz="1100" b="1" dirty="0">
+                <a:solidFill>
+                  <a:srgbClr val="FFFFFF"/>
+                </a:solidFill>
+                <a:latin typeface="Calibri" pitchFamily="34" charset="0"/>
+                <a:ea typeface="Calibri" pitchFamily="34" charset="-122"/>
+                <a:cs typeface="Calibri" pitchFamily="34" charset="-120"/>
+              </a:rPr>
+              <a:t>Synchrone — API REST classique</a:t>
+            </a:r>
+            <a:endParaRPr lang="en-US" sz="1100" dirty="0"/>
+          </a:p>
+        </p:txBody>
+      </p:sp>
+      <p:sp>
+        <p:nvSpPr>
+          <p:cNvPr id="8" name="Shape 6"/>
+          <p:cNvSpPr/>
+          <p:nvPr/>
+        </p:nvSpPr>
+        <p:spPr>
+          <a:xfrm>
+            <a:off x="457200" y="1234440"/>
+            <a:ext cx="3566160" cy="347472"/>
+          </a:xfrm>
+          <a:prstGeom prst="rect">
+            <a:avLst/>
+          </a:prstGeom>
+          <a:solidFill>
+            <a:srgbClr val="065A82"/>
+          </a:solidFill>
+          <a:ln/>
+          <a:effectLst>
+            <a:outerShdw sx="100000" sy="100000" kx="0" ky="0" algn="bl" rotWithShape="0" blurRad="101600" dist="38100" dir="8100000">
+              <a:srgbClr val="000000">
+                <a:alpha val="12000"/>
+              </a:srgbClr>
+            </a:outerShdw>
+          </a:effectLst>
+        </p:spPr>
+      </p:sp>
+      <p:sp>
+        <p:nvSpPr>
+          <p:cNvPr id="9" name="Text 7"/>
+          <p:cNvSpPr/>
+          <p:nvPr/>
+        </p:nvSpPr>
+        <p:spPr>
+          <a:xfrm>
+            <a:off x="457200" y="1234440"/>
+            <a:ext cx="3566160" cy="347472"/>
+          </a:xfrm>
+          <a:prstGeom prst="rect">
+            <a:avLst/>
+          </a:prstGeom>
+          <a:noFill/>
+          <a:ln/>
+        </p:spPr>
+        <p:txBody>
+          <a:bodyPr wrap="square" lIns="0" tIns="0" rIns="0" bIns="0" rtlCol="0" anchor="ctr"/>
+          <a:lstStyle/>
+          <a:p>
+            <a:pPr algn="ctr" indent="0" marL="0">
+              <a:buNone/>
+            </a:pPr>
+            <a:r>
+              <a:rPr lang="en-US" sz="1100" b="1" dirty="0">
+                <a:solidFill>
+                  <a:srgbClr val="FFFFFF"/>
+                </a:solidFill>
+                <a:latin typeface="Calibri" pitchFamily="34" charset="0"/>
+                <a:ea typeface="Calibri" pitchFamily="34" charset="-122"/>
+                <a:cs typeface="Calibri" pitchFamily="34" charset="-120"/>
+              </a:rPr>
+              <a:t>Client envoie requête</a:t>
+            </a:r>
+            <a:endParaRPr lang="en-US" sz="1100" dirty="0"/>
+          </a:p>
+        </p:txBody>
+      </p:sp>
+      <p:sp>
+        <p:nvSpPr>
+          <p:cNvPr id="10" name="Text 8"/>
+          <p:cNvSpPr/>
+          <p:nvPr/>
+        </p:nvSpPr>
+        <p:spPr>
+          <a:xfrm>
+            <a:off x="640080" y="1664208"/>
+            <a:ext cx="3383280" cy="256032"/>
+          </a:xfrm>
+          <a:prstGeom prst="rect">
+            <a:avLst/>
+          </a:prstGeom>
+          <a:noFill/>
+          <a:ln/>
+        </p:spPr>
+        <p:txBody>
+          <a:bodyPr wrap="square" lIns="0" tIns="0" rIns="0" bIns="0" rtlCol="0" anchor="ctr"/>
+          <a:lstStyle/>
+          <a:p>
+            <a:pPr indent="0" marL="0">
+              <a:buNone/>
+            </a:pPr>
+            <a:r>
+              <a:rPr lang="en-US" sz="1100" i="1" dirty="0">
+                <a:solidFill>
+                  <a:srgbClr val="64748B"/>
+                </a:solidFill>
+                <a:latin typeface="Calibri" pitchFamily="34" charset="0"/>
+                <a:ea typeface="Calibri" pitchFamily="34" charset="-122"/>
+                <a:cs typeface="Calibri" pitchFamily="34" charset="-120"/>
+              </a:rPr>
+              <a:t>→ attend...</a:t>
+            </a:r>
+            <a:endParaRPr lang="en-US" sz="1100" dirty="0"/>
+          </a:p>
+        </p:txBody>
+      </p:sp>
+      <p:sp>
+        <p:nvSpPr>
+          <p:cNvPr id="11" name="Text 9"/>
+          <p:cNvSpPr/>
+          <p:nvPr/>
+        </p:nvSpPr>
+        <p:spPr>
+          <a:xfrm>
+            <a:off x="640080" y="1938528"/>
+            <a:ext cx="3383280" cy="256032"/>
+          </a:xfrm>
+          <a:prstGeom prst="rect">
+            <a:avLst/>
+          </a:prstGeom>
+          <a:noFill/>
+          <a:ln/>
+        </p:spPr>
+        <p:txBody>
+          <a:bodyPr wrap="square" lIns="0" tIns="0" rIns="0" bIns="0" rtlCol="0" anchor="ctr"/>
+          <a:lstStyle/>
+          <a:p>
+            <a:pPr indent="0" marL="0">
+              <a:buNone/>
+            </a:pPr>
+            <a:r>
+              <a:rPr lang="en-US" sz="1100" i="1" dirty="0">
+                <a:solidFill>
+                  <a:srgbClr val="64748B"/>
+                </a:solidFill>
+                <a:latin typeface="Calibri" pitchFamily="34" charset="0"/>
+                <a:ea typeface="Calibri" pitchFamily="34" charset="-122"/>
+                <a:cs typeface="Calibri" pitchFamily="34" charset="-120"/>
+              </a:rPr>
+              <a:t>→ attend...</a:t>
+            </a:r>
+            <a:endParaRPr lang="en-US" sz="1100" dirty="0"/>
+          </a:p>
+        </p:txBody>
+      </p:sp>
+      <p:sp>
+        <p:nvSpPr>
+          <p:cNvPr id="12" name="Text 10"/>
+          <p:cNvSpPr/>
+          <p:nvPr/>
+        </p:nvSpPr>
+        <p:spPr>
+          <a:xfrm>
+            <a:off x="640080" y="2212848"/>
+            <a:ext cx="3383280" cy="256032"/>
+          </a:xfrm>
+          <a:prstGeom prst="rect">
+            <a:avLst/>
+          </a:prstGeom>
+          <a:noFill/>
+          <a:ln/>
+        </p:spPr>
+        <p:txBody>
+          <a:bodyPr wrap="square" lIns="0" tIns="0" rIns="0" bIns="0" rtlCol="0" anchor="ctr"/>
+          <a:lstStyle/>
+          <a:p>
+            <a:pPr indent="0" marL="0">
+              <a:buNone/>
+            </a:pPr>
+            <a:r>
+              <a:rPr lang="en-US" sz="1100" i="1" dirty="0">
+                <a:solidFill>
+                  <a:srgbClr val="64748B"/>
+                </a:solidFill>
+                <a:latin typeface="Calibri" pitchFamily="34" charset="0"/>
+                <a:ea typeface="Calibri" pitchFamily="34" charset="-122"/>
+                <a:cs typeface="Calibri" pitchFamily="34" charset="-120"/>
+              </a:rPr>
+              <a:t>→ attend...</a:t>
+            </a:r>
+            <a:endParaRPr lang="en-US" sz="1100" dirty="0"/>
+          </a:p>
+        </p:txBody>
+      </p:sp>
+      <p:sp>
+        <p:nvSpPr>
+          <p:cNvPr id="13" name="Shape 11"/>
+          <p:cNvSpPr/>
+          <p:nvPr/>
+        </p:nvSpPr>
+        <p:spPr>
+          <a:xfrm>
+            <a:off x="457200" y="2578608"/>
+            <a:ext cx="3566160" cy="347472"/>
+          </a:xfrm>
+          <a:prstGeom prst="rect">
+            <a:avLst/>
+          </a:prstGeom>
+          <a:solidFill>
+            <a:srgbClr val="38A169"/>
+          </a:solidFill>
+          <a:ln/>
+          <a:effectLst>
+            <a:outerShdw sx="100000" sy="100000" kx="0" ky="0" algn="bl" rotWithShape="0" blurRad="101600" dist="38100" dir="8100000">
+              <a:srgbClr val="000000">
+                <a:alpha val="12000"/>
+              </a:srgbClr>
+            </a:outerShdw>
+          </a:effectLst>
+        </p:spPr>
+      </p:sp>
+      <p:sp>
+        <p:nvSpPr>
+          <p:cNvPr id="14" name="Text 12"/>
+          <p:cNvSpPr/>
+          <p:nvPr/>
+        </p:nvSpPr>
+        <p:spPr>
+          <a:xfrm>
+            <a:off x="457200" y="2578608"/>
+            <a:ext cx="3566160" cy="347472"/>
+          </a:xfrm>
+          <a:prstGeom prst="rect">
+            <a:avLst/>
+          </a:prstGeom>
+          <a:noFill/>
+          <a:ln/>
+        </p:spPr>
+        <p:txBody>
+          <a:bodyPr wrap="square" lIns="0" tIns="0" rIns="0" bIns="0" rtlCol="0" anchor="ctr"/>
+          <a:lstStyle/>
+          <a:p>
+            <a:pPr algn="ctr" indent="0" marL="0">
+              <a:buNone/>
+            </a:pPr>
+            <a:r>
+              <a:rPr lang="en-US" sz="1100" b="1" dirty="0">
+                <a:solidFill>
+                  <a:srgbClr val="FFFFFF"/>
+                </a:solidFill>
+                <a:latin typeface="Calibri" pitchFamily="34" charset="0"/>
+                <a:ea typeface="Calibri" pitchFamily="34" charset="-122"/>
+                <a:cs typeface="Calibri" pitchFamily="34" charset="-120"/>
+              </a:rPr>
+              <a:t>Client reçoit réponse ✓</a:t>
+            </a:r>
+            <a:endParaRPr lang="en-US" sz="1100" dirty="0"/>
+          </a:p>
+        </p:txBody>
+      </p:sp>
+      <p:sp>
+        <p:nvSpPr>
+          <p:cNvPr id="15" name="Shape 13"/>
+          <p:cNvSpPr/>
+          <p:nvPr/>
+        </p:nvSpPr>
+        <p:spPr>
+          <a:xfrm>
+            <a:off x="457200" y="3063240"/>
+            <a:ext cx="3566160" cy="658368"/>
+          </a:xfrm>
+          <a:prstGeom prst="rect">
+            <a:avLst/>
+          </a:prstGeom>
+          <a:solidFill>
+            <a:srgbClr val="FFF5F5"/>
+          </a:solidFill>
+          <a:ln/>
+          <a:effectLst>
+            <a:outerShdw sx="100000" sy="100000" kx="0" ky="0" algn="bl" rotWithShape="0" blurRad="101600" dist="38100" dir="8100000">
+              <a:srgbClr val="000000">
+                <a:alpha val="12000"/>
+              </a:srgbClr>
+            </a:outerShdw>
+          </a:effectLst>
+        </p:spPr>
+      </p:sp>
+      <p:sp>
+        <p:nvSpPr>
+          <p:cNvPr id="16" name="Shape 14"/>
+          <p:cNvSpPr/>
+          <p:nvPr/>
+        </p:nvSpPr>
+        <p:spPr>
+          <a:xfrm>
+            <a:off x="457200" y="3063240"/>
+            <a:ext cx="64008" cy="658368"/>
+          </a:xfrm>
+          <a:prstGeom prst="rect">
+            <a:avLst/>
+          </a:prstGeom>
+          <a:solidFill>
+            <a:srgbClr val="E53E3E"/>
+          </a:solidFill>
+          <a:ln/>
+        </p:spPr>
+      </p:sp>
+      <p:sp>
+        <p:nvSpPr>
+          <p:cNvPr id="17" name="Text 15"/>
+          <p:cNvSpPr/>
+          <p:nvPr/>
+        </p:nvSpPr>
+        <p:spPr>
+          <a:xfrm>
+            <a:off x="594360" y="3090672"/>
+            <a:ext cx="3291840" cy="594360"/>
+          </a:xfrm>
+          <a:prstGeom prst="rect">
+            <a:avLst/>
+          </a:prstGeom>
+          <a:noFill/>
+          <a:ln/>
+        </p:spPr>
+        <p:txBody>
+          <a:bodyPr wrap="square" lIns="0" tIns="0" rIns="0" bIns="0" rtlCol="0" anchor="ctr"/>
+          <a:lstStyle/>
+          <a:p>
+            <a:pPr indent="0" marL="0">
+              <a:buNone/>
+            </a:pPr>
+            <a:r>
+              <a:rPr lang="en-US" sz="1000" dirty="0">
+                <a:solidFill>
+                  <a:srgbClr val="021B3A"/>
+                </a:solidFill>
+                <a:latin typeface="Calibri" pitchFamily="34" charset="0"/>
+                <a:ea typeface="Calibri" pitchFamily="34" charset="-122"/>
+                <a:cs typeface="Calibri" pitchFamily="34" charset="-120"/>
+              </a:rPr>
+              <a:t>Tout se passe dans le même fil d'exécution. Le client est BLOQUÉ jusqu'à la fin du traitement.</a:t>
+            </a:r>
+            <a:endParaRPr lang="en-US" sz="1000" dirty="0"/>
+          </a:p>
+        </p:txBody>
+      </p:sp>
+      <p:sp>
+        <p:nvSpPr>
+          <p:cNvPr id="18" name="Text 16"/>
+          <p:cNvSpPr/>
+          <p:nvPr/>
+        </p:nvSpPr>
+        <p:spPr>
+          <a:xfrm>
+            <a:off x="457200" y="3794760"/>
+            <a:ext cx="3566160" cy="777240"/>
+          </a:xfrm>
+          <a:prstGeom prst="rect">
+            <a:avLst/>
+          </a:prstGeom>
+          <a:noFill/>
+          <a:ln/>
+        </p:spPr>
+        <p:txBody>
+          <a:bodyPr wrap="square" lIns="50800" tIns="50800" rIns="50800" bIns="50800" rtlCol="0" anchor="ctr"/>
+          <a:lstStyle/>
+          <a:p>
+            <a:pPr indent="0" marL="0">
+              <a:buNone/>
+            </a:pPr>
+            <a:r>
+              <a:rPr lang="en-US" sz="1000" i="1" dirty="0">
+                <a:solidFill>
+                  <a:srgbClr val="64748B"/>
+                </a:solidFill>
+                <a:latin typeface="Calibri" pitchFamily="34" charset="0"/>
+                <a:ea typeface="Calibri" pitchFamily="34" charset="-122"/>
+                <a:cs typeface="Calibri" pitchFamily="34" charset="-120"/>
+              </a:rPr>
+              <a:t>Modèle : Guichet de banque</a:t>
+            </a:r>
+            <a:endParaRPr lang="en-US" sz="1000" dirty="0"/>
+          </a:p>
+          <a:p>
+            <a:pPr indent="0" marL="0">
+              <a:buNone/>
+            </a:pPr>
+            <a:r>
+              <a:rPr lang="en-US" sz="1000" i="1" dirty="0">
+                <a:solidFill>
+                  <a:srgbClr val="64748B"/>
+                </a:solidFill>
+                <a:latin typeface="Calibri" pitchFamily="34" charset="0"/>
+                <a:ea typeface="Calibri" pitchFamily="34" charset="-122"/>
+                <a:cs typeface="Calibri" pitchFamily="34" charset="-120"/>
+              </a:rPr>
+              <a:t>Le client attend debout jusqu'à ce que toute l'opération soit terminée.</a:t>
+            </a:r>
+            <a:endParaRPr lang="en-US" sz="1000" dirty="0"/>
+          </a:p>
+        </p:txBody>
+      </p:sp>
+      <p:sp>
+        <p:nvSpPr>
+          <p:cNvPr id="19" name="Shape 17"/>
+          <p:cNvSpPr/>
+          <p:nvPr/>
+        </p:nvSpPr>
+        <p:spPr>
+          <a:xfrm>
+            <a:off x="4754880" y="804672"/>
+            <a:ext cx="4114800" cy="4069080"/>
+          </a:xfrm>
+          <a:prstGeom prst="rect">
+            <a:avLst/>
+          </a:prstGeom>
+          <a:solidFill>
+            <a:srgbClr val="FFFFFF"/>
+          </a:solidFill>
+          <a:ln/>
+          <a:effectLst>
+            <a:outerShdw sx="100000" sy="100000" kx="0" ky="0" algn="bl" rotWithShape="0" blurRad="101600" dist="38100" dir="8100000">
+              <a:srgbClr val="000000">
+                <a:alpha val="12000"/>
+              </a:srgbClr>
+            </a:outerShdw>
+          </a:effectLst>
+        </p:spPr>
+      </p:sp>
+      <p:sp>
+        <p:nvSpPr>
+          <p:cNvPr id="20" name="Shape 18"/>
+          <p:cNvSpPr/>
+          <p:nvPr/>
+        </p:nvSpPr>
+        <p:spPr>
+          <a:xfrm>
+            <a:off x="4754880" y="804672"/>
+            <a:ext cx="4114800" cy="320040"/>
+          </a:xfrm>
+          <a:prstGeom prst="rect">
+            <a:avLst/>
+          </a:prstGeom>
+          <a:solidFill>
+            <a:srgbClr val="38A169"/>
+          </a:solidFill>
+          <a:ln/>
+        </p:spPr>
+      </p:sp>
+      <p:sp>
+        <p:nvSpPr>
+          <p:cNvPr id="21" name="Text 19"/>
+          <p:cNvSpPr/>
+          <p:nvPr/>
+        </p:nvSpPr>
+        <p:spPr>
+          <a:xfrm>
+            <a:off x="4800600" y="804672"/>
+            <a:ext cx="4023360" cy="320040"/>
+          </a:xfrm>
+          <a:prstGeom prst="rect">
+            <a:avLst/>
+          </a:prstGeom>
+          <a:noFill/>
+          <a:ln/>
+        </p:spPr>
+        <p:txBody>
+          <a:bodyPr wrap="square" lIns="0" tIns="0" rIns="0" bIns="0" rtlCol="0" anchor="ctr"/>
+          <a:lstStyle/>
+          <a:p>
+            <a:pPr indent="0" marL="0">
+              <a:buNone/>
+            </a:pPr>
+            <a:r>
+              <a:rPr lang="en-US" sz="1100" b="1" dirty="0">
+                <a:solidFill>
+                  <a:srgbClr val="FFFFFF"/>
+                </a:solidFill>
+                <a:latin typeface="Calibri" pitchFamily="34" charset="0"/>
+                <a:ea typeface="Calibri" pitchFamily="34" charset="-122"/>
+                <a:cs typeface="Calibri" pitchFamily="34" charset="-120"/>
+              </a:rPr>
+              <a:t>Asynchrone — NiFi</a:t>
+            </a:r>
+            <a:endParaRPr lang="en-US" sz="1100" dirty="0"/>
+          </a:p>
+        </p:txBody>
+      </p:sp>
+      <p:sp>
+        <p:nvSpPr>
+          <p:cNvPr id="22" name="Text 20"/>
+          <p:cNvSpPr/>
+          <p:nvPr/>
+        </p:nvSpPr>
+        <p:spPr>
+          <a:xfrm>
+            <a:off x="4846320" y="1207008"/>
+            <a:ext cx="3931920" cy="256032"/>
+          </a:xfrm>
+          <a:prstGeom prst="rect">
+            <a:avLst/>
+          </a:prstGeom>
+          <a:noFill/>
+          <a:ln/>
+        </p:spPr>
+        <p:txBody>
+          <a:bodyPr wrap="square" lIns="0" tIns="0" rIns="0" bIns="0" rtlCol="0" anchor="ctr"/>
+          <a:lstStyle/>
+          <a:p>
+            <a:pPr indent="0" marL="0">
+              <a:buNone/>
+            </a:pPr>
+            <a:r>
+              <a:rPr lang="en-US" sz="1000" b="1" dirty="0">
+                <a:solidFill>
+                  <a:srgbClr val="065A82"/>
+                </a:solidFill>
+                <a:latin typeface="Calibri" pitchFamily="34" charset="0"/>
+                <a:ea typeface="Calibri" pitchFamily="34" charset="-122"/>
+                <a:cs typeface="Calibri" pitchFamily="34" charset="-120"/>
+              </a:rPr>
+              <a:t>Thread Processeur A</a:t>
+            </a:r>
+            <a:endParaRPr lang="en-US" sz="1000" dirty="0"/>
+          </a:p>
+        </p:txBody>
+      </p:sp>
+      <p:sp>
+        <p:nvSpPr>
+          <p:cNvPr id="23" name="Shape 21"/>
+          <p:cNvSpPr/>
+          <p:nvPr/>
+        </p:nvSpPr>
+        <p:spPr>
+          <a:xfrm>
+            <a:off x="4846320" y="1481328"/>
+            <a:ext cx="3749040" cy="347472"/>
+          </a:xfrm>
+          <a:prstGeom prst="rect">
+            <a:avLst/>
+          </a:prstGeom>
+          <a:solidFill>
+            <a:srgbClr val="065A82"/>
+          </a:solidFill>
+          <a:ln/>
+          <a:effectLst>
+            <a:outerShdw sx="100000" sy="100000" kx="0" ky="0" algn="bl" rotWithShape="0" blurRad="101600" dist="38100" dir="8100000">
+              <a:srgbClr val="000000">
+                <a:alpha val="12000"/>
+              </a:srgbClr>
+            </a:outerShdw>
+          </a:effectLst>
+        </p:spPr>
+      </p:sp>
+      <p:sp>
+        <p:nvSpPr>
+          <p:cNvPr id="24" name="Text 22"/>
+          <p:cNvSpPr/>
+          <p:nvPr/>
+        </p:nvSpPr>
+        <p:spPr>
+          <a:xfrm>
+            <a:off x="4846320" y="1481328"/>
+            <a:ext cx="3749040" cy="347472"/>
+          </a:xfrm>
+          <a:prstGeom prst="rect">
+            <a:avLst/>
+          </a:prstGeom>
+          <a:noFill/>
+          <a:ln/>
+        </p:spPr>
+        <p:txBody>
+          <a:bodyPr wrap="square" lIns="0" tIns="0" rIns="0" bIns="0" rtlCol="0" anchor="ctr"/>
+          <a:lstStyle/>
+          <a:p>
+            <a:pPr algn="ctr" indent="0" marL="0">
+              <a:buNone/>
+            </a:pPr>
+            <a:r>
+              <a:rPr lang="en-US" sz="1100" b="1" dirty="0">
+                <a:solidFill>
+                  <a:srgbClr val="FFFFFF"/>
+                </a:solidFill>
+                <a:latin typeface="Calibri" pitchFamily="34" charset="0"/>
+                <a:ea typeface="Calibri" pitchFamily="34" charset="-122"/>
+                <a:cs typeface="Calibri" pitchFamily="34" charset="-120"/>
+              </a:rPr>
+              <a:t>Dépose FlowFile dans la file</a:t>
+            </a:r>
+            <a:endParaRPr lang="en-US" sz="1100" dirty="0"/>
+          </a:p>
+        </p:txBody>
+      </p:sp>
+      <p:sp>
+        <p:nvSpPr>
+          <p:cNvPr id="25" name="Text 23"/>
+          <p:cNvSpPr/>
+          <p:nvPr/>
+        </p:nvSpPr>
+        <p:spPr>
+          <a:xfrm>
+            <a:off x="4846320" y="1874520"/>
+            <a:ext cx="3749040" cy="256032"/>
+          </a:xfrm>
+          <a:prstGeom prst="rect">
+            <a:avLst/>
+          </a:prstGeom>
+          <a:noFill/>
+          <a:ln/>
+        </p:spPr>
+        <p:txBody>
+          <a:bodyPr wrap="square" lIns="0" tIns="0" rIns="0" bIns="0" rtlCol="0" anchor="ctr"/>
+          <a:lstStyle/>
+          <a:p>
+            <a:pPr indent="0" marL="0">
+              <a:buNone/>
+            </a:pPr>
+            <a:r>
+              <a:rPr lang="en-US" sz="1000" i="1" dirty="0">
+                <a:solidFill>
+                  <a:srgbClr val="065A82"/>
+                </a:solidFill>
+                <a:latin typeface="Calibri" pitchFamily="34" charset="0"/>
+                <a:ea typeface="Calibri" pitchFamily="34" charset="-122"/>
+                <a:cs typeface="Calibri" pitchFamily="34" charset="-120"/>
+              </a:rPr>
+              <a:t>↓ continue IMMÉDIATEMENT</a:t>
+            </a:r>
+            <a:endParaRPr lang="en-US" sz="1000" dirty="0"/>
+          </a:p>
+        </p:txBody>
+      </p:sp>
+      <p:sp>
+        <p:nvSpPr>
+          <p:cNvPr id="26" name="Shape 24"/>
+          <p:cNvSpPr/>
+          <p:nvPr/>
+        </p:nvSpPr>
+        <p:spPr>
+          <a:xfrm>
+            <a:off x="4846320" y="2148840"/>
+            <a:ext cx="3749040" cy="347472"/>
+          </a:xfrm>
+          <a:prstGeom prst="rect">
+            <a:avLst/>
+          </a:prstGeom>
+          <a:solidFill>
+            <a:srgbClr val="065A82">
+              <a:alpha val="40000"/>
+            </a:srgbClr>
+          </a:solidFill>
+          <a:ln/>
+          <a:effectLst>
+            <a:outerShdw sx="100000" sy="100000" kx="0" ky="0" algn="bl" rotWithShape="0" blurRad="101600" dist="38100" dir="8100000">
+              <a:srgbClr val="000000">
+                <a:alpha val="12000"/>
+              </a:srgbClr>
+            </a:outerShdw>
+          </a:effectLst>
+        </p:spPr>
+      </p:sp>
+      <p:sp>
+        <p:nvSpPr>
+          <p:cNvPr id="27" name="Text 25"/>
+          <p:cNvSpPr/>
+          <p:nvPr/>
+        </p:nvSpPr>
+        <p:spPr>
+          <a:xfrm>
+            <a:off x="4846320" y="2148840"/>
+            <a:ext cx="3749040" cy="347472"/>
+          </a:xfrm>
+          <a:prstGeom prst="rect">
+            <a:avLst/>
+          </a:prstGeom>
+          <a:noFill/>
+          <a:ln/>
+        </p:spPr>
+        <p:txBody>
+          <a:bodyPr wrap="square" lIns="0" tIns="0" rIns="0" bIns="0" rtlCol="0" anchor="ctr"/>
+          <a:lstStyle/>
+          <a:p>
+            <a:pPr algn="ctr" indent="0" marL="0">
+              <a:buNone/>
+            </a:pPr>
+            <a:r>
+              <a:rPr lang="en-US" sz="1100" dirty="0">
+                <a:solidFill>
+                  <a:srgbClr val="FFFFFF"/>
+                </a:solidFill>
+                <a:latin typeface="Calibri" pitchFamily="34" charset="0"/>
+                <a:ea typeface="Calibri" pitchFamily="34" charset="-122"/>
+                <a:cs typeface="Calibri" pitchFamily="34" charset="-120"/>
+              </a:rPr>
+              <a:t>Traite d'autres FlowFiles...</a:t>
+            </a:r>
+            <a:endParaRPr lang="en-US" sz="1100" dirty="0"/>
+          </a:p>
+        </p:txBody>
+      </p:sp>
+      <p:sp>
+        <p:nvSpPr>
+          <p:cNvPr id="28" name="Text 26"/>
+          <p:cNvSpPr/>
+          <p:nvPr/>
+        </p:nvSpPr>
+        <p:spPr>
+          <a:xfrm>
+            <a:off x="4846320" y="2606040"/>
+            <a:ext cx="3931920" cy="256032"/>
+          </a:xfrm>
+          <a:prstGeom prst="rect">
+            <a:avLst/>
+          </a:prstGeom>
+          <a:noFill/>
+          <a:ln/>
+        </p:spPr>
+        <p:txBody>
+          <a:bodyPr wrap="square" lIns="0" tIns="0" rIns="0" bIns="0" rtlCol="0" anchor="ctr"/>
+          <a:lstStyle/>
+          <a:p>
+            <a:pPr indent="0" marL="0">
+              <a:buNone/>
+            </a:pPr>
+            <a:r>
+              <a:rPr lang="en-US" sz="1000" b="1" dirty="0">
+                <a:solidFill>
+                  <a:srgbClr val="028090"/>
+                </a:solidFill>
+                <a:latin typeface="Calibri" pitchFamily="34" charset="0"/>
+                <a:ea typeface="Calibri" pitchFamily="34" charset="-122"/>
+                <a:cs typeface="Calibri" pitchFamily="34" charset="-120"/>
+              </a:rPr>
+              <a:t>Thread Processeur B (indépendant)</a:t>
+            </a:r>
+            <a:endParaRPr lang="en-US" sz="1000" dirty="0"/>
+          </a:p>
+        </p:txBody>
+      </p:sp>
+      <p:sp>
+        <p:nvSpPr>
+          <p:cNvPr id="29" name="Shape 27"/>
+          <p:cNvSpPr/>
+          <p:nvPr/>
+        </p:nvSpPr>
+        <p:spPr>
+          <a:xfrm>
+            <a:off x="4846320" y="2880360"/>
+            <a:ext cx="3749040" cy="347472"/>
+          </a:xfrm>
+          <a:prstGeom prst="rect">
+            <a:avLst/>
+          </a:prstGeom>
+          <a:solidFill>
+            <a:srgbClr val="028090"/>
+          </a:solidFill>
+          <a:ln/>
+          <a:effectLst>
+            <a:outerShdw sx="100000" sy="100000" kx="0" ky="0" algn="bl" rotWithShape="0" blurRad="101600" dist="38100" dir="8100000">
+              <a:srgbClr val="000000">
+                <a:alpha val="12000"/>
+              </a:srgbClr>
+            </a:outerShdw>
+          </a:effectLst>
+        </p:spPr>
+      </p:sp>
+      <p:sp>
+        <p:nvSpPr>
+          <p:cNvPr id="30" name="Text 28"/>
+          <p:cNvSpPr/>
+          <p:nvPr/>
+        </p:nvSpPr>
+        <p:spPr>
+          <a:xfrm>
+            <a:off x="4846320" y="2880360"/>
+            <a:ext cx="3749040" cy="347472"/>
+          </a:xfrm>
+          <a:prstGeom prst="rect">
+            <a:avLst/>
+          </a:prstGeom>
+          <a:noFill/>
+          <a:ln/>
+        </p:spPr>
+        <p:txBody>
+          <a:bodyPr wrap="square" lIns="0" tIns="0" rIns="0" bIns="0" rtlCol="0" anchor="ctr"/>
+          <a:lstStyle/>
+          <a:p>
+            <a:pPr algn="ctr" indent="0" marL="0">
+              <a:buNone/>
+            </a:pPr>
+            <a:r>
+              <a:rPr lang="en-US" sz="1100" b="1" dirty="0">
+                <a:solidFill>
+                  <a:srgbClr val="FFFFFF"/>
+                </a:solidFill>
+                <a:latin typeface="Calibri" pitchFamily="34" charset="0"/>
+                <a:ea typeface="Calibri" pitchFamily="34" charset="-122"/>
+                <a:cs typeface="Calibri" pitchFamily="34" charset="-120"/>
+              </a:rPr>
+              <a:t>Traite le FlowFile quand il est prêt</a:t>
+            </a:r>
+            <a:endParaRPr lang="en-US" sz="1100" dirty="0"/>
+          </a:p>
+        </p:txBody>
+      </p:sp>
+      <p:sp>
+        <p:nvSpPr>
+          <p:cNvPr id="31" name="Text 29"/>
+          <p:cNvSpPr/>
+          <p:nvPr/>
+        </p:nvSpPr>
+        <p:spPr>
+          <a:xfrm>
+            <a:off x="4846320" y="3273552"/>
+            <a:ext cx="3749040" cy="256032"/>
+          </a:xfrm>
+          <a:prstGeom prst="rect">
+            <a:avLst/>
+          </a:prstGeom>
+          <a:noFill/>
+          <a:ln/>
+        </p:spPr>
+        <p:txBody>
+          <a:bodyPr wrap="square" lIns="0" tIns="0" rIns="0" bIns="0" rtlCol="0" anchor="ctr"/>
+          <a:lstStyle/>
+          <a:p>
+            <a:pPr indent="0" marL="0">
+              <a:buNone/>
+            </a:pPr>
+            <a:r>
+              <a:rPr lang="en-US" sz="1000" i="1" dirty="0">
+                <a:solidFill>
+                  <a:srgbClr val="DD6B20"/>
+                </a:solidFill>
+                <a:latin typeface="Calibri" pitchFamily="34" charset="0"/>
+                <a:ea typeface="Calibri" pitchFamily="34" charset="-122"/>
+                <a:cs typeface="Calibri" pitchFamily="34" charset="-120"/>
+              </a:rPr>
+              <a:t>⚠ Aucun lien de retour entre A et B</a:t>
+            </a:r>
+            <a:endParaRPr lang="en-US" sz="1000" dirty="0"/>
+          </a:p>
+        </p:txBody>
+      </p:sp>
+      <p:sp>
+        <p:nvSpPr>
+          <p:cNvPr id="32" name="Text 30"/>
+          <p:cNvSpPr/>
+          <p:nvPr/>
+        </p:nvSpPr>
+        <p:spPr>
+          <a:xfrm>
+            <a:off x="4846320" y="3611880"/>
+            <a:ext cx="3840480" cy="822960"/>
+          </a:xfrm>
+          <a:prstGeom prst="rect">
+            <a:avLst/>
+          </a:prstGeom>
+          <a:noFill/>
+          <a:ln/>
+        </p:spPr>
+        <p:txBody>
+          <a:bodyPr wrap="square" lIns="50800" tIns="50800" rIns="50800" bIns="50800" rtlCol="0" anchor="ctr"/>
+          <a:lstStyle/>
+          <a:p>
+            <a:pPr indent="0" marL="0">
+              <a:buNone/>
+            </a:pPr>
+            <a:r>
+              <a:rPr lang="en-US" sz="1000" i="1" dirty="0">
+                <a:solidFill>
+                  <a:srgbClr val="64748B"/>
+                </a:solidFill>
+                <a:latin typeface="Calibri" pitchFamily="34" charset="0"/>
+                <a:ea typeface="Calibri" pitchFamily="34" charset="-122"/>
+                <a:cs typeface="Calibri" pitchFamily="34" charset="-120"/>
+              </a:rPr>
+              <a:t>Modèle : Tapis roulant d'usine</a:t>
+            </a:r>
+            <a:endParaRPr lang="en-US" sz="1000" dirty="0"/>
+          </a:p>
+          <a:p>
+            <a:pPr indent="0" marL="0">
+              <a:buNone/>
+            </a:pPr>
+            <a:r>
+              <a:rPr lang="en-US" sz="1000" i="1" dirty="0">
+                <a:solidFill>
+                  <a:srgbClr val="64748B"/>
+                </a:solidFill>
+                <a:latin typeface="Calibri" pitchFamily="34" charset="0"/>
+                <a:ea typeface="Calibri" pitchFamily="34" charset="-122"/>
+                <a:cs typeface="Calibri" pitchFamily="34" charset="-120"/>
+              </a:rPr>
+              <a:t>Chaque poste travaille à son rythme. La boîte avance sans que le poste précédent n'attende.</a:t>
+            </a:r>
+            <a:endParaRPr lang="en-US" sz="1000" dirty="0"/>
+          </a:p>
+        </p:txBody>
+      </p:sp>
+    </p:spTree>
+  </p:cSld>
+  <p:clrMapOvr>
+    <a:masterClrMapping/>
+  </p:clrMapOvr>
+</p:sld>
+</file>
+
+<file path=ppt/slides/slide17.xml><?xml version="1.0" encoding="utf-8"?>
+<p:sld xmlns:a="http://schemas.openxmlformats.org/drawingml/2006/main" xmlns:r="http://schemas.openxmlformats.org/officeDocument/2006/relationships" xmlns:p="http://schemas.openxmlformats.org/presentationml/2006/main">
+  <p:cSld name="Slide 17">
+    <p:bg>
+      <p:bgPr>
+        <a:solidFill>
+          <a:srgbClr val="F0F4F8"/>
+        </a:solidFill>
+      </p:bgPr>
+    </p:bg>
+    <p:spTree>
+      <p:nvGrpSpPr>
+        <p:cNvPr id="1" name=""/>
+        <p:cNvGrpSpPr/>
+        <p:nvPr/>
+      </p:nvGrpSpPr>
+      <p:grpSpPr>
+        <a:xfrm>
+          <a:off x="0" y="0"/>
+          <a:ext cx="0" cy="0"/>
+          <a:chOff x="0" y="0"/>
+          <a:chExt cx="0" cy="0"/>
+        </a:xfrm>
+      </p:grpSpPr>
+      <p:sp>
+        <p:nvSpPr>
+          <p:cNvPr id="2" name="Shape 0"/>
+          <p:cNvSpPr/>
+          <p:nvPr/>
+        </p:nvSpPr>
+        <p:spPr>
+          <a:xfrm>
+            <a:off x="0" y="0"/>
+            <a:ext cx="9144000" cy="685800"/>
+          </a:xfrm>
+          <a:prstGeom prst="rect">
+            <a:avLst/>
+          </a:prstGeom>
+          <a:solidFill>
+            <a:srgbClr val="021B3A"/>
+          </a:solidFill>
+          <a:ln/>
+        </p:spPr>
+      </p:sp>
+      <p:sp>
+        <p:nvSpPr>
+          <p:cNvPr id="3" name="Shape 1"/>
+          <p:cNvSpPr/>
+          <p:nvPr/>
+        </p:nvSpPr>
+        <p:spPr>
+          <a:xfrm>
+            <a:off x="0" y="0"/>
+            <a:ext cx="164592" cy="685800"/>
+          </a:xfrm>
+          <a:prstGeom prst="rect">
+            <a:avLst/>
+          </a:prstGeom>
+          <a:solidFill>
+            <a:srgbClr val="028090"/>
+          </a:solidFill>
+          <a:ln/>
+        </p:spPr>
+      </p:sp>
+      <p:sp>
+        <p:nvSpPr>
+          <p:cNvPr id="4" name="Text 2"/>
+          <p:cNvSpPr/>
+          <p:nvPr/>
+        </p:nvSpPr>
+        <p:spPr>
+          <a:xfrm>
+            <a:off x="365760" y="73152"/>
+            <a:ext cx="8595360" cy="548640"/>
+          </a:xfrm>
+          <a:prstGeom prst="rect">
+            <a:avLst/>
+          </a:prstGeom>
+          <a:noFill/>
+          <a:ln/>
+        </p:spPr>
+        <p:txBody>
+          <a:bodyPr wrap="square" lIns="0" tIns="0" rIns="0" bIns="0" rtlCol="0" anchor="ctr"/>
+          <a:lstStyle/>
+          <a:p>
+            <a:pPr indent="0" marL="0">
+              <a:buNone/>
+            </a:pPr>
+            <a:r>
+              <a:rPr lang="en-US" sz="2200" b="1" dirty="0">
+                <a:solidFill>
+                  <a:srgbClr val="FFFFFF"/>
+                </a:solidFill>
+                <a:latin typeface="Calibri" pitchFamily="34" charset="0"/>
+                <a:ea typeface="Calibri" pitchFamily="34" charset="-122"/>
+                <a:cs typeface="Calibri" pitchFamily="34" charset="-120"/>
+              </a:rPr>
+              <a:t>Pourquoi ListenHTTP ne résout pas le problème</a:t>
+            </a:r>
+            <a:endParaRPr lang="en-US" sz="2200" dirty="0"/>
+          </a:p>
+        </p:txBody>
+      </p:sp>
+      <p:sp>
+        <p:nvSpPr>
+          <p:cNvPr id="5" name="Shape 3"/>
+          <p:cNvSpPr/>
+          <p:nvPr/>
+        </p:nvSpPr>
+        <p:spPr>
+          <a:xfrm>
+            <a:off x="274320" y="804672"/>
+            <a:ext cx="8595360" cy="2240280"/>
+          </a:xfrm>
+          <a:prstGeom prst="rect">
+            <a:avLst/>
+          </a:prstGeom>
+          <a:solidFill>
+            <a:srgbClr val="FFFFFF"/>
+          </a:solidFill>
+          <a:ln/>
+          <a:effectLst>
+            <a:outerShdw sx="100000" sy="100000" kx="0" ky="0" algn="bl" rotWithShape="0" blurRad="101600" dist="38100" dir="8100000">
+              <a:srgbClr val="000000">
+                <a:alpha val="12000"/>
+              </a:srgbClr>
+            </a:outerShdw>
+          </a:effectLst>
+        </p:spPr>
+      </p:sp>
+      <p:sp>
+        <p:nvSpPr>
+          <p:cNvPr id="6" name="Shape 4"/>
+          <p:cNvSpPr/>
+          <p:nvPr/>
+        </p:nvSpPr>
+        <p:spPr>
+          <a:xfrm>
+            <a:off x="274320" y="804672"/>
+            <a:ext cx="8595360" cy="320040"/>
+          </a:xfrm>
+          <a:prstGeom prst="rect">
+            <a:avLst/>
+          </a:prstGeom>
+          <a:solidFill>
+            <a:srgbClr val="E53E3E"/>
+          </a:solidFill>
+          <a:ln/>
+        </p:spPr>
+      </p:sp>
+      <p:sp>
+        <p:nvSpPr>
+          <p:cNvPr id="7" name="Text 5"/>
+          <p:cNvSpPr/>
+          <p:nvPr/>
+        </p:nvSpPr>
+        <p:spPr>
+          <a:xfrm>
+            <a:off x="320040" y="804672"/>
+            <a:ext cx="8503920" cy="320040"/>
+          </a:xfrm>
+          <a:prstGeom prst="rect">
+            <a:avLst/>
+          </a:prstGeom>
+          <a:noFill/>
+          <a:ln/>
+        </p:spPr>
+        <p:txBody>
+          <a:bodyPr wrap="square" lIns="0" tIns="0" rIns="0" bIns="0" rtlCol="0" anchor="ctr"/>
+          <a:lstStyle/>
+          <a:p>
+            <a:pPr indent="0" marL="0">
+              <a:buNone/>
+            </a:pPr>
+            <a:r>
+              <a:rPr lang="en-US" sz="1200" b="1" dirty="0">
+                <a:solidFill>
+                  <a:srgbClr val="FFFFFF"/>
+                </a:solidFill>
+                <a:latin typeface="Calibri" pitchFamily="34" charset="0"/>
+                <a:ea typeface="Calibri" pitchFamily="34" charset="-122"/>
+                <a:cs typeface="Calibri" pitchFamily="34" charset="-120"/>
+              </a:rPr>
+              <a:t>❌  Ce qui se passe réellement avec ListenHTTP</a:t>
+            </a:r>
+            <a:endParaRPr lang="en-US" sz="1200" dirty="0"/>
+          </a:p>
+        </p:txBody>
+      </p:sp>
+      <p:sp>
+        <p:nvSpPr>
+          <p:cNvPr id="8" name="Shape 6"/>
+          <p:cNvSpPr/>
+          <p:nvPr/>
+        </p:nvSpPr>
+        <p:spPr>
+          <a:xfrm>
+            <a:off x="411480" y="1234440"/>
+            <a:ext cx="1554480" cy="658368"/>
+          </a:xfrm>
+          <a:prstGeom prst="rect">
+            <a:avLst/>
+          </a:prstGeom>
+          <a:solidFill>
+            <a:srgbClr val="065A82"/>
+          </a:solidFill>
+          <a:ln/>
+          <a:effectLst>
+            <a:outerShdw sx="100000" sy="100000" kx="0" ky="0" algn="bl" rotWithShape="0" blurRad="101600" dist="38100" dir="8100000">
+              <a:srgbClr val="000000">
+                <a:alpha val="12000"/>
+              </a:srgbClr>
+            </a:outerShdw>
+          </a:effectLst>
+        </p:spPr>
+      </p:sp>
+      <p:sp>
+        <p:nvSpPr>
+          <p:cNvPr id="9" name="Text 7"/>
+          <p:cNvSpPr/>
+          <p:nvPr/>
+        </p:nvSpPr>
+        <p:spPr>
+          <a:xfrm>
+            <a:off x="411480" y="1234440"/>
+            <a:ext cx="1554480" cy="658368"/>
+          </a:xfrm>
+          <a:prstGeom prst="rect">
+            <a:avLst/>
+          </a:prstGeom>
+          <a:noFill/>
+          <a:ln/>
+        </p:spPr>
+        <p:txBody>
+          <a:bodyPr wrap="square" lIns="0" tIns="0" rIns="0" bIns="0" rtlCol="0" anchor="ctr"/>
+          <a:lstStyle/>
+          <a:p>
+            <a:pPr algn="ctr" indent="0" marL="0">
+              <a:buNone/>
+            </a:pPr>
+            <a:r>
+              <a:rPr lang="en-US" sz="1000" b="1" dirty="0">
+                <a:solidFill>
+                  <a:srgbClr val="FFFFFF"/>
+                </a:solidFill>
+                <a:latin typeface="Calibri" pitchFamily="34" charset="0"/>
+                <a:ea typeface="Calibri" pitchFamily="34" charset="-122"/>
+                <a:cs typeface="Calibri" pitchFamily="34" charset="-120"/>
+              </a:rPr>
+              <a:t>Client HTTP</a:t>
+            </a:r>
+            <a:endParaRPr lang="en-US" sz="1000" dirty="0"/>
+          </a:p>
+          <a:p>
+            <a:pPr algn="ctr" indent="0" marL="0">
+              <a:buNone/>
+            </a:pPr>
+            <a:r>
+              <a:rPr lang="en-US" sz="1000" b="1" dirty="0">
+                <a:solidFill>
+                  <a:srgbClr val="FFFFFF"/>
+                </a:solidFill>
+                <a:latin typeface="Calibri" pitchFamily="34" charset="0"/>
+                <a:ea typeface="Calibri" pitchFamily="34" charset="-122"/>
+                <a:cs typeface="Calibri" pitchFamily="34" charset="-120"/>
+              </a:rPr>
+              <a:t>envoie requête</a:t>
+            </a:r>
+            <a:endParaRPr lang="en-US" sz="1000" dirty="0"/>
+          </a:p>
+        </p:txBody>
+      </p:sp>
+      <p:sp>
+        <p:nvSpPr>
+          <p:cNvPr id="10" name="Shape 8"/>
+          <p:cNvSpPr/>
+          <p:nvPr/>
+        </p:nvSpPr>
+        <p:spPr>
+          <a:xfrm>
+            <a:off x="1965960" y="1563624"/>
+            <a:ext cx="182880" cy="0"/>
+          </a:xfrm>
+          <a:prstGeom prst="line">
+            <a:avLst/>
+          </a:prstGeom>
+          <a:noFill/>
+          <a:ln w="25400">
+            <a:solidFill>
+              <a:srgbClr val="64748B"/>
+            </a:solidFill>
+            <a:prstDash val="solid"/>
+          </a:ln>
+        </p:spPr>
+      </p:sp>
+      <p:sp>
+        <p:nvSpPr>
+          <p:cNvPr id="11" name="Shape 9"/>
+          <p:cNvSpPr/>
+          <p:nvPr/>
+        </p:nvSpPr>
+        <p:spPr>
+          <a:xfrm>
+            <a:off x="2331720" y="1234440"/>
+            <a:ext cx="1828800" cy="658368"/>
+          </a:xfrm>
+          <a:prstGeom prst="rect">
+            <a:avLst/>
+          </a:prstGeom>
+          <a:solidFill>
+            <a:srgbClr val="DD6B20"/>
+          </a:solidFill>
+          <a:ln/>
+          <a:effectLst>
+            <a:outerShdw sx="100000" sy="100000" kx="0" ky="0" algn="bl" rotWithShape="0" blurRad="101600" dist="38100" dir="8100000">
+              <a:srgbClr val="000000">
+                <a:alpha val="12000"/>
+              </a:srgbClr>
+            </a:outerShdw>
+          </a:effectLst>
+        </p:spPr>
+      </p:sp>
+      <p:sp>
+        <p:nvSpPr>
+          <p:cNvPr id="12" name="Text 10"/>
+          <p:cNvSpPr/>
+          <p:nvPr/>
+        </p:nvSpPr>
+        <p:spPr>
+          <a:xfrm>
+            <a:off x="2331720" y="1234440"/>
+            <a:ext cx="1828800" cy="658368"/>
+          </a:xfrm>
+          <a:prstGeom prst="rect">
+            <a:avLst/>
+          </a:prstGeom>
+          <a:noFill/>
+          <a:ln/>
+        </p:spPr>
+        <p:txBody>
+          <a:bodyPr wrap="square" lIns="0" tIns="0" rIns="0" bIns="0" rtlCol="0" anchor="ctr"/>
+          <a:lstStyle/>
+          <a:p>
+            <a:pPr algn="ctr" indent="0" marL="0">
+              <a:buNone/>
+            </a:pPr>
+            <a:r>
+              <a:rPr lang="en-US" sz="1000" b="1" dirty="0">
+                <a:solidFill>
+                  <a:srgbClr val="FFFFFF"/>
+                </a:solidFill>
+                <a:latin typeface="Calibri" pitchFamily="34" charset="0"/>
+                <a:ea typeface="Calibri" pitchFamily="34" charset="-122"/>
+                <a:cs typeface="Calibri" pitchFamily="34" charset="-120"/>
+              </a:rPr>
+              <a:t>ListenHTTP</a:t>
+            </a:r>
+            <a:endParaRPr lang="en-US" sz="1000" dirty="0"/>
+          </a:p>
+          <a:p>
+            <a:pPr algn="ctr" indent="0" marL="0">
+              <a:buNone/>
+            </a:pPr>
+            <a:r>
+              <a:rPr lang="en-US" sz="1000" b="1" dirty="0">
+                <a:solidFill>
+                  <a:srgbClr val="FFFFFF"/>
+                </a:solidFill>
+                <a:latin typeface="Calibri" pitchFamily="34" charset="0"/>
+                <a:ea typeface="Calibri" pitchFamily="34" charset="-122"/>
+                <a:cs typeface="Calibri" pitchFamily="34" charset="-120"/>
+              </a:rPr>
+              <a:t>répond HTTP 200</a:t>
+            </a:r>
+            <a:endParaRPr lang="en-US" sz="1000" dirty="0"/>
+          </a:p>
+        </p:txBody>
+      </p:sp>
+      <p:sp>
+        <p:nvSpPr>
+          <p:cNvPr id="13" name="Shape 11"/>
+          <p:cNvSpPr/>
+          <p:nvPr/>
+        </p:nvSpPr>
+        <p:spPr>
+          <a:xfrm>
+            <a:off x="4160520" y="1563624"/>
+            <a:ext cx="182880" cy="0"/>
+          </a:xfrm>
+          <a:prstGeom prst="line">
+            <a:avLst/>
+          </a:prstGeom>
+          <a:noFill/>
+          <a:ln w="25400">
+            <a:solidFill>
+              <a:srgbClr val="64748B"/>
+            </a:solidFill>
+            <a:prstDash val="solid"/>
+          </a:ln>
+        </p:spPr>
+      </p:sp>
+      <p:sp>
+        <p:nvSpPr>
+          <p:cNvPr id="14" name="Shape 12"/>
+          <p:cNvSpPr/>
+          <p:nvPr/>
+        </p:nvSpPr>
+        <p:spPr>
+          <a:xfrm>
+            <a:off x="4526280" y="1234440"/>
+            <a:ext cx="1645920" cy="658368"/>
+          </a:xfrm>
+          <a:prstGeom prst="rect">
+            <a:avLst/>
+          </a:prstGeom>
+          <a:solidFill>
+            <a:srgbClr val="028090"/>
+          </a:solidFill>
+          <a:ln/>
+          <a:effectLst>
+            <a:outerShdw sx="100000" sy="100000" kx="0" ky="0" algn="bl" rotWithShape="0" blurRad="101600" dist="38100" dir="8100000">
+              <a:srgbClr val="000000">
+                <a:alpha val="12000"/>
+              </a:srgbClr>
+            </a:outerShdw>
+          </a:effectLst>
+        </p:spPr>
+      </p:sp>
+      <p:sp>
+        <p:nvSpPr>
+          <p:cNvPr id="15" name="Text 13"/>
+          <p:cNvSpPr/>
+          <p:nvPr/>
+        </p:nvSpPr>
+        <p:spPr>
+          <a:xfrm>
+            <a:off x="4526280" y="1234440"/>
+            <a:ext cx="1645920" cy="658368"/>
+          </a:xfrm>
+          <a:prstGeom prst="rect">
+            <a:avLst/>
+          </a:prstGeom>
+          <a:noFill/>
+          <a:ln/>
+        </p:spPr>
+        <p:txBody>
+          <a:bodyPr wrap="square" lIns="0" tIns="0" rIns="0" bIns="0" rtlCol="0" anchor="ctr"/>
+          <a:lstStyle/>
+          <a:p>
+            <a:pPr algn="ctr" indent="0" marL="0">
+              <a:buNone/>
+            </a:pPr>
+            <a:r>
+              <a:rPr lang="en-US" sz="1000" b="1" dirty="0">
+                <a:solidFill>
+                  <a:srgbClr val="FFFFFF"/>
+                </a:solidFill>
+                <a:latin typeface="Calibri" pitchFamily="34" charset="0"/>
+                <a:ea typeface="Calibri" pitchFamily="34" charset="-122"/>
+                <a:cs typeface="Calibri" pitchFamily="34" charset="-120"/>
+              </a:rPr>
+              <a:t>FlowFile créé</a:t>
+            </a:r>
+            <a:endParaRPr lang="en-US" sz="1000" dirty="0"/>
+          </a:p>
+          <a:p>
+            <a:pPr algn="ctr" indent="0" marL="0">
+              <a:buNone/>
+            </a:pPr>
+            <a:r>
+              <a:rPr lang="en-US" sz="1000" b="1" dirty="0">
+                <a:solidFill>
+                  <a:srgbClr val="FFFFFF"/>
+                </a:solidFill>
+                <a:latin typeface="Calibri" pitchFamily="34" charset="0"/>
+                <a:ea typeface="Calibri" pitchFamily="34" charset="-122"/>
+                <a:cs typeface="Calibri" pitchFamily="34" charset="-120"/>
+              </a:rPr>
+              <a:t>dans la file</a:t>
+            </a:r>
+            <a:endParaRPr lang="en-US" sz="1000" dirty="0"/>
+          </a:p>
+        </p:txBody>
+      </p:sp>
+      <p:sp>
+        <p:nvSpPr>
+          <p:cNvPr id="16" name="Shape 14"/>
+          <p:cNvSpPr/>
+          <p:nvPr/>
+        </p:nvSpPr>
+        <p:spPr>
+          <a:xfrm>
+            <a:off x="6172200" y="1563624"/>
+            <a:ext cx="182880" cy="0"/>
+          </a:xfrm>
+          <a:prstGeom prst="line">
+            <a:avLst/>
+          </a:prstGeom>
+          <a:noFill/>
+          <a:ln w="25400">
+            <a:solidFill>
+              <a:srgbClr val="64748B"/>
+            </a:solidFill>
+            <a:prstDash val="solid"/>
+          </a:ln>
+        </p:spPr>
+      </p:sp>
+      <p:sp>
+        <p:nvSpPr>
+          <p:cNvPr id="17" name="Shape 15"/>
+          <p:cNvSpPr/>
+          <p:nvPr/>
+        </p:nvSpPr>
+        <p:spPr>
+          <a:xfrm>
+            <a:off x="6537960" y="1234440"/>
+            <a:ext cx="1645920" cy="658368"/>
+          </a:xfrm>
+          <a:prstGeom prst="rect">
+            <a:avLst/>
+          </a:prstGeom>
+          <a:solidFill>
+            <a:srgbClr val="64748B"/>
+          </a:solidFill>
+          <a:ln/>
+          <a:effectLst>
+            <a:outerShdw sx="100000" sy="100000" kx="0" ky="0" algn="bl" rotWithShape="0" blurRad="101600" dist="38100" dir="8100000">
+              <a:srgbClr val="000000">
+                <a:alpha val="12000"/>
+              </a:srgbClr>
+            </a:outerShdw>
+          </a:effectLst>
+        </p:spPr>
+      </p:sp>
+      <p:sp>
+        <p:nvSpPr>
+          <p:cNvPr id="18" name="Text 16"/>
+          <p:cNvSpPr/>
+          <p:nvPr/>
+        </p:nvSpPr>
+        <p:spPr>
+          <a:xfrm>
+            <a:off x="6537960" y="1234440"/>
+            <a:ext cx="1645920" cy="658368"/>
+          </a:xfrm>
+          <a:prstGeom prst="rect">
+            <a:avLst/>
+          </a:prstGeom>
+          <a:noFill/>
+          <a:ln/>
+        </p:spPr>
+        <p:txBody>
+          <a:bodyPr wrap="square" lIns="0" tIns="0" rIns="0" bIns="0" rtlCol="0" anchor="ctr"/>
+          <a:lstStyle/>
+          <a:p>
+            <a:pPr algn="ctr" indent="0" marL="0">
+              <a:buNone/>
+            </a:pPr>
+            <a:r>
+              <a:rPr lang="en-US" sz="1000" b="1" dirty="0">
+                <a:solidFill>
+                  <a:srgbClr val="FFFFFF"/>
+                </a:solidFill>
+                <a:latin typeface="Calibri" pitchFamily="34" charset="0"/>
+                <a:ea typeface="Calibri" pitchFamily="34" charset="-122"/>
+                <a:cs typeface="Calibri" pitchFamily="34" charset="-120"/>
+              </a:rPr>
+              <a:t>Traitement</a:t>
+            </a:r>
+            <a:endParaRPr lang="en-US" sz="1000" dirty="0"/>
+          </a:p>
+          <a:p>
+            <a:pPr algn="ctr" indent="0" marL="0">
+              <a:buNone/>
+            </a:pPr>
+            <a:r>
+              <a:rPr lang="en-US" sz="1000" b="1" dirty="0">
+                <a:solidFill>
+                  <a:srgbClr val="FFFFFF"/>
+                </a:solidFill>
+                <a:latin typeface="Calibri" pitchFamily="34" charset="0"/>
+                <a:ea typeface="Calibri" pitchFamily="34" charset="-122"/>
+                <a:cs typeface="Calibri" pitchFamily="34" charset="-120"/>
+              </a:rPr>
+              <a:t>asynchrone...</a:t>
+            </a:r>
+            <a:endParaRPr lang="en-US" sz="1000" dirty="0"/>
+          </a:p>
+        </p:txBody>
+      </p:sp>
+      <p:sp>
+        <p:nvSpPr>
+          <p:cNvPr id="19" name="Shape 17"/>
+          <p:cNvSpPr/>
+          <p:nvPr/>
+        </p:nvSpPr>
+        <p:spPr>
+          <a:xfrm>
+            <a:off x="411480" y="1993392"/>
+            <a:ext cx="8321040" cy="411480"/>
+          </a:xfrm>
+          <a:prstGeom prst="rect">
+            <a:avLst/>
+          </a:prstGeom>
+          <a:solidFill>
+            <a:srgbClr val="FFF5F5"/>
+          </a:solidFill>
+          <a:ln/>
+          <a:effectLst>
+            <a:outerShdw sx="100000" sy="100000" kx="0" ky="0" algn="bl" rotWithShape="0" blurRad="101600" dist="38100" dir="8100000">
+              <a:srgbClr val="000000">
+                <a:alpha val="12000"/>
+              </a:srgbClr>
+            </a:outerShdw>
+          </a:effectLst>
+        </p:spPr>
+      </p:sp>
+      <p:sp>
+        <p:nvSpPr>
+          <p:cNvPr id="20" name="Shape 18"/>
+          <p:cNvSpPr/>
+          <p:nvPr/>
+        </p:nvSpPr>
+        <p:spPr>
+          <a:xfrm>
+            <a:off x="411480" y="1993392"/>
+            <a:ext cx="64008" cy="411480"/>
+          </a:xfrm>
+          <a:prstGeom prst="rect">
+            <a:avLst/>
+          </a:prstGeom>
+          <a:solidFill>
+            <a:srgbClr val="E53E3E"/>
+          </a:solidFill>
+          <a:ln/>
+        </p:spPr>
+      </p:sp>
+      <p:sp>
+        <p:nvSpPr>
+          <p:cNvPr id="21" name="Text 19"/>
+          <p:cNvSpPr/>
+          <p:nvPr/>
+        </p:nvSpPr>
+        <p:spPr>
+          <a:xfrm>
+            <a:off x="548640" y="2020824"/>
+            <a:ext cx="8046720" cy="365760"/>
+          </a:xfrm>
+          <a:prstGeom prst="rect">
+            <a:avLst/>
+          </a:prstGeom>
+          <a:noFill/>
+          <a:ln/>
+        </p:spPr>
+        <p:txBody>
+          <a:bodyPr wrap="square" lIns="0" tIns="0" rIns="0" bIns="0" rtlCol="0" anchor="ctr"/>
+          <a:lstStyle/>
+          <a:p>
+            <a:pPr indent="0" marL="0">
+              <a:buNone/>
+            </a:pPr>
+            <a:r>
+              <a:rPr lang="en-US" sz="1100" b="1" dirty="0">
+                <a:solidFill>
+                  <a:srgbClr val="E53E3E"/>
+                </a:solidFill>
+                <a:latin typeface="Calibri" pitchFamily="34" charset="0"/>
+                <a:ea typeface="Calibri" pitchFamily="34" charset="-122"/>
+                <a:cs typeface="Calibri" pitchFamily="34" charset="-120"/>
+              </a:rPr>
+              <a:t>HTTP 200 = "j'ai bien REÇU ta donnée" — pas "j'ai TRAITÉ avec succès". Le client ne saura jamais si le traitement a réussi ou échoué.</a:t>
+            </a:r>
+            <a:endParaRPr lang="en-US" sz="1100" dirty="0"/>
+          </a:p>
+        </p:txBody>
+      </p:sp>
+      <p:sp>
+        <p:nvSpPr>
+          <p:cNvPr id="22" name="Shape 20"/>
+          <p:cNvSpPr/>
+          <p:nvPr/>
+        </p:nvSpPr>
+        <p:spPr>
+          <a:xfrm>
+            <a:off x="411480" y="2468880"/>
+            <a:ext cx="8321040" cy="384048"/>
+          </a:xfrm>
+          <a:prstGeom prst="rect">
+            <a:avLst/>
+          </a:prstGeom>
+          <a:solidFill>
+            <a:srgbClr val="F0F4F8"/>
+          </a:solidFill>
+          <a:ln/>
+        </p:spPr>
+      </p:sp>
+      <p:sp>
+        <p:nvSpPr>
+          <p:cNvPr id="23" name="Text 21"/>
+          <p:cNvSpPr/>
+          <p:nvPr/>
+        </p:nvSpPr>
+        <p:spPr>
+          <a:xfrm>
+            <a:off x="502920" y="2487168"/>
+            <a:ext cx="8138160" cy="347472"/>
+          </a:xfrm>
+          <a:prstGeom prst="rect">
+            <a:avLst/>
+          </a:prstGeom>
+          <a:noFill/>
+          <a:ln/>
+        </p:spPr>
+        <p:txBody>
+          <a:bodyPr wrap="square" lIns="0" tIns="0" rIns="0" bIns="0" rtlCol="0" anchor="ctr"/>
+          <a:lstStyle/>
+          <a:p>
+            <a:pPr indent="0" marL="0">
+              <a:buNone/>
+            </a:pPr>
+            <a:r>
+              <a:rPr lang="en-US" sz="900" i="1" dirty="0">
+                <a:solidFill>
+                  <a:srgbClr val="64748B"/>
+                </a:solidFill>
+                <a:latin typeface="Calibri" pitchFamily="34" charset="0"/>
+                <a:ea typeface="Calibri" pitchFamily="34" charset="-122"/>
+                <a:cs typeface="Calibri" pitchFamily="34" charset="-120"/>
+              </a:rPr>
+              <a:t>Pour simuler une vraie réponse synchrone : HandleHttpRequest / HandleHttpResponse + identifiant de corrélation → extrêmement complexe, fragile, et contraire à la philosophie NiFi.</a:t>
+            </a:r>
+            <a:endParaRPr lang="en-US" sz="900" dirty="0"/>
+          </a:p>
+        </p:txBody>
+      </p:sp>
+      <p:sp>
+        <p:nvSpPr>
+          <p:cNvPr id="24" name="Shape 22"/>
+          <p:cNvSpPr/>
+          <p:nvPr/>
+        </p:nvSpPr>
+        <p:spPr>
+          <a:xfrm>
+            <a:off x="274320" y="3127248"/>
+            <a:ext cx="8595360" cy="1810512"/>
+          </a:xfrm>
+          <a:prstGeom prst="rect">
+            <a:avLst/>
+          </a:prstGeom>
+          <a:solidFill>
+            <a:srgbClr val="FFFFFF"/>
+          </a:solidFill>
+          <a:ln/>
+          <a:effectLst>
+            <a:outerShdw sx="100000" sy="100000" kx="0" ky="0" algn="bl" rotWithShape="0" blurRad="101600" dist="38100" dir="8100000">
+              <a:srgbClr val="000000">
+                <a:alpha val="12000"/>
+              </a:srgbClr>
+            </a:outerShdw>
+          </a:effectLst>
+        </p:spPr>
+      </p:sp>
+      <p:sp>
+        <p:nvSpPr>
+          <p:cNvPr id="25" name="Shape 23"/>
+          <p:cNvSpPr/>
+          <p:nvPr/>
+        </p:nvSpPr>
+        <p:spPr>
+          <a:xfrm>
+            <a:off x="274320" y="3127248"/>
+            <a:ext cx="8595360" cy="320040"/>
+          </a:xfrm>
+          <a:prstGeom prst="rect">
+            <a:avLst/>
+          </a:prstGeom>
+          <a:solidFill>
+            <a:srgbClr val="021B3A"/>
+          </a:solidFill>
+          <a:ln/>
+        </p:spPr>
+      </p:sp>
+      <p:sp>
+        <p:nvSpPr>
+          <p:cNvPr id="26" name="Text 24"/>
+          <p:cNvSpPr/>
+          <p:nvPr/>
+        </p:nvSpPr>
+        <p:spPr>
+          <a:xfrm>
+            <a:off x="320040" y="3127248"/>
+            <a:ext cx="8503920" cy="320040"/>
+          </a:xfrm>
+          <a:prstGeom prst="rect">
+            <a:avLst/>
+          </a:prstGeom>
+          <a:noFill/>
+          <a:ln/>
+        </p:spPr>
+        <p:txBody>
+          <a:bodyPr wrap="square" lIns="0" tIns="0" rIns="0" bIns="0" rtlCol="0" anchor="ctr"/>
+          <a:lstStyle/>
+          <a:p>
+            <a:pPr indent="0" marL="0">
+              <a:buNone/>
+            </a:pPr>
+            <a:r>
+              <a:rPr lang="en-US" sz="1200" b="1" dirty="0">
+                <a:solidFill>
+                  <a:srgbClr val="FFFFFF"/>
+                </a:solidFill>
+                <a:latin typeface="Calibri" pitchFamily="34" charset="0"/>
+                <a:ea typeface="Calibri" pitchFamily="34" charset="-122"/>
+                <a:cs typeface="Calibri" pitchFamily="34" charset="-120"/>
+              </a:rPr>
+              <a:t>Tableau Comparatif Final</a:t>
+            </a:r>
+            <a:endParaRPr lang="en-US" sz="1200" dirty="0"/>
+          </a:p>
+        </p:txBody>
+      </p:sp>
+      <p:sp>
+        <p:nvSpPr>
+          <p:cNvPr id="27" name="Shape 25"/>
+          <p:cNvSpPr/>
+          <p:nvPr/>
+        </p:nvSpPr>
+        <p:spPr>
+          <a:xfrm>
+            <a:off x="274320" y="3447288"/>
+            <a:ext cx="2926080" cy="292608"/>
+          </a:xfrm>
+          <a:prstGeom prst="rect">
+            <a:avLst/>
+          </a:prstGeom>
+          <a:solidFill>
+            <a:srgbClr val="F0F4F8"/>
+          </a:solidFill>
+          <a:ln/>
+        </p:spPr>
+      </p:sp>
+      <p:sp>
+        <p:nvSpPr>
+          <p:cNvPr id="28" name="Shape 26"/>
+          <p:cNvSpPr/>
+          <p:nvPr/>
+        </p:nvSpPr>
+        <p:spPr>
+          <a:xfrm>
+            <a:off x="3200400" y="3447288"/>
+            <a:ext cx="2651760" cy="292608"/>
+          </a:xfrm>
+          <a:prstGeom prst="rect">
+            <a:avLst/>
+          </a:prstGeom>
+          <a:solidFill>
+            <a:srgbClr val="E53E3E">
+              <a:alpha val="20000"/>
+            </a:srgbClr>
+          </a:solidFill>
+          <a:ln/>
+        </p:spPr>
+      </p:sp>
+      <p:sp>
+        <p:nvSpPr>
+          <p:cNvPr id="29" name="Shape 27"/>
+          <p:cNvSpPr/>
+          <p:nvPr/>
+        </p:nvSpPr>
+        <p:spPr>
+          <a:xfrm>
+            <a:off x="5852160" y="3447288"/>
+            <a:ext cx="2971800" cy="292608"/>
+          </a:xfrm>
+          <a:prstGeom prst="rect">
+            <a:avLst/>
+          </a:prstGeom>
+          <a:solidFill>
+            <a:srgbClr val="38A169">
+              <a:alpha val="20000"/>
+            </a:srgbClr>
+          </a:solidFill>
+          <a:ln/>
+        </p:spPr>
+      </p:sp>
+      <p:sp>
+        <p:nvSpPr>
+          <p:cNvPr id="30" name="Text 28"/>
+          <p:cNvSpPr/>
+          <p:nvPr/>
+        </p:nvSpPr>
+        <p:spPr>
+          <a:xfrm>
+            <a:off x="320040" y="3447288"/>
+            <a:ext cx="2834640" cy="292608"/>
+          </a:xfrm>
+          <a:prstGeom prst="rect">
+            <a:avLst/>
+          </a:prstGeom>
+          <a:noFill/>
+          <a:ln/>
+        </p:spPr>
+        <p:txBody>
+          <a:bodyPr wrap="square" lIns="0" tIns="0" rIns="0" bIns="0" rtlCol="0" anchor="ctr"/>
+          <a:lstStyle/>
+          <a:p>
+            <a:pPr indent="0" marL="0">
+              <a:buNone/>
+            </a:pPr>
+            <a:r>
+              <a:rPr lang="en-US" sz="1000" b="1" dirty="0">
+                <a:solidFill>
+                  <a:srgbClr val="021B3A"/>
+                </a:solidFill>
+                <a:latin typeface="Calibri" pitchFamily="34" charset="0"/>
+                <a:ea typeface="Calibri" pitchFamily="34" charset="-122"/>
+                <a:cs typeface="Calibri" pitchFamily="34" charset="-120"/>
+              </a:rPr>
+              <a:t>Critère</a:t>
+            </a:r>
+            <a:endParaRPr lang="en-US" sz="1000" dirty="0"/>
+          </a:p>
+        </p:txBody>
+      </p:sp>
+      <p:sp>
+        <p:nvSpPr>
+          <p:cNvPr id="31" name="Text 29"/>
+          <p:cNvSpPr/>
+          <p:nvPr/>
+        </p:nvSpPr>
+        <p:spPr>
+          <a:xfrm>
+            <a:off x="3218688" y="3447288"/>
+            <a:ext cx="2615184" cy="292608"/>
+          </a:xfrm>
+          <a:prstGeom prst="rect">
+            <a:avLst/>
+          </a:prstGeom>
+          <a:noFill/>
+          <a:ln/>
+        </p:spPr>
+        <p:txBody>
+          <a:bodyPr wrap="square" lIns="0" tIns="0" rIns="0" bIns="0" rtlCol="0" anchor="ctr"/>
+          <a:lstStyle/>
+          <a:p>
+            <a:pPr algn="ctr" indent="0" marL="0">
+              <a:buNone/>
+            </a:pPr>
+            <a:r>
+              <a:rPr lang="en-US" sz="1000" b="1" dirty="0">
+                <a:solidFill>
+                  <a:srgbClr val="E53E3E"/>
+                </a:solidFill>
+                <a:latin typeface="Calibri" pitchFamily="34" charset="0"/>
+                <a:ea typeface="Calibri" pitchFamily="34" charset="-122"/>
+                <a:cs typeface="Calibri" pitchFamily="34" charset="-120"/>
+              </a:rPr>
+              <a:t>Synchrone (API REST)</a:t>
+            </a:r>
+            <a:endParaRPr lang="en-US" sz="1000" dirty="0"/>
+          </a:p>
+        </p:txBody>
+      </p:sp>
+      <p:sp>
+        <p:nvSpPr>
+          <p:cNvPr id="32" name="Text 30"/>
+          <p:cNvSpPr/>
+          <p:nvPr/>
+        </p:nvSpPr>
+        <p:spPr>
+          <a:xfrm>
+            <a:off x="5870448" y="3447288"/>
+            <a:ext cx="2935224" cy="292608"/>
+          </a:xfrm>
+          <a:prstGeom prst="rect">
+            <a:avLst/>
+          </a:prstGeom>
+          <a:noFill/>
+          <a:ln/>
+        </p:spPr>
+        <p:txBody>
+          <a:bodyPr wrap="square" lIns="0" tIns="0" rIns="0" bIns="0" rtlCol="0" anchor="ctr"/>
+          <a:lstStyle/>
+          <a:p>
+            <a:pPr algn="ctr" indent="0" marL="0">
+              <a:buNone/>
+            </a:pPr>
+            <a:r>
+              <a:rPr lang="en-US" sz="1000" b="1" dirty="0">
+                <a:solidFill>
+                  <a:srgbClr val="38A169"/>
+                </a:solidFill>
+                <a:latin typeface="Calibri" pitchFamily="34" charset="0"/>
+                <a:ea typeface="Calibri" pitchFamily="34" charset="-122"/>
+                <a:cs typeface="Calibri" pitchFamily="34" charset="-120"/>
+              </a:rPr>
+              <a:t>Asynchrone (NiFi)</a:t>
+            </a:r>
+            <a:endParaRPr lang="en-US" sz="1000" dirty="0"/>
+          </a:p>
+        </p:txBody>
+      </p:sp>
+      <p:sp>
+        <p:nvSpPr>
+          <p:cNvPr id="33" name="Shape 31"/>
+          <p:cNvSpPr/>
+          <p:nvPr/>
+        </p:nvSpPr>
+        <p:spPr>
+          <a:xfrm>
+            <a:off x="274320" y="3739896"/>
+            <a:ext cx="8549640" cy="256032"/>
+          </a:xfrm>
+          <a:prstGeom prst="rect">
+            <a:avLst/>
+          </a:prstGeom>
+          <a:solidFill>
+            <a:srgbClr val="FFFFFF"/>
+          </a:solidFill>
+          <a:ln/>
+        </p:spPr>
+      </p:sp>
+      <p:sp>
+        <p:nvSpPr>
+          <p:cNvPr id="34" name="Text 32"/>
+          <p:cNvSpPr/>
+          <p:nvPr/>
+        </p:nvSpPr>
+        <p:spPr>
+          <a:xfrm>
+            <a:off x="320040" y="3739896"/>
+            <a:ext cx="2834640" cy="256032"/>
+          </a:xfrm>
+          <a:prstGeom prst="rect">
+            <a:avLst/>
+          </a:prstGeom>
+          <a:noFill/>
+          <a:ln/>
+        </p:spPr>
+        <p:txBody>
+          <a:bodyPr wrap="square" lIns="0" tIns="0" rIns="0" bIns="0" rtlCol="0" anchor="ctr"/>
+          <a:lstStyle/>
+          <a:p>
+            <a:pPr indent="0" marL="0">
+              <a:buNone/>
+            </a:pPr>
+            <a:r>
+              <a:rPr lang="en-US" sz="900" b="1" dirty="0">
+                <a:solidFill>
+                  <a:srgbClr val="021B3A"/>
+                </a:solidFill>
+                <a:latin typeface="Calibri" pitchFamily="34" charset="0"/>
+                <a:ea typeface="Calibri" pitchFamily="34" charset="-122"/>
+                <a:cs typeface="Calibri" pitchFamily="34" charset="-120"/>
+              </a:rPr>
+              <a:t>Le producteur attend-il ?</a:t>
+            </a:r>
+            <a:endParaRPr lang="en-US" sz="900" dirty="0"/>
+          </a:p>
+        </p:txBody>
+      </p:sp>
+      <p:sp>
+        <p:nvSpPr>
+          <p:cNvPr id="35" name="Text 33"/>
+          <p:cNvSpPr/>
+          <p:nvPr/>
+        </p:nvSpPr>
+        <p:spPr>
+          <a:xfrm>
+            <a:off x="3218688" y="3739896"/>
+            <a:ext cx="2615184" cy="256032"/>
+          </a:xfrm>
+          <a:prstGeom prst="rect">
+            <a:avLst/>
+          </a:prstGeom>
+          <a:noFill/>
+          <a:ln/>
+        </p:spPr>
+        <p:txBody>
+          <a:bodyPr wrap="square" lIns="0" tIns="0" rIns="0" bIns="0" rtlCol="0" anchor="ctr"/>
+          <a:lstStyle/>
+          <a:p>
+            <a:pPr algn="ctr" indent="0" marL="0">
+              <a:buNone/>
+            </a:pPr>
+            <a:r>
+              <a:rPr lang="en-US" sz="900" dirty="0">
+                <a:solidFill>
+                  <a:srgbClr val="021B3A"/>
+                </a:solidFill>
+                <a:latin typeface="Calibri" pitchFamily="34" charset="0"/>
+                <a:ea typeface="Calibri" pitchFamily="34" charset="-122"/>
+                <a:cs typeface="Calibri" pitchFamily="34" charset="-120"/>
+              </a:rPr>
+              <a:t>✅ Oui, bloqué</a:t>
+            </a:r>
+            <a:endParaRPr lang="en-US" sz="900" dirty="0"/>
+          </a:p>
+        </p:txBody>
+      </p:sp>
+      <p:sp>
+        <p:nvSpPr>
+          <p:cNvPr id="36" name="Text 34"/>
+          <p:cNvSpPr/>
+          <p:nvPr/>
+        </p:nvSpPr>
+        <p:spPr>
+          <a:xfrm>
+            <a:off x="5870448" y="3739896"/>
+            <a:ext cx="2935224" cy="256032"/>
+          </a:xfrm>
+          <a:prstGeom prst="rect">
+            <a:avLst/>
+          </a:prstGeom>
+          <a:noFill/>
+          <a:ln/>
+        </p:spPr>
+        <p:txBody>
+          <a:bodyPr wrap="square" lIns="0" tIns="0" rIns="0" bIns="0" rtlCol="0" anchor="ctr"/>
+          <a:lstStyle/>
+          <a:p>
+            <a:pPr algn="ctr" indent="0" marL="0">
+              <a:buNone/>
+            </a:pPr>
+            <a:r>
+              <a:rPr lang="en-US" sz="900" dirty="0">
+                <a:solidFill>
+                  <a:srgbClr val="021B3A"/>
+                </a:solidFill>
+                <a:latin typeface="Calibri" pitchFamily="34" charset="0"/>
+                <a:ea typeface="Calibri" pitchFamily="34" charset="-122"/>
+                <a:cs typeface="Calibri" pitchFamily="34" charset="-120"/>
+              </a:rPr>
+              <a:t>❌ Non, continue immédiatement</a:t>
+            </a:r>
+            <a:endParaRPr lang="en-US" sz="900" dirty="0"/>
+          </a:p>
+        </p:txBody>
+      </p:sp>
+      <p:sp>
+        <p:nvSpPr>
+          <p:cNvPr id="37" name="Shape 35"/>
+          <p:cNvSpPr/>
+          <p:nvPr/>
+        </p:nvSpPr>
+        <p:spPr>
+          <a:xfrm>
+            <a:off x="274320" y="4014216"/>
+            <a:ext cx="8549640" cy="256032"/>
+          </a:xfrm>
+          <a:prstGeom prst="rect">
+            <a:avLst/>
+          </a:prstGeom>
+          <a:solidFill>
+            <a:srgbClr val="F0F4F8"/>
+          </a:solidFill>
+          <a:ln/>
+        </p:spPr>
+      </p:sp>
+      <p:sp>
+        <p:nvSpPr>
+          <p:cNvPr id="38" name="Text 36"/>
+          <p:cNvSpPr/>
+          <p:nvPr/>
+        </p:nvSpPr>
+        <p:spPr>
+          <a:xfrm>
+            <a:off x="320040" y="4014216"/>
+            <a:ext cx="2834640" cy="256032"/>
+          </a:xfrm>
+          <a:prstGeom prst="rect">
+            <a:avLst/>
+          </a:prstGeom>
+          <a:noFill/>
+          <a:ln/>
+        </p:spPr>
+        <p:txBody>
+          <a:bodyPr wrap="square" lIns="0" tIns="0" rIns="0" bIns="0" rtlCol="0" anchor="ctr"/>
+          <a:lstStyle/>
+          <a:p>
+            <a:pPr indent="0" marL="0">
+              <a:buNone/>
+            </a:pPr>
+            <a:r>
+              <a:rPr lang="en-US" sz="900" b="1" dirty="0">
+                <a:solidFill>
+                  <a:srgbClr val="021B3A"/>
+                </a:solidFill>
+                <a:latin typeface="Calibri" pitchFamily="34" charset="0"/>
+                <a:ea typeface="Calibri" pitchFamily="34" charset="-122"/>
+                <a:cs typeface="Calibri" pitchFamily="34" charset="-120"/>
+              </a:rPr>
+              <a:t>Confirmation succès immédiate ?</a:t>
+            </a:r>
+            <a:endParaRPr lang="en-US" sz="900" dirty="0"/>
+          </a:p>
+        </p:txBody>
+      </p:sp>
+      <p:sp>
+        <p:nvSpPr>
+          <p:cNvPr id="39" name="Text 37"/>
+          <p:cNvSpPr/>
+          <p:nvPr/>
+        </p:nvSpPr>
+        <p:spPr>
+          <a:xfrm>
+            <a:off x="3218688" y="4014216"/>
+            <a:ext cx="2615184" cy="256032"/>
+          </a:xfrm>
+          <a:prstGeom prst="rect">
+            <a:avLst/>
+          </a:prstGeom>
+          <a:noFill/>
+          <a:ln/>
+        </p:spPr>
+        <p:txBody>
+          <a:bodyPr wrap="square" lIns="0" tIns="0" rIns="0" bIns="0" rtlCol="0" anchor="ctr"/>
+          <a:lstStyle/>
+          <a:p>
+            <a:pPr algn="ctr" indent="0" marL="0">
+              <a:buNone/>
+            </a:pPr>
+            <a:r>
+              <a:rPr lang="en-US" sz="900" dirty="0">
+                <a:solidFill>
+                  <a:srgbClr val="021B3A"/>
+                </a:solidFill>
+                <a:latin typeface="Calibri" pitchFamily="34" charset="0"/>
+                <a:ea typeface="Calibri" pitchFamily="34" charset="-122"/>
+                <a:cs typeface="Calibri" pitchFamily="34" charset="-120"/>
+              </a:rPr>
+              <a:t>✅ Oui, dans la réponse</a:t>
+            </a:r>
+            <a:endParaRPr lang="en-US" sz="900" dirty="0"/>
+          </a:p>
+        </p:txBody>
+      </p:sp>
+      <p:sp>
+        <p:nvSpPr>
+          <p:cNvPr id="40" name="Text 38"/>
+          <p:cNvSpPr/>
+          <p:nvPr/>
+        </p:nvSpPr>
+        <p:spPr>
+          <a:xfrm>
+            <a:off x="5870448" y="4014216"/>
+            <a:ext cx="2935224" cy="256032"/>
+          </a:xfrm>
+          <a:prstGeom prst="rect">
+            <a:avLst/>
+          </a:prstGeom>
+          <a:noFill/>
+          <a:ln/>
+        </p:spPr>
+        <p:txBody>
+          <a:bodyPr wrap="square" lIns="0" tIns="0" rIns="0" bIns="0" rtlCol="0" anchor="ctr"/>
+          <a:lstStyle/>
+          <a:p>
+            <a:pPr algn="ctr" indent="0" marL="0">
+              <a:buNone/>
+            </a:pPr>
+            <a:r>
+              <a:rPr lang="en-US" sz="900" dirty="0">
+                <a:solidFill>
+                  <a:srgbClr val="021B3A"/>
+                </a:solidFill>
+                <a:latin typeface="Calibri" pitchFamily="34" charset="0"/>
+                <a:ea typeface="Calibri" pitchFamily="34" charset="-122"/>
+                <a:cs typeface="Calibri" pitchFamily="34" charset="-120"/>
+              </a:rPr>
+              <a:t>❌ Non, ultérieure ou jamais</a:t>
+            </a:r>
+            <a:endParaRPr lang="en-US" sz="900" dirty="0"/>
+          </a:p>
+        </p:txBody>
+      </p:sp>
+      <p:sp>
+        <p:nvSpPr>
+          <p:cNvPr id="41" name="Shape 39"/>
+          <p:cNvSpPr/>
+          <p:nvPr/>
+        </p:nvSpPr>
+        <p:spPr>
+          <a:xfrm>
+            <a:off x="274320" y="4288536"/>
+            <a:ext cx="8549640" cy="256032"/>
+          </a:xfrm>
+          <a:prstGeom prst="rect">
+            <a:avLst/>
+          </a:prstGeom>
+          <a:solidFill>
+            <a:srgbClr val="FFFFFF"/>
+          </a:solidFill>
+          <a:ln/>
+        </p:spPr>
+      </p:sp>
+      <p:sp>
+        <p:nvSpPr>
+          <p:cNvPr id="42" name="Text 40"/>
+          <p:cNvSpPr/>
+          <p:nvPr/>
+        </p:nvSpPr>
+        <p:spPr>
+          <a:xfrm>
+            <a:off x="320040" y="4288536"/>
+            <a:ext cx="2834640" cy="256032"/>
+          </a:xfrm>
+          <a:prstGeom prst="rect">
+            <a:avLst/>
+          </a:prstGeom>
+          <a:noFill/>
+          <a:ln/>
+        </p:spPr>
+        <p:txBody>
+          <a:bodyPr wrap="square" lIns="0" tIns="0" rIns="0" bIns="0" rtlCol="0" anchor="ctr"/>
+          <a:lstStyle/>
+          <a:p>
+            <a:pPr indent="0" marL="0">
+              <a:buNone/>
+            </a:pPr>
+            <a:r>
+              <a:rPr lang="en-US" sz="900" b="1" dirty="0">
+                <a:solidFill>
+                  <a:srgbClr val="021B3A"/>
+                </a:solidFill>
+                <a:latin typeface="Calibri" pitchFamily="34" charset="0"/>
+                <a:ea typeface="Calibri" pitchFamily="34" charset="-122"/>
+                <a:cs typeface="Calibri" pitchFamily="34" charset="-120"/>
+              </a:rPr>
+              <a:t>Adapté au débit massif ?</a:t>
+            </a:r>
+            <a:endParaRPr lang="en-US" sz="900" dirty="0"/>
+          </a:p>
+        </p:txBody>
+      </p:sp>
+      <p:sp>
+        <p:nvSpPr>
+          <p:cNvPr id="43" name="Text 41"/>
+          <p:cNvSpPr/>
+          <p:nvPr/>
+        </p:nvSpPr>
+        <p:spPr>
+          <a:xfrm>
+            <a:off x="3218688" y="4288536"/>
+            <a:ext cx="2615184" cy="256032"/>
+          </a:xfrm>
+          <a:prstGeom prst="rect">
+            <a:avLst/>
+          </a:prstGeom>
+          <a:noFill/>
+          <a:ln/>
+        </p:spPr>
+        <p:txBody>
+          <a:bodyPr wrap="square" lIns="0" tIns="0" rIns="0" bIns="0" rtlCol="0" anchor="ctr"/>
+          <a:lstStyle/>
+          <a:p>
+            <a:pPr algn="ctr" indent="0" marL="0">
+              <a:buNone/>
+            </a:pPr>
+            <a:r>
+              <a:rPr lang="en-US" sz="900" dirty="0">
+                <a:solidFill>
+                  <a:srgbClr val="021B3A"/>
+                </a:solidFill>
+                <a:latin typeface="Calibri" pitchFamily="34" charset="0"/>
+                <a:ea typeface="Calibri" pitchFamily="34" charset="-122"/>
+                <a:cs typeface="Calibri" pitchFamily="34" charset="-120"/>
+              </a:rPr>
+              <a:t>⚠️ Limité</a:t>
+            </a:r>
+            <a:endParaRPr lang="en-US" sz="900" dirty="0"/>
+          </a:p>
+        </p:txBody>
+      </p:sp>
+      <p:sp>
+        <p:nvSpPr>
+          <p:cNvPr id="44" name="Text 42"/>
+          <p:cNvSpPr/>
+          <p:nvPr/>
+        </p:nvSpPr>
+        <p:spPr>
+          <a:xfrm>
+            <a:off x="5870448" y="4288536"/>
+            <a:ext cx="2935224" cy="256032"/>
+          </a:xfrm>
+          <a:prstGeom prst="rect">
+            <a:avLst/>
+          </a:prstGeom>
+          <a:noFill/>
+          <a:ln/>
+        </p:spPr>
+        <p:txBody>
+          <a:bodyPr wrap="square" lIns="0" tIns="0" rIns="0" bIns="0" rtlCol="0" anchor="ctr"/>
+          <a:lstStyle/>
+          <a:p>
+            <a:pPr algn="ctr" indent="0" marL="0">
+              <a:buNone/>
+            </a:pPr>
+            <a:r>
+              <a:rPr lang="en-US" sz="900" dirty="0">
+                <a:solidFill>
+                  <a:srgbClr val="021B3A"/>
+                </a:solidFill>
+                <a:latin typeface="Calibri" pitchFamily="34" charset="0"/>
+                <a:ea typeface="Calibri" pitchFamily="34" charset="-122"/>
+                <a:cs typeface="Calibri" pitchFamily="34" charset="-120"/>
+              </a:rPr>
+              <a:t>✅ Natif</a:t>
+            </a:r>
+            <a:endParaRPr lang="en-US" sz="900" dirty="0"/>
+          </a:p>
+        </p:txBody>
+      </p:sp>
+      <p:sp>
+        <p:nvSpPr>
+          <p:cNvPr id="45" name="Shape 43"/>
+          <p:cNvSpPr/>
+          <p:nvPr/>
+        </p:nvSpPr>
+        <p:spPr>
+          <a:xfrm>
+            <a:off x="274320" y="4562856"/>
+            <a:ext cx="8549640" cy="256032"/>
+          </a:xfrm>
+          <a:prstGeom prst="rect">
+            <a:avLst/>
+          </a:prstGeom>
+          <a:solidFill>
+            <a:srgbClr val="F0F4F8"/>
+          </a:solidFill>
+          <a:ln/>
+        </p:spPr>
+      </p:sp>
+      <p:sp>
+        <p:nvSpPr>
+          <p:cNvPr id="46" name="Text 44"/>
+          <p:cNvSpPr/>
+          <p:nvPr/>
+        </p:nvSpPr>
+        <p:spPr>
+          <a:xfrm>
+            <a:off x="320040" y="4562856"/>
+            <a:ext cx="2834640" cy="256032"/>
+          </a:xfrm>
+          <a:prstGeom prst="rect">
+            <a:avLst/>
+          </a:prstGeom>
+          <a:noFill/>
+          <a:ln/>
+        </p:spPr>
+        <p:txBody>
+          <a:bodyPr wrap="square" lIns="0" tIns="0" rIns="0" bIns="0" rtlCol="0" anchor="ctr"/>
+          <a:lstStyle/>
+          <a:p>
+            <a:pPr indent="0" marL="0">
+              <a:buNone/>
+            </a:pPr>
+            <a:r>
+              <a:rPr lang="en-US" sz="900" b="1" dirty="0">
+                <a:solidFill>
+                  <a:srgbClr val="021B3A"/>
+                </a:solidFill>
+                <a:latin typeface="Calibri" pitchFamily="34" charset="0"/>
+                <a:ea typeface="Calibri" pitchFamily="34" charset="-122"/>
+                <a:cs typeface="Calibri" pitchFamily="34" charset="-120"/>
+              </a:rPr>
+              <a:t>Adapté au request/response ?</a:t>
+            </a:r>
+            <a:endParaRPr lang="en-US" sz="900" dirty="0"/>
+          </a:p>
+        </p:txBody>
+      </p:sp>
+      <p:sp>
+        <p:nvSpPr>
+          <p:cNvPr id="47" name="Text 45"/>
+          <p:cNvSpPr/>
+          <p:nvPr/>
+        </p:nvSpPr>
+        <p:spPr>
+          <a:xfrm>
+            <a:off x="3218688" y="4562856"/>
+            <a:ext cx="2615184" cy="256032"/>
+          </a:xfrm>
+          <a:prstGeom prst="rect">
+            <a:avLst/>
+          </a:prstGeom>
+          <a:noFill/>
+          <a:ln/>
+        </p:spPr>
+        <p:txBody>
+          <a:bodyPr wrap="square" lIns="0" tIns="0" rIns="0" bIns="0" rtlCol="0" anchor="ctr"/>
+          <a:lstStyle/>
+          <a:p>
+            <a:pPr algn="ctr" indent="0" marL="0">
+              <a:buNone/>
+            </a:pPr>
+            <a:r>
+              <a:rPr lang="en-US" sz="900" dirty="0">
+                <a:solidFill>
+                  <a:srgbClr val="021B3A"/>
+                </a:solidFill>
+                <a:latin typeface="Calibri" pitchFamily="34" charset="0"/>
+                <a:ea typeface="Calibri" pitchFamily="34" charset="-122"/>
+                <a:cs typeface="Calibri" pitchFamily="34" charset="-120"/>
+              </a:rPr>
+              <a:t>✅ Natif</a:t>
+            </a:r>
+            <a:endParaRPr lang="en-US" sz="900" dirty="0"/>
+          </a:p>
+        </p:txBody>
+      </p:sp>
+      <p:sp>
+        <p:nvSpPr>
+          <p:cNvPr id="48" name="Text 46"/>
+          <p:cNvSpPr/>
+          <p:nvPr/>
+        </p:nvSpPr>
+        <p:spPr>
+          <a:xfrm>
+            <a:off x="5870448" y="4562856"/>
+            <a:ext cx="2935224" cy="256032"/>
+          </a:xfrm>
+          <a:prstGeom prst="rect">
+            <a:avLst/>
+          </a:prstGeom>
+          <a:noFill/>
+          <a:ln/>
+        </p:spPr>
+        <p:txBody>
+          <a:bodyPr wrap="square" lIns="0" tIns="0" rIns="0" bIns="0" rtlCol="0" anchor="ctr"/>
+          <a:lstStyle/>
+          <a:p>
+            <a:pPr algn="ctr" indent="0" marL="0">
+              <a:buNone/>
+            </a:pPr>
+            <a:r>
+              <a:rPr lang="en-US" sz="900" dirty="0">
+                <a:solidFill>
+                  <a:srgbClr val="021B3A"/>
+                </a:solidFill>
+                <a:latin typeface="Calibri" pitchFamily="34" charset="0"/>
+                <a:ea typeface="Calibri" pitchFamily="34" charset="-122"/>
+                <a:cs typeface="Calibri" pitchFamily="34" charset="-120"/>
+              </a:rPr>
+              <a:t>❌ Artificiel et fragile</a:t>
+            </a:r>
+            <a:endParaRPr lang="en-US" sz="900" dirty="0"/>
           </a:p>
         </p:txBody>
       </p:sp>
